--- a/Sistema de vuelos.pptx
+++ b/Sistema de vuelos.pptx
@@ -1,23 +1,24 @@
 
 <file path=ppt/presentation.xml><?xml version="1.0" encoding="utf-8"?>
-<p:presentation xmlns:a="http://schemas.openxmlformats.org/drawingml/2006/main" xmlns:r="http://schemas.openxmlformats.org/officeDocument/2006/relationships" xmlns:mc="http://schemas.openxmlformats.org/markup-compatibility/2006" xmlns:mv="urn:schemas-microsoft-com:mac:vml" xmlns:p="http://schemas.openxmlformats.org/presentationml/2006/main" xmlns:c="http://schemas.openxmlformats.org/drawingml/2006/chart" xmlns:dgm="http://schemas.openxmlformats.org/drawingml/2006/diagram" xmlns:o="urn:schemas-microsoft-com:office:office" xmlns:v="urn:schemas-microsoft-com:vml" xmlns:pvml="urn:schemas-microsoft-com:office:powerpoint" xmlns:com="http://schemas.openxmlformats.org/drawingml/2006/compatibility" xmlns:p14="http://schemas.microsoft.com/office/powerpoint/2010/main" xmlns:p15="http://schemas.microsoft.com/office/powerpoint/2012/main" xmlns:ahyp="http://schemas.microsoft.com/office/drawing/2018/hyperlinkcolor" autoCompressPictures="0" strictFirstAndLastChars="0" saveSubsetFonts="1">
+<p:presentation xmlns:a="http://schemas.openxmlformats.org/drawingml/2006/main" xmlns:r="http://schemas.openxmlformats.org/officeDocument/2006/relationships" xmlns:p="http://schemas.openxmlformats.org/presentationml/2006/main" strictFirstAndLastChars="0" saveSubsetFonts="1" autoCompressPictures="0">
   <p:sldMasterIdLst>
-    <p:sldMasterId id="2147483659" r:id="rId4"/>
+    <p:sldMasterId id="2147483659" r:id="rId1"/>
   </p:sldMasterIdLst>
   <p:notesMasterIdLst>
-    <p:notesMasterId r:id="rId5"/>
+    <p:notesMasterId r:id="rId8"/>
   </p:notesMasterIdLst>
   <p:sldIdLst>
-    <p:sldId id="256" r:id="rId6"/>
-    <p:sldId id="257" r:id="rId7"/>
-    <p:sldId id="258" r:id="rId8"/>
-    <p:sldId id="259" r:id="rId9"/>
-    <p:sldId id="260" r:id="rId10"/>
+    <p:sldId id="256" r:id="rId2"/>
+    <p:sldId id="257" r:id="rId3"/>
+    <p:sldId id="258" r:id="rId4"/>
+    <p:sldId id="259" r:id="rId5"/>
+    <p:sldId id="260" r:id="rId6"/>
+    <p:sldId id="261" r:id="rId7"/>
   </p:sldIdLst>
-  <p:sldSz cy="5143500" cx="9144000"/>
+  <p:sldSz cx="9144000" cy="5143500" type="screen16x9"/>
   <p:notesSz cx="6858000" cy="9144000"/>
   <p:defaultTextStyle>
-    <a:defPPr lvl="0" marR="0" rtl="0" algn="l">
+    <a:defPPr marR="0" lvl="0" algn="l" rtl="0">
       <a:lnSpc>
         <a:spcPct val="100000"/>
       </a:lnSpc>
@@ -28,7 +29,7 @@
         <a:spcPts val="0"/>
       </a:spcAft>
     </a:defPPr>
-    <a:lvl1pPr lvl="0" marR="0" rtl="0" algn="l">
+    <a:lvl1pPr marR="0" lvl="0" algn="l" rtl="0">
       <a:lnSpc>
         <a:spcPct val="100000"/>
       </a:lnSpc>
@@ -42,7 +43,7 @@
         <a:srgbClr val="000000"/>
       </a:buClr>
       <a:buFont typeface="Arial"/>
-      <a:defRPr b="0" i="0" sz="1400" u="none" cap="none" strike="noStrike">
+      <a:defRPr sz="1400" b="0" i="0" u="none" strike="noStrike" cap="none">
         <a:solidFill>
           <a:srgbClr val="000000"/>
         </a:solidFill>
@@ -52,7 +53,7 @@
         <a:sym typeface="Arial"/>
       </a:defRPr>
     </a:lvl1pPr>
-    <a:lvl2pPr lvl="1" marR="0" rtl="0" algn="l">
+    <a:lvl2pPr marR="0" lvl="1" algn="l" rtl="0">
       <a:lnSpc>
         <a:spcPct val="100000"/>
       </a:lnSpc>
@@ -66,7 +67,7 @@
         <a:srgbClr val="000000"/>
       </a:buClr>
       <a:buFont typeface="Arial"/>
-      <a:defRPr b="0" i="0" sz="1400" u="none" cap="none" strike="noStrike">
+      <a:defRPr sz="1400" b="0" i="0" u="none" strike="noStrike" cap="none">
         <a:solidFill>
           <a:srgbClr val="000000"/>
         </a:solidFill>
@@ -76,7 +77,7 @@
         <a:sym typeface="Arial"/>
       </a:defRPr>
     </a:lvl2pPr>
-    <a:lvl3pPr lvl="2" marR="0" rtl="0" algn="l">
+    <a:lvl3pPr marR="0" lvl="2" algn="l" rtl="0">
       <a:lnSpc>
         <a:spcPct val="100000"/>
       </a:lnSpc>
@@ -90,7 +91,7 @@
         <a:srgbClr val="000000"/>
       </a:buClr>
       <a:buFont typeface="Arial"/>
-      <a:defRPr b="0" i="0" sz="1400" u="none" cap="none" strike="noStrike">
+      <a:defRPr sz="1400" b="0" i="0" u="none" strike="noStrike" cap="none">
         <a:solidFill>
           <a:srgbClr val="000000"/>
         </a:solidFill>
@@ -100,7 +101,7 @@
         <a:sym typeface="Arial"/>
       </a:defRPr>
     </a:lvl3pPr>
-    <a:lvl4pPr lvl="3" marR="0" rtl="0" algn="l">
+    <a:lvl4pPr marR="0" lvl="3" algn="l" rtl="0">
       <a:lnSpc>
         <a:spcPct val="100000"/>
       </a:lnSpc>
@@ -114,7 +115,7 @@
         <a:srgbClr val="000000"/>
       </a:buClr>
       <a:buFont typeface="Arial"/>
-      <a:defRPr b="0" i="0" sz="1400" u="none" cap="none" strike="noStrike">
+      <a:defRPr sz="1400" b="0" i="0" u="none" strike="noStrike" cap="none">
         <a:solidFill>
           <a:srgbClr val="000000"/>
         </a:solidFill>
@@ -124,7 +125,7 @@
         <a:sym typeface="Arial"/>
       </a:defRPr>
     </a:lvl4pPr>
-    <a:lvl5pPr lvl="4" marR="0" rtl="0" algn="l">
+    <a:lvl5pPr marR="0" lvl="4" algn="l" rtl="0">
       <a:lnSpc>
         <a:spcPct val="100000"/>
       </a:lnSpc>
@@ -138,7 +139,7 @@
         <a:srgbClr val="000000"/>
       </a:buClr>
       <a:buFont typeface="Arial"/>
-      <a:defRPr b="0" i="0" sz="1400" u="none" cap="none" strike="noStrike">
+      <a:defRPr sz="1400" b="0" i="0" u="none" strike="noStrike" cap="none">
         <a:solidFill>
           <a:srgbClr val="000000"/>
         </a:solidFill>
@@ -148,7 +149,7 @@
         <a:sym typeface="Arial"/>
       </a:defRPr>
     </a:lvl5pPr>
-    <a:lvl6pPr lvl="5" marR="0" rtl="0" algn="l">
+    <a:lvl6pPr marR="0" lvl="5" algn="l" rtl="0">
       <a:lnSpc>
         <a:spcPct val="100000"/>
       </a:lnSpc>
@@ -162,7 +163,7 @@
         <a:srgbClr val="000000"/>
       </a:buClr>
       <a:buFont typeface="Arial"/>
-      <a:defRPr b="0" i="0" sz="1400" u="none" cap="none" strike="noStrike">
+      <a:defRPr sz="1400" b="0" i="0" u="none" strike="noStrike" cap="none">
         <a:solidFill>
           <a:srgbClr val="000000"/>
         </a:solidFill>
@@ -172,7 +173,7 @@
         <a:sym typeface="Arial"/>
       </a:defRPr>
     </a:lvl6pPr>
-    <a:lvl7pPr lvl="6" marR="0" rtl="0" algn="l">
+    <a:lvl7pPr marR="0" lvl="6" algn="l" rtl="0">
       <a:lnSpc>
         <a:spcPct val="100000"/>
       </a:lnSpc>
@@ -186,7 +187,7 @@
         <a:srgbClr val="000000"/>
       </a:buClr>
       <a:buFont typeface="Arial"/>
-      <a:defRPr b="0" i="0" sz="1400" u="none" cap="none" strike="noStrike">
+      <a:defRPr sz="1400" b="0" i="0" u="none" strike="noStrike" cap="none">
         <a:solidFill>
           <a:srgbClr val="000000"/>
         </a:solidFill>
@@ -196,7 +197,7 @@
         <a:sym typeface="Arial"/>
       </a:defRPr>
     </a:lvl7pPr>
-    <a:lvl8pPr lvl="7" marR="0" rtl="0" algn="l">
+    <a:lvl8pPr marR="0" lvl="7" algn="l" rtl="0">
       <a:lnSpc>
         <a:spcPct val="100000"/>
       </a:lnSpc>
@@ -210,7 +211,7 @@
         <a:srgbClr val="000000"/>
       </a:buClr>
       <a:buFont typeface="Arial"/>
-      <a:defRPr b="0" i="0" sz="1400" u="none" cap="none" strike="noStrike">
+      <a:defRPr sz="1400" b="0" i="0" u="none" strike="noStrike" cap="none">
         <a:solidFill>
           <a:srgbClr val="000000"/>
         </a:solidFill>
@@ -220,7 +221,7 @@
         <a:sym typeface="Arial"/>
       </a:defRPr>
     </a:lvl8pPr>
-    <a:lvl9pPr lvl="8" marR="0" rtl="0" algn="l">
+    <a:lvl9pPr marR="0" lvl="8" algn="l" rtl="0">
       <a:lnSpc>
         <a:spcPct val="100000"/>
       </a:lnSpc>
@@ -234,7 +235,7 @@
         <a:srgbClr val="000000"/>
       </a:buClr>
       <a:buFont typeface="Arial"/>
-      <a:defRPr b="0" i="0" sz="1400" u="none" cap="none" strike="noStrike">
+      <a:defRPr sz="1400" b="0" i="0" u="none" strike="noStrike" cap="none">
         <a:solidFill>
           <a:srgbClr val="000000"/>
         </a:solidFill>
@@ -247,7 +248,7 @@
   </p:defaultTextStyle>
   <p:extLst>
     <p:ext uri="{EFAFB233-063F-42B5-8137-9DF3F51BA10A}">
-      <p15:sldGuideLst>
+      <p15:sldGuideLst xmlns:p15="http://schemas.microsoft.com/office/powerpoint/2012/main">
         <p15:guide id="1" orient="horz" pos="1620">
           <p15:clr>
             <a:srgbClr val="747775"/>
@@ -265,11 +266,16 @@
 </file>
 
 <file path=ppt/notesMasters/notesMaster1.xml><?xml version="1.0" encoding="utf-8"?>
-<p:notesMaster xmlns:a="http://schemas.openxmlformats.org/drawingml/2006/main" xmlns:r="http://schemas.openxmlformats.org/officeDocument/2006/relationships" xmlns:mc="http://schemas.openxmlformats.org/markup-compatibility/2006" xmlns:mv="urn:schemas-microsoft-com:mac:vml" xmlns:p="http://schemas.openxmlformats.org/presentationml/2006/main" xmlns:c="http://schemas.openxmlformats.org/drawingml/2006/chart" xmlns:dgm="http://schemas.openxmlformats.org/drawingml/2006/diagram" xmlns:o="urn:schemas-microsoft-com:office:office" xmlns:v="urn:schemas-microsoft-com:vml" xmlns:pvml="urn:schemas-microsoft-com:office:powerpoint" xmlns:com="http://schemas.openxmlformats.org/drawingml/2006/compatibility" xmlns:p14="http://schemas.microsoft.com/office/powerpoint/2010/main" xmlns:p15="http://schemas.microsoft.com/office/powerpoint/2012/main" xmlns:ahyp="http://schemas.microsoft.com/office/drawing/2018/hyperlinkcolor">
+<p:notesMaster xmlns:a="http://schemas.openxmlformats.org/drawingml/2006/main" xmlns:r="http://schemas.openxmlformats.org/officeDocument/2006/relationships" xmlns:p="http://schemas.openxmlformats.org/presentationml/2006/main">
   <p:cSld>
+    <p:bg>
+      <p:bgRef idx="1001">
+        <a:schemeClr val="bg1"/>
+      </p:bgRef>
+    </p:bg>
     <p:spTree>
       <p:nvGrpSpPr>
-        <p:cNvPr id="2" name="Shape 2"/>
+        <p:cNvPr id="1" name="Shape 2"/>
         <p:cNvGrpSpPr/>
         <p:nvPr/>
       </p:nvGrpSpPr>
@@ -284,9 +290,11 @@
       <p:sp>
         <p:nvSpPr>
           <p:cNvPr id="3" name="Google Shape;3;n"/>
-          <p:cNvSpPr/>
+          <p:cNvSpPr>
+            <a:spLocks noGrp="1" noRot="1" noChangeAspect="1"/>
+          </p:cNvSpPr>
           <p:nvPr>
-            <p:ph idx="2" type="sldImg"/>
+            <p:ph type="sldImg" idx="2"/>
           </p:nvPr>
         </p:nvSpPr>
         <p:spPr>
@@ -295,9 +303,13 @@
             <a:ext cx="6096075" cy="3429000"/>
           </a:xfrm>
           <a:custGeom>
-            <a:rect b="b" l="l" r="r" t="t"/>
+            <a:avLst/>
+            <a:gdLst/>
+            <a:ahLst/>
+            <a:cxnLst/>
+            <a:rect l="l" t="t" r="r" b="b"/>
             <a:pathLst>
-              <a:path extrusionOk="0" h="120000" w="120000">
+              <a:path w="120000" h="120000" extrusionOk="0">
                 <a:moveTo>
                   <a:pt x="0" y="0"/>
                 </a:moveTo>
@@ -315,23 +327,25 @@
             </a:pathLst>
           </a:custGeom>
           <a:noFill/>
-          <a:ln cap="flat" cmpd="sng" w="9525">
+          <a:ln w="9525" cap="flat" cmpd="sng">
             <a:solidFill>
               <a:srgbClr val="000000"/>
             </a:solidFill>
             <a:prstDash val="solid"/>
             <a:round/>
-            <a:headEnd len="sm" w="sm" type="none"/>
-            <a:tailEnd len="sm" w="sm" type="none"/>
+            <a:headEnd type="none" w="sm" len="sm"/>
+            <a:tailEnd type="none" w="sm" len="sm"/>
           </a:ln>
         </p:spPr>
       </p:sp>
       <p:sp>
         <p:nvSpPr>
           <p:cNvPr id="4" name="Google Shape;4;n"/>
-          <p:cNvSpPr txBox="1"/>
+          <p:cNvSpPr txBox="1">
+            <a:spLocks noGrp="1"/>
+          </p:cNvSpPr>
           <p:nvPr>
-            <p:ph idx="1" type="body"/>
+            <p:ph type="body" idx="1"/>
           </p:nvPr>
         </p:nvSpPr>
         <p:spPr>
@@ -348,11 +362,11 @@
           </a:ln>
         </p:spPr>
         <p:txBody>
-          <a:bodyPr anchorCtr="0" anchor="t" bIns="91425" lIns="91425" spcFirstLastPara="1" rIns="91425" wrap="square" tIns="91425">
+          <a:bodyPr spcFirstLastPara="1" wrap="square" lIns="91425" tIns="91425" rIns="91425" bIns="91425" anchor="t" anchorCtr="0">
             <a:noAutofit/>
           </a:bodyPr>
           <a:lstStyle>
-            <a:lvl1pPr indent="-298450" lvl="0" marL="457200">
+            <a:lvl1pPr marL="457200" lvl="0" indent="-298450">
               <a:spcBef>
                 <a:spcPts val="0"/>
               </a:spcBef>
@@ -363,7 +377,7 @@
               <a:buChar char="●"/>
               <a:defRPr sz="1100"/>
             </a:lvl1pPr>
-            <a:lvl2pPr indent="-298450" lvl="1" marL="914400">
+            <a:lvl2pPr marL="914400" lvl="1" indent="-298450">
               <a:spcBef>
                 <a:spcPts val="0"/>
               </a:spcBef>
@@ -374,7 +388,7 @@
               <a:buChar char="○"/>
               <a:defRPr sz="1100"/>
             </a:lvl2pPr>
-            <a:lvl3pPr indent="-298450" lvl="2" marL="1371600">
+            <a:lvl3pPr marL="1371600" lvl="2" indent="-298450">
               <a:spcBef>
                 <a:spcPts val="0"/>
               </a:spcBef>
@@ -385,7 +399,7 @@
               <a:buChar char="■"/>
               <a:defRPr sz="1100"/>
             </a:lvl3pPr>
-            <a:lvl4pPr indent="-298450" lvl="3" marL="1828800">
+            <a:lvl4pPr marL="1828800" lvl="3" indent="-298450">
               <a:spcBef>
                 <a:spcPts val="0"/>
               </a:spcBef>
@@ -396,7 +410,7 @@
               <a:buChar char="●"/>
               <a:defRPr sz="1100"/>
             </a:lvl4pPr>
-            <a:lvl5pPr indent="-298450" lvl="4" marL="2286000">
+            <a:lvl5pPr marL="2286000" lvl="4" indent="-298450">
               <a:spcBef>
                 <a:spcPts val="0"/>
               </a:spcBef>
@@ -407,7 +421,7 @@
               <a:buChar char="○"/>
               <a:defRPr sz="1100"/>
             </a:lvl5pPr>
-            <a:lvl6pPr indent="-298450" lvl="5" marL="2743200">
+            <a:lvl6pPr marL="2743200" lvl="5" indent="-298450">
               <a:spcBef>
                 <a:spcPts val="0"/>
               </a:spcBef>
@@ -418,7 +432,7 @@
               <a:buChar char="■"/>
               <a:defRPr sz="1100"/>
             </a:lvl6pPr>
-            <a:lvl7pPr indent="-298450" lvl="6" marL="3200400">
+            <a:lvl7pPr marL="3200400" lvl="6" indent="-298450">
               <a:spcBef>
                 <a:spcPts val="0"/>
               </a:spcBef>
@@ -429,7 +443,7 @@
               <a:buChar char="●"/>
               <a:defRPr sz="1100"/>
             </a:lvl7pPr>
-            <a:lvl8pPr indent="-298450" lvl="7" marL="3657600">
+            <a:lvl8pPr marL="3657600" lvl="7" indent="-298450">
               <a:spcBef>
                 <a:spcPts val="0"/>
               </a:spcBef>
@@ -440,7 +454,7 @@
               <a:buChar char="○"/>
               <a:defRPr sz="1100"/>
             </a:lvl8pPr>
-            <a:lvl9pPr indent="-298450" lvl="8" marL="4114800">
+            <a:lvl9pPr marL="4114800" lvl="8" indent="-298450">
               <a:spcBef>
                 <a:spcPts val="0"/>
               </a:spcBef>
@@ -452,14 +466,16 @@
               <a:defRPr sz="1100"/>
             </a:lvl9pPr>
           </a:lstStyle>
-          <a:p/>
+          <a:p>
+            <a:endParaRPr/>
+          </a:p>
         </p:txBody>
       </p:sp>
     </p:spTree>
   </p:cSld>
-  <p:clrMap accent1="accent1" accent2="accent2" accent3="accent3" accent4="accent4" accent5="accent5" accent6="accent6" bg1="lt1" bg2="dk2" tx1="dk1" tx2="lt2" folHlink="folHlink" hlink="hlink"/>
+  <p:clrMap bg1="lt1" tx1="dk1" bg2="dk2" tx2="lt2" accent1="accent1" accent2="accent2" accent3="accent3" accent4="accent4" accent5="accent5" accent6="accent6" hlink="hlink" folHlink="folHlink"/>
   <p:notesStyle>
-    <a:defPPr lvl="0" marR="0" rtl="0" algn="l">
+    <a:defPPr marR="0" lvl="0" algn="l" rtl="0">
       <a:lnSpc>
         <a:spcPct val="100000"/>
       </a:lnSpc>
@@ -470,7 +486,7 @@
         <a:spcPts val="0"/>
       </a:spcAft>
     </a:defPPr>
-    <a:lvl1pPr lvl="0" marR="0" rtl="0" algn="l">
+    <a:lvl1pPr marR="0" lvl="0" algn="l" rtl="0">
       <a:lnSpc>
         <a:spcPct val="100000"/>
       </a:lnSpc>
@@ -484,7 +500,7 @@
         <a:srgbClr val="000000"/>
       </a:buClr>
       <a:buFont typeface="Arial"/>
-      <a:defRPr b="0" i="0" sz="1400" u="none" cap="none" strike="noStrike">
+      <a:defRPr sz="1400" b="0" i="0" u="none" strike="noStrike" cap="none">
         <a:solidFill>
           <a:srgbClr val="000000"/>
         </a:solidFill>
@@ -494,7 +510,7 @@
         <a:sym typeface="Arial"/>
       </a:defRPr>
     </a:lvl1pPr>
-    <a:lvl2pPr lvl="1" marR="0" rtl="0" algn="l">
+    <a:lvl2pPr marR="0" lvl="1" algn="l" rtl="0">
       <a:lnSpc>
         <a:spcPct val="100000"/>
       </a:lnSpc>
@@ -508,7 +524,7 @@
         <a:srgbClr val="000000"/>
       </a:buClr>
       <a:buFont typeface="Arial"/>
-      <a:defRPr b="0" i="0" sz="1400" u="none" cap="none" strike="noStrike">
+      <a:defRPr sz="1400" b="0" i="0" u="none" strike="noStrike" cap="none">
         <a:solidFill>
           <a:srgbClr val="000000"/>
         </a:solidFill>
@@ -518,7 +534,7 @@
         <a:sym typeface="Arial"/>
       </a:defRPr>
     </a:lvl2pPr>
-    <a:lvl3pPr lvl="2" marR="0" rtl="0" algn="l">
+    <a:lvl3pPr marR="0" lvl="2" algn="l" rtl="0">
       <a:lnSpc>
         <a:spcPct val="100000"/>
       </a:lnSpc>
@@ -532,7 +548,7 @@
         <a:srgbClr val="000000"/>
       </a:buClr>
       <a:buFont typeface="Arial"/>
-      <a:defRPr b="0" i="0" sz="1400" u="none" cap="none" strike="noStrike">
+      <a:defRPr sz="1400" b="0" i="0" u="none" strike="noStrike" cap="none">
         <a:solidFill>
           <a:srgbClr val="000000"/>
         </a:solidFill>
@@ -542,7 +558,7 @@
         <a:sym typeface="Arial"/>
       </a:defRPr>
     </a:lvl3pPr>
-    <a:lvl4pPr lvl="3" marR="0" rtl="0" algn="l">
+    <a:lvl4pPr marR="0" lvl="3" algn="l" rtl="0">
       <a:lnSpc>
         <a:spcPct val="100000"/>
       </a:lnSpc>
@@ -556,7 +572,7 @@
         <a:srgbClr val="000000"/>
       </a:buClr>
       <a:buFont typeface="Arial"/>
-      <a:defRPr b="0" i="0" sz="1400" u="none" cap="none" strike="noStrike">
+      <a:defRPr sz="1400" b="0" i="0" u="none" strike="noStrike" cap="none">
         <a:solidFill>
           <a:srgbClr val="000000"/>
         </a:solidFill>
@@ -566,7 +582,7 @@
         <a:sym typeface="Arial"/>
       </a:defRPr>
     </a:lvl4pPr>
-    <a:lvl5pPr lvl="4" marR="0" rtl="0" algn="l">
+    <a:lvl5pPr marR="0" lvl="4" algn="l" rtl="0">
       <a:lnSpc>
         <a:spcPct val="100000"/>
       </a:lnSpc>
@@ -580,7 +596,7 @@
         <a:srgbClr val="000000"/>
       </a:buClr>
       <a:buFont typeface="Arial"/>
-      <a:defRPr b="0" i="0" sz="1400" u="none" cap="none" strike="noStrike">
+      <a:defRPr sz="1400" b="0" i="0" u="none" strike="noStrike" cap="none">
         <a:solidFill>
           <a:srgbClr val="000000"/>
         </a:solidFill>
@@ -590,7 +606,7 @@
         <a:sym typeface="Arial"/>
       </a:defRPr>
     </a:lvl5pPr>
-    <a:lvl6pPr lvl="5" marR="0" rtl="0" algn="l">
+    <a:lvl6pPr marR="0" lvl="5" algn="l" rtl="0">
       <a:lnSpc>
         <a:spcPct val="100000"/>
       </a:lnSpc>
@@ -604,7 +620,7 @@
         <a:srgbClr val="000000"/>
       </a:buClr>
       <a:buFont typeface="Arial"/>
-      <a:defRPr b="0" i="0" sz="1400" u="none" cap="none" strike="noStrike">
+      <a:defRPr sz="1400" b="0" i="0" u="none" strike="noStrike" cap="none">
         <a:solidFill>
           <a:srgbClr val="000000"/>
         </a:solidFill>
@@ -614,7 +630,7 @@
         <a:sym typeface="Arial"/>
       </a:defRPr>
     </a:lvl6pPr>
-    <a:lvl7pPr lvl="6" marR="0" rtl="0" algn="l">
+    <a:lvl7pPr marR="0" lvl="6" algn="l" rtl="0">
       <a:lnSpc>
         <a:spcPct val="100000"/>
       </a:lnSpc>
@@ -628,7 +644,7 @@
         <a:srgbClr val="000000"/>
       </a:buClr>
       <a:buFont typeface="Arial"/>
-      <a:defRPr b="0" i="0" sz="1400" u="none" cap="none" strike="noStrike">
+      <a:defRPr sz="1400" b="0" i="0" u="none" strike="noStrike" cap="none">
         <a:solidFill>
           <a:srgbClr val="000000"/>
         </a:solidFill>
@@ -638,7 +654,7 @@
         <a:sym typeface="Arial"/>
       </a:defRPr>
     </a:lvl7pPr>
-    <a:lvl8pPr lvl="7" marR="0" rtl="0" algn="l">
+    <a:lvl8pPr marR="0" lvl="7" algn="l" rtl="0">
       <a:lnSpc>
         <a:spcPct val="100000"/>
       </a:lnSpc>
@@ -652,7 +668,7 @@
         <a:srgbClr val="000000"/>
       </a:buClr>
       <a:buFont typeface="Arial"/>
-      <a:defRPr b="0" i="0" sz="1400" u="none" cap="none" strike="noStrike">
+      <a:defRPr sz="1400" b="0" i="0" u="none" strike="noStrike" cap="none">
         <a:solidFill>
           <a:srgbClr val="000000"/>
         </a:solidFill>
@@ -662,7 +678,7 @@
         <a:sym typeface="Arial"/>
       </a:defRPr>
     </a:lvl8pPr>
-    <a:lvl9pPr lvl="8" marR="0" rtl="0" algn="l">
+    <a:lvl9pPr marR="0" lvl="8" algn="l" rtl="0">
       <a:lnSpc>
         <a:spcPct val="100000"/>
       </a:lnSpc>
@@ -676,7 +692,7 @@
         <a:srgbClr val="000000"/>
       </a:buClr>
       <a:buFont typeface="Arial"/>
-      <a:defRPr b="0" i="0" sz="1400" u="none" cap="none" strike="noStrike">
+      <a:defRPr sz="1400" b="0" i="0" u="none" strike="noStrike" cap="none">
         <a:solidFill>
           <a:srgbClr val="000000"/>
         </a:solidFill>
@@ -691,11 +707,11 @@
 </file>
 
 <file path=ppt/notesSlides/notesSlide1.xml><?xml version="1.0" encoding="utf-8"?>
-<p:notes xmlns:a="http://schemas.openxmlformats.org/drawingml/2006/main" xmlns:r="http://schemas.openxmlformats.org/officeDocument/2006/relationships" xmlns:mc="http://schemas.openxmlformats.org/markup-compatibility/2006" xmlns:mv="urn:schemas-microsoft-com:mac:vml" xmlns:p="http://schemas.openxmlformats.org/presentationml/2006/main" xmlns:c="http://schemas.openxmlformats.org/drawingml/2006/chart" xmlns:dgm="http://schemas.openxmlformats.org/drawingml/2006/diagram" xmlns:o="urn:schemas-microsoft-com:office:office" xmlns:v="urn:schemas-microsoft-com:vml" xmlns:pvml="urn:schemas-microsoft-com:office:powerpoint" xmlns:com="http://schemas.openxmlformats.org/drawingml/2006/compatibility" xmlns:p14="http://schemas.microsoft.com/office/powerpoint/2010/main" xmlns:p15="http://schemas.microsoft.com/office/powerpoint/2012/main" xmlns:ahyp="http://schemas.microsoft.com/office/drawing/2018/hyperlinkcolor" showMasterPhAnim="0" showMasterSp="0">
+<p:notes xmlns:a="http://schemas.openxmlformats.org/drawingml/2006/main" xmlns:r="http://schemas.openxmlformats.org/officeDocument/2006/relationships" xmlns:p="http://schemas.openxmlformats.org/presentationml/2006/main" showMasterSp="0" showMasterPhAnim="0">
   <p:cSld>
     <p:spTree>
       <p:nvGrpSpPr>
-        <p:cNvPr id="50" name="Shape 50"/>
+        <p:cNvPr id="1" name="Shape 50"/>
         <p:cNvGrpSpPr/>
         <p:nvPr/>
       </p:nvGrpSpPr>
@@ -710,9 +726,11 @@
       <p:sp>
         <p:nvSpPr>
           <p:cNvPr id="51" name="Google Shape;51;p:notes"/>
-          <p:cNvSpPr/>
+          <p:cNvSpPr>
+            <a:spLocks noGrp="1" noRot="1" noChangeAspect="1"/>
+          </p:cNvSpPr>
           <p:nvPr>
-            <p:ph idx="2" type="sldImg"/>
+            <p:ph type="sldImg" idx="2"/>
           </p:nvPr>
         </p:nvSpPr>
         <p:spPr>
@@ -721,9 +739,13 @@
             <a:ext cx="6096075" cy="3429000"/>
           </a:xfrm>
           <a:custGeom>
-            <a:rect b="b" l="l" r="r" t="t"/>
+            <a:avLst/>
+            <a:gdLst/>
+            <a:ahLst/>
+            <a:cxnLst/>
+            <a:rect l="l" t="t" r="r" b="b"/>
             <a:pathLst>
-              <a:path extrusionOk="0" h="120000" w="120000">
+              <a:path w="120000" h="120000" extrusionOk="0">
                 <a:moveTo>
                   <a:pt x="0" y="0"/>
                 </a:moveTo>
@@ -745,9 +767,11 @@
       <p:sp>
         <p:nvSpPr>
           <p:cNvPr id="52" name="Google Shape;52;p:notes"/>
-          <p:cNvSpPr txBox="1"/>
+          <p:cNvSpPr txBox="1">
+            <a:spLocks noGrp="1"/>
+          </p:cNvSpPr>
           <p:nvPr>
-            <p:ph idx="1" type="body"/>
+            <p:ph type="body" idx="1"/>
           </p:nvPr>
         </p:nvSpPr>
         <p:spPr>
@@ -760,12 +784,12 @@
           </a:prstGeom>
         </p:spPr>
         <p:txBody>
-          <a:bodyPr anchorCtr="0" anchor="t" bIns="91425" lIns="91425" spcFirstLastPara="1" rIns="91425" wrap="square" tIns="91425">
+          <a:bodyPr spcFirstLastPara="1" wrap="square" lIns="91425" tIns="91425" rIns="91425" bIns="91425" anchor="t" anchorCtr="0">
             <a:noAutofit/>
           </a:bodyPr>
           <a:lstStyle/>
           <a:p>
-            <a:pPr indent="0" lvl="0" marL="0" rtl="0" algn="l">
+            <a:pPr marL="0" lvl="0" indent="0" algn="l" rtl="0">
               <a:spcBef>
                 <a:spcPts val="0"/>
               </a:spcBef>
@@ -774,9 +798,6 @@
               </a:spcAft>
               <a:buNone/>
             </a:pPr>
-            <a:r>
-              <a:t/>
-            </a:r>
             <a:endParaRPr/>
           </a:p>
         </p:txBody>
@@ -790,11 +811,11 @@
 </file>
 
 <file path=ppt/notesSlides/notesSlide2.xml><?xml version="1.0" encoding="utf-8"?>
-<p:notes xmlns:a="http://schemas.openxmlformats.org/drawingml/2006/main" xmlns:r="http://schemas.openxmlformats.org/officeDocument/2006/relationships" xmlns:mc="http://schemas.openxmlformats.org/markup-compatibility/2006" xmlns:mv="urn:schemas-microsoft-com:mac:vml" xmlns:p="http://schemas.openxmlformats.org/presentationml/2006/main" xmlns:c="http://schemas.openxmlformats.org/drawingml/2006/chart" xmlns:dgm="http://schemas.openxmlformats.org/drawingml/2006/diagram" xmlns:o="urn:schemas-microsoft-com:office:office" xmlns:v="urn:schemas-microsoft-com:vml" xmlns:pvml="urn:schemas-microsoft-com:office:powerpoint" xmlns:com="http://schemas.openxmlformats.org/drawingml/2006/compatibility" xmlns:p14="http://schemas.microsoft.com/office/powerpoint/2010/main" xmlns:p15="http://schemas.microsoft.com/office/powerpoint/2012/main" xmlns:ahyp="http://schemas.microsoft.com/office/drawing/2018/hyperlinkcolor" showMasterPhAnim="0" showMasterSp="0">
+<p:notes xmlns:a="http://schemas.openxmlformats.org/drawingml/2006/main" xmlns:r="http://schemas.openxmlformats.org/officeDocument/2006/relationships" xmlns:p="http://schemas.openxmlformats.org/presentationml/2006/main" showMasterSp="0" showMasterPhAnim="0">
   <p:cSld>
     <p:spTree>
       <p:nvGrpSpPr>
-        <p:cNvPr id="57" name="Shape 57"/>
+        <p:cNvPr id="1" name="Shape 57"/>
         <p:cNvGrpSpPr/>
         <p:nvPr/>
       </p:nvGrpSpPr>
@@ -809,20 +830,26 @@
       <p:sp>
         <p:nvSpPr>
           <p:cNvPr id="58" name="Google Shape;58;g39d637de1ff_0_6:notes"/>
-          <p:cNvSpPr/>
+          <p:cNvSpPr>
+            <a:spLocks noGrp="1" noRot="1" noChangeAspect="1"/>
+          </p:cNvSpPr>
           <p:nvPr>
-            <p:ph idx="2" type="sldImg"/>
+            <p:ph type="sldImg" idx="2"/>
           </p:nvPr>
         </p:nvSpPr>
         <p:spPr>
           <a:xfrm>
-            <a:off x="381300" y="685800"/>
+            <a:off x="381000" y="685800"/>
             <a:ext cx="6096000" cy="3429000"/>
           </a:xfrm>
           <a:custGeom>
-            <a:rect b="b" l="l" r="r" t="t"/>
+            <a:avLst/>
+            <a:gdLst/>
+            <a:ahLst/>
+            <a:cxnLst/>
+            <a:rect l="l" t="t" r="r" b="b"/>
             <a:pathLst>
-              <a:path extrusionOk="0" h="120000" w="120000">
+              <a:path w="120000" h="120000" extrusionOk="0">
                 <a:moveTo>
                   <a:pt x="0" y="0"/>
                 </a:moveTo>
@@ -844,9 +871,11 @@
       <p:sp>
         <p:nvSpPr>
           <p:cNvPr id="59" name="Google Shape;59;g39d637de1ff_0_6:notes"/>
-          <p:cNvSpPr txBox="1"/>
+          <p:cNvSpPr txBox="1">
+            <a:spLocks noGrp="1"/>
+          </p:cNvSpPr>
           <p:nvPr>
-            <p:ph idx="1" type="body"/>
+            <p:ph type="body" idx="1"/>
           </p:nvPr>
         </p:nvSpPr>
         <p:spPr>
@@ -859,12 +888,12 @@
           </a:prstGeom>
         </p:spPr>
         <p:txBody>
-          <a:bodyPr anchorCtr="0" anchor="t" bIns="91425" lIns="91425" spcFirstLastPara="1" rIns="91425" wrap="square" tIns="91425">
+          <a:bodyPr spcFirstLastPara="1" wrap="square" lIns="91425" tIns="91425" rIns="91425" bIns="91425" anchor="t" anchorCtr="0">
             <a:noAutofit/>
           </a:bodyPr>
           <a:lstStyle/>
           <a:p>
-            <a:pPr indent="0" lvl="0" marL="0" rtl="0" algn="l">
+            <a:pPr marL="0" lvl="0" indent="0" algn="l" rtl="0">
               <a:spcBef>
                 <a:spcPts val="0"/>
               </a:spcBef>
@@ -873,9 +902,6 @@
               </a:spcAft>
               <a:buNone/>
             </a:pPr>
-            <a:r>
-              <a:t/>
-            </a:r>
             <a:endParaRPr/>
           </a:p>
         </p:txBody>
@@ -889,11 +915,11 @@
 </file>
 
 <file path=ppt/notesSlides/notesSlide3.xml><?xml version="1.0" encoding="utf-8"?>
-<p:notes xmlns:a="http://schemas.openxmlformats.org/drawingml/2006/main" xmlns:r="http://schemas.openxmlformats.org/officeDocument/2006/relationships" xmlns:mc="http://schemas.openxmlformats.org/markup-compatibility/2006" xmlns:mv="urn:schemas-microsoft-com:mac:vml" xmlns:p="http://schemas.openxmlformats.org/presentationml/2006/main" xmlns:c="http://schemas.openxmlformats.org/drawingml/2006/chart" xmlns:dgm="http://schemas.openxmlformats.org/drawingml/2006/diagram" xmlns:o="urn:schemas-microsoft-com:office:office" xmlns:v="urn:schemas-microsoft-com:vml" xmlns:pvml="urn:schemas-microsoft-com:office:powerpoint" xmlns:com="http://schemas.openxmlformats.org/drawingml/2006/compatibility" xmlns:p14="http://schemas.microsoft.com/office/powerpoint/2010/main" xmlns:p15="http://schemas.microsoft.com/office/powerpoint/2012/main" xmlns:ahyp="http://schemas.microsoft.com/office/drawing/2018/hyperlinkcolor" showMasterPhAnim="0" showMasterSp="0">
+<p:notes xmlns:a="http://schemas.openxmlformats.org/drawingml/2006/main" xmlns:r="http://schemas.openxmlformats.org/officeDocument/2006/relationships" xmlns:p="http://schemas.openxmlformats.org/presentationml/2006/main" showMasterSp="0" showMasterPhAnim="0">
   <p:cSld>
     <p:spTree>
       <p:nvGrpSpPr>
-        <p:cNvPr id="62" name="Shape 62"/>
+        <p:cNvPr id="1" name="Shape 62"/>
         <p:cNvGrpSpPr/>
         <p:nvPr/>
       </p:nvGrpSpPr>
@@ -908,9 +934,11 @@
       <p:sp>
         <p:nvSpPr>
           <p:cNvPr id="63" name="Google Shape;63;g39d3330c1dc_0_0:notes"/>
-          <p:cNvSpPr/>
+          <p:cNvSpPr>
+            <a:spLocks noGrp="1" noRot="1" noChangeAspect="1"/>
+          </p:cNvSpPr>
           <p:nvPr>
-            <p:ph idx="2" type="sldImg"/>
+            <p:ph type="sldImg" idx="2"/>
           </p:nvPr>
         </p:nvSpPr>
         <p:spPr>
@@ -919,9 +947,13 @@
             <a:ext cx="6096000" cy="3429000"/>
           </a:xfrm>
           <a:custGeom>
-            <a:rect b="b" l="l" r="r" t="t"/>
+            <a:avLst/>
+            <a:gdLst/>
+            <a:ahLst/>
+            <a:cxnLst/>
+            <a:rect l="l" t="t" r="r" b="b"/>
             <a:pathLst>
-              <a:path extrusionOk="0" h="120000" w="120000">
+              <a:path w="120000" h="120000" extrusionOk="0">
                 <a:moveTo>
                   <a:pt x="0" y="0"/>
                 </a:moveTo>
@@ -943,9 +975,11 @@
       <p:sp>
         <p:nvSpPr>
           <p:cNvPr id="64" name="Google Shape;64;g39d3330c1dc_0_0:notes"/>
-          <p:cNvSpPr txBox="1"/>
+          <p:cNvSpPr txBox="1">
+            <a:spLocks noGrp="1"/>
+          </p:cNvSpPr>
           <p:nvPr>
-            <p:ph idx="1" type="body"/>
+            <p:ph type="body" idx="1"/>
           </p:nvPr>
         </p:nvSpPr>
         <p:spPr>
@@ -958,12 +992,12 @@
           </a:prstGeom>
         </p:spPr>
         <p:txBody>
-          <a:bodyPr anchorCtr="0" anchor="t" bIns="91425" lIns="91425" spcFirstLastPara="1" rIns="91425" wrap="square" tIns="91425">
+          <a:bodyPr spcFirstLastPara="1" wrap="square" lIns="91425" tIns="91425" rIns="91425" bIns="91425" anchor="t" anchorCtr="0">
             <a:noAutofit/>
           </a:bodyPr>
           <a:lstStyle/>
           <a:p>
-            <a:pPr indent="0" lvl="0" marL="0" rtl="0" algn="l">
+            <a:pPr marL="0" lvl="0" indent="0" algn="l" rtl="0">
               <a:spcBef>
                 <a:spcPts val="0"/>
               </a:spcBef>
@@ -972,9 +1006,6 @@
               </a:spcAft>
               <a:buNone/>
             </a:pPr>
-            <a:r>
-              <a:t/>
-            </a:r>
             <a:endParaRPr/>
           </a:p>
         </p:txBody>
@@ -988,11 +1019,11 @@
 </file>
 
 <file path=ppt/notesSlides/notesSlide4.xml><?xml version="1.0" encoding="utf-8"?>
-<p:notes xmlns:a="http://schemas.openxmlformats.org/drawingml/2006/main" xmlns:r="http://schemas.openxmlformats.org/officeDocument/2006/relationships" xmlns:mc="http://schemas.openxmlformats.org/markup-compatibility/2006" xmlns:mv="urn:schemas-microsoft-com:mac:vml" xmlns:p="http://schemas.openxmlformats.org/presentationml/2006/main" xmlns:c="http://schemas.openxmlformats.org/drawingml/2006/chart" xmlns:dgm="http://schemas.openxmlformats.org/drawingml/2006/diagram" xmlns:o="urn:schemas-microsoft-com:office:office" xmlns:v="urn:schemas-microsoft-com:vml" xmlns:pvml="urn:schemas-microsoft-com:office:powerpoint" xmlns:com="http://schemas.openxmlformats.org/drawingml/2006/compatibility" xmlns:p14="http://schemas.microsoft.com/office/powerpoint/2010/main" xmlns:p15="http://schemas.microsoft.com/office/powerpoint/2012/main" xmlns:ahyp="http://schemas.microsoft.com/office/drawing/2018/hyperlinkcolor" showMasterPhAnim="0" showMasterSp="0">
+<p:notes xmlns:a="http://schemas.openxmlformats.org/drawingml/2006/main" xmlns:r="http://schemas.openxmlformats.org/officeDocument/2006/relationships" xmlns:p="http://schemas.openxmlformats.org/presentationml/2006/main" showMasterSp="0" showMasterPhAnim="0">
   <p:cSld>
     <p:spTree>
       <p:nvGrpSpPr>
-        <p:cNvPr id="68" name="Shape 68"/>
+        <p:cNvPr id="1" name="Shape 68"/>
         <p:cNvGrpSpPr/>
         <p:nvPr/>
       </p:nvGrpSpPr>
@@ -1007,20 +1038,26 @@
       <p:sp>
         <p:nvSpPr>
           <p:cNvPr id="69" name="Google Shape;69;g39d3330c1dc_0_14:notes"/>
-          <p:cNvSpPr/>
+          <p:cNvSpPr>
+            <a:spLocks noGrp="1" noRot="1" noChangeAspect="1"/>
+          </p:cNvSpPr>
           <p:nvPr>
-            <p:ph idx="2" type="sldImg"/>
+            <p:ph type="sldImg" idx="2"/>
           </p:nvPr>
         </p:nvSpPr>
         <p:spPr>
           <a:xfrm>
-            <a:off x="381300" y="685800"/>
+            <a:off x="381000" y="685800"/>
             <a:ext cx="6096000" cy="3429000"/>
           </a:xfrm>
           <a:custGeom>
-            <a:rect b="b" l="l" r="r" t="t"/>
+            <a:avLst/>
+            <a:gdLst/>
+            <a:ahLst/>
+            <a:cxnLst/>
+            <a:rect l="l" t="t" r="r" b="b"/>
             <a:pathLst>
-              <a:path extrusionOk="0" h="120000" w="120000">
+              <a:path w="120000" h="120000" extrusionOk="0">
                 <a:moveTo>
                   <a:pt x="0" y="0"/>
                 </a:moveTo>
@@ -1042,9 +1079,11 @@
       <p:sp>
         <p:nvSpPr>
           <p:cNvPr id="70" name="Google Shape;70;g39d3330c1dc_0_14:notes"/>
-          <p:cNvSpPr txBox="1"/>
+          <p:cNvSpPr txBox="1">
+            <a:spLocks noGrp="1"/>
+          </p:cNvSpPr>
           <p:nvPr>
-            <p:ph idx="1" type="body"/>
+            <p:ph type="body" idx="1"/>
           </p:nvPr>
         </p:nvSpPr>
         <p:spPr>
@@ -1057,12 +1096,12 @@
           </a:prstGeom>
         </p:spPr>
         <p:txBody>
-          <a:bodyPr anchorCtr="0" anchor="t" bIns="91425" lIns="91425" spcFirstLastPara="1" rIns="91425" wrap="square" tIns="91425">
+          <a:bodyPr spcFirstLastPara="1" wrap="square" lIns="91425" tIns="91425" rIns="91425" bIns="91425" anchor="t" anchorCtr="0">
             <a:noAutofit/>
           </a:bodyPr>
           <a:lstStyle/>
           <a:p>
-            <a:pPr indent="0" lvl="0" marL="0" rtl="0" algn="l">
+            <a:pPr marL="0" lvl="0" indent="0" algn="l" rtl="0">
               <a:spcBef>
                 <a:spcPts val="0"/>
               </a:spcBef>
@@ -1071,9 +1110,6 @@
               </a:spcAft>
               <a:buNone/>
             </a:pPr>
-            <a:r>
-              <a:t/>
-            </a:r>
             <a:endParaRPr/>
           </a:p>
         </p:txBody>
@@ -1087,11 +1123,11 @@
 </file>
 
 <file path=ppt/notesSlides/notesSlide5.xml><?xml version="1.0" encoding="utf-8"?>
-<p:notes xmlns:a="http://schemas.openxmlformats.org/drawingml/2006/main" xmlns:r="http://schemas.openxmlformats.org/officeDocument/2006/relationships" xmlns:mc="http://schemas.openxmlformats.org/markup-compatibility/2006" xmlns:mv="urn:schemas-microsoft-com:mac:vml" xmlns:p="http://schemas.openxmlformats.org/presentationml/2006/main" xmlns:c="http://schemas.openxmlformats.org/drawingml/2006/chart" xmlns:dgm="http://schemas.openxmlformats.org/drawingml/2006/diagram" xmlns:o="urn:schemas-microsoft-com:office:office" xmlns:v="urn:schemas-microsoft-com:vml" xmlns:pvml="urn:schemas-microsoft-com:office:powerpoint" xmlns:com="http://schemas.openxmlformats.org/drawingml/2006/compatibility" xmlns:p14="http://schemas.microsoft.com/office/powerpoint/2010/main" xmlns:p15="http://schemas.microsoft.com/office/powerpoint/2012/main" xmlns:ahyp="http://schemas.microsoft.com/office/drawing/2018/hyperlinkcolor" showMasterPhAnim="0" showMasterSp="0">
+<p:notes xmlns:a="http://schemas.openxmlformats.org/drawingml/2006/main" xmlns:r="http://schemas.openxmlformats.org/officeDocument/2006/relationships" xmlns:p="http://schemas.openxmlformats.org/presentationml/2006/main" showMasterSp="0" showMasterPhAnim="0">
   <p:cSld>
     <p:spTree>
       <p:nvGrpSpPr>
-        <p:cNvPr id="74" name="Shape 74"/>
+        <p:cNvPr id="1" name="Shape 74"/>
         <p:cNvGrpSpPr/>
         <p:nvPr/>
       </p:nvGrpSpPr>
@@ -1106,9 +1142,11 @@
       <p:sp>
         <p:nvSpPr>
           <p:cNvPr id="75" name="Google Shape;75;g39d3330c1dc_0_5:notes"/>
-          <p:cNvSpPr/>
+          <p:cNvSpPr>
+            <a:spLocks noGrp="1" noRot="1" noChangeAspect="1"/>
+          </p:cNvSpPr>
           <p:nvPr>
-            <p:ph idx="2" type="sldImg"/>
+            <p:ph type="sldImg" idx="2"/>
           </p:nvPr>
         </p:nvSpPr>
         <p:spPr>
@@ -1117,9 +1155,13 @@
             <a:ext cx="6096000" cy="3429000"/>
           </a:xfrm>
           <a:custGeom>
-            <a:rect b="b" l="l" r="r" t="t"/>
+            <a:avLst/>
+            <a:gdLst/>
+            <a:ahLst/>
+            <a:cxnLst/>
+            <a:rect l="l" t="t" r="r" b="b"/>
             <a:pathLst>
-              <a:path extrusionOk="0" h="120000" w="120000">
+              <a:path w="120000" h="120000" extrusionOk="0">
                 <a:moveTo>
                   <a:pt x="0" y="0"/>
                 </a:moveTo>
@@ -1141,9 +1183,11 @@
       <p:sp>
         <p:nvSpPr>
           <p:cNvPr id="76" name="Google Shape;76;g39d3330c1dc_0_5:notes"/>
-          <p:cNvSpPr txBox="1"/>
+          <p:cNvSpPr txBox="1">
+            <a:spLocks noGrp="1"/>
+          </p:cNvSpPr>
           <p:nvPr>
-            <p:ph idx="1" type="body"/>
+            <p:ph type="body" idx="1"/>
           </p:nvPr>
         </p:nvSpPr>
         <p:spPr>
@@ -1156,12 +1200,12 @@
           </a:prstGeom>
         </p:spPr>
         <p:txBody>
-          <a:bodyPr anchorCtr="0" anchor="t" bIns="91425" lIns="91425" spcFirstLastPara="1" rIns="91425" wrap="square" tIns="91425">
+          <a:bodyPr spcFirstLastPara="1" wrap="square" lIns="91425" tIns="91425" rIns="91425" bIns="91425" anchor="t" anchorCtr="0">
             <a:noAutofit/>
           </a:bodyPr>
           <a:lstStyle/>
           <a:p>
-            <a:pPr indent="0" lvl="0" marL="0" rtl="0" algn="l">
+            <a:pPr marL="0" lvl="0" indent="0" algn="l" rtl="0">
               <a:spcBef>
                 <a:spcPts val="0"/>
               </a:spcBef>
@@ -1170,9 +1214,6 @@
               </a:spcAft>
               <a:buNone/>
             </a:pPr>
-            <a:r>
-              <a:t/>
-            </a:r>
             <a:endParaRPr/>
           </a:p>
         </p:txBody>
@@ -1185,12 +1226,121 @@
 </p:notes>
 </file>
 
+<file path=ppt/notesSlides/notesSlide6.xml><?xml version="1.0" encoding="utf-8"?>
+<p:notes xmlns:a="http://schemas.openxmlformats.org/drawingml/2006/main" xmlns:r="http://schemas.openxmlformats.org/officeDocument/2006/relationships" xmlns:p="http://schemas.openxmlformats.org/presentationml/2006/main" showMasterSp="0" showMasterPhAnim="0">
+  <p:cSld>
+    <p:spTree>
+      <p:nvGrpSpPr>
+        <p:cNvPr id="1" name="Shape 74"/>
+        <p:cNvGrpSpPr/>
+        <p:nvPr/>
+      </p:nvGrpSpPr>
+      <p:grpSpPr>
+        <a:xfrm>
+          <a:off x="0" y="0"/>
+          <a:ext cx="0" cy="0"/>
+          <a:chOff x="0" y="0"/>
+          <a:chExt cx="0" cy="0"/>
+        </a:xfrm>
+      </p:grpSpPr>
+      <p:sp>
+        <p:nvSpPr>
+          <p:cNvPr id="75" name="Google Shape;75;g39d3330c1dc_0_5:notes"/>
+          <p:cNvSpPr>
+            <a:spLocks noGrp="1" noRot="1" noChangeAspect="1"/>
+          </p:cNvSpPr>
+          <p:nvPr>
+            <p:ph type="sldImg" idx="2"/>
+          </p:nvPr>
+        </p:nvSpPr>
+        <p:spPr>
+          <a:xfrm>
+            <a:off x="381000" y="685800"/>
+            <a:ext cx="6096000" cy="3429000"/>
+          </a:xfrm>
+          <a:custGeom>
+            <a:avLst/>
+            <a:gdLst/>
+            <a:ahLst/>
+            <a:cxnLst/>
+            <a:rect l="l" t="t" r="r" b="b"/>
+            <a:pathLst>
+              <a:path w="120000" h="120000" extrusionOk="0">
+                <a:moveTo>
+                  <a:pt x="0" y="0"/>
+                </a:moveTo>
+                <a:lnTo>
+                  <a:pt x="120000" y="0"/>
+                </a:lnTo>
+                <a:lnTo>
+                  <a:pt x="120000" y="120000"/>
+                </a:lnTo>
+                <a:lnTo>
+                  <a:pt x="0" y="120000"/>
+                </a:lnTo>
+                <a:close/>
+              </a:path>
+            </a:pathLst>
+          </a:custGeom>
+        </p:spPr>
+      </p:sp>
+      <p:sp>
+        <p:nvSpPr>
+          <p:cNvPr id="76" name="Google Shape;76;g39d3330c1dc_0_5:notes"/>
+          <p:cNvSpPr txBox="1">
+            <a:spLocks noGrp="1"/>
+          </p:cNvSpPr>
+          <p:nvPr>
+            <p:ph type="body" idx="1"/>
+          </p:nvPr>
+        </p:nvSpPr>
+        <p:spPr>
+          <a:xfrm>
+            <a:off x="685800" y="4343400"/>
+            <a:ext cx="5486400" cy="4114800"/>
+          </a:xfrm>
+          <a:prstGeom prst="rect">
+            <a:avLst/>
+          </a:prstGeom>
+        </p:spPr>
+        <p:txBody>
+          <a:bodyPr spcFirstLastPara="1" wrap="square" lIns="91425" tIns="91425" rIns="91425" bIns="91425" anchor="t" anchorCtr="0">
+            <a:noAutofit/>
+          </a:bodyPr>
+          <a:lstStyle/>
+          <a:p>
+            <a:pPr marL="0" lvl="0" indent="0" algn="l" rtl="0">
+              <a:spcBef>
+                <a:spcPts val="0"/>
+              </a:spcBef>
+              <a:spcAft>
+                <a:spcPts val="0"/>
+              </a:spcAft>
+              <a:buNone/>
+            </a:pPr>
+            <a:endParaRPr/>
+          </a:p>
+        </p:txBody>
+      </p:sp>
+    </p:spTree>
+    <p:extLst>
+      <p:ext uri="{BB962C8B-B14F-4D97-AF65-F5344CB8AC3E}">
+        <p14:creationId xmlns:p14="http://schemas.microsoft.com/office/powerpoint/2010/main" val="237789721"/>
+      </p:ext>
+    </p:extLst>
+  </p:cSld>
+  <p:clrMapOvr>
+    <a:masterClrMapping/>
+  </p:clrMapOvr>
+</p:notes>
+</file>
+
 <file path=ppt/slideLayouts/slideLayout1.xml><?xml version="1.0" encoding="utf-8"?>
-<p:sldLayout xmlns:a="http://schemas.openxmlformats.org/drawingml/2006/main" xmlns:r="http://schemas.openxmlformats.org/officeDocument/2006/relationships" xmlns:mc="http://schemas.openxmlformats.org/markup-compatibility/2006" xmlns:mv="urn:schemas-microsoft-com:mac:vml" xmlns:p="http://schemas.openxmlformats.org/presentationml/2006/main" xmlns:c="http://schemas.openxmlformats.org/drawingml/2006/chart" xmlns:dgm="http://schemas.openxmlformats.org/drawingml/2006/diagram" xmlns:o="urn:schemas-microsoft-com:office:office" xmlns:v="urn:schemas-microsoft-com:vml" xmlns:pvml="urn:schemas-microsoft-com:office:powerpoint" xmlns:com="http://schemas.openxmlformats.org/drawingml/2006/compatibility" xmlns:p14="http://schemas.microsoft.com/office/powerpoint/2010/main" xmlns:p15="http://schemas.microsoft.com/office/powerpoint/2012/main" xmlns:ahyp="http://schemas.microsoft.com/office/drawing/2018/hyperlinkcolor" matchingName="Title slide" type="title">
+<p:sldLayout xmlns:a="http://schemas.openxmlformats.org/drawingml/2006/main" xmlns:r="http://schemas.openxmlformats.org/officeDocument/2006/relationships" xmlns:p="http://schemas.openxmlformats.org/presentationml/2006/main" matchingName="Title slide" type="title">
   <p:cSld name="TITLE">
     <p:spTree>
       <p:nvGrpSpPr>
-        <p:cNvPr id="9" name="Shape 9"/>
+        <p:cNvPr id="1" name="Shape 9"/>
         <p:cNvGrpSpPr/>
         <p:nvPr/>
       </p:nvGrpSpPr>
@@ -1205,7 +1355,9 @@
       <p:sp>
         <p:nvSpPr>
           <p:cNvPr id="10" name="Google Shape;10;p2"/>
-          <p:cNvSpPr txBox="1"/>
+          <p:cNvSpPr txBox="1">
+            <a:spLocks noGrp="1"/>
+          </p:cNvSpPr>
           <p:nvPr>
             <p:ph type="ctrTitle"/>
           </p:nvPr>
@@ -1220,7 +1372,7 @@
           </a:prstGeom>
         </p:spPr>
         <p:txBody>
-          <a:bodyPr anchorCtr="0" anchor="b" bIns="91425" lIns="91425" spcFirstLastPara="1" rIns="91425" wrap="square" tIns="91425">
+          <a:bodyPr spcFirstLastPara="1" wrap="square" lIns="91425" tIns="91425" rIns="91425" bIns="91425" anchor="b" anchorCtr="0">
             <a:normAutofit/>
           </a:bodyPr>
           <a:lstStyle>
@@ -1324,15 +1476,19 @@
               <a:defRPr sz="5200"/>
             </a:lvl9pPr>
           </a:lstStyle>
-          <a:p/>
+          <a:p>
+            <a:endParaRPr/>
+          </a:p>
         </p:txBody>
       </p:sp>
       <p:sp>
         <p:nvSpPr>
           <p:cNvPr id="11" name="Google Shape;11;p2"/>
-          <p:cNvSpPr txBox="1"/>
+          <p:cNvSpPr txBox="1">
+            <a:spLocks noGrp="1"/>
+          </p:cNvSpPr>
           <p:nvPr>
-            <p:ph idx="1" type="subTitle"/>
+            <p:ph type="subTitle" idx="1"/>
           </p:nvPr>
         </p:nvSpPr>
         <p:spPr>
@@ -1345,7 +1501,7 @@
           </a:prstGeom>
         </p:spPr>
         <p:txBody>
-          <a:bodyPr anchorCtr="0" anchor="t" bIns="91425" lIns="91425" spcFirstLastPara="1" rIns="91425" wrap="square" tIns="91425">
+          <a:bodyPr spcFirstLastPara="1" wrap="square" lIns="91425" tIns="91425" rIns="91425" bIns="91425" anchor="t" anchorCtr="0">
             <a:normAutofit/>
           </a:bodyPr>
           <a:lstStyle>
@@ -1476,15 +1632,19 @@
               <a:defRPr sz="2800"/>
             </a:lvl9pPr>
           </a:lstStyle>
-          <a:p/>
+          <a:p>
+            <a:endParaRPr/>
+          </a:p>
         </p:txBody>
       </p:sp>
       <p:sp>
         <p:nvSpPr>
           <p:cNvPr id="12" name="Google Shape;12;p2"/>
-          <p:cNvSpPr txBox="1"/>
+          <p:cNvSpPr txBox="1">
+            <a:spLocks noGrp="1"/>
+          </p:cNvSpPr>
           <p:nvPr>
-            <p:ph idx="12" type="sldNum"/>
+            <p:ph type="sldNum" idx="12"/>
           </p:nvPr>
         </p:nvSpPr>
         <p:spPr>
@@ -1497,7 +1657,7 @@
           </a:prstGeom>
         </p:spPr>
         <p:txBody>
-          <a:bodyPr anchorCtr="0" anchor="ctr" bIns="91425" lIns="91425" spcFirstLastPara="1" rIns="91425" wrap="square" tIns="91425">
+          <a:bodyPr spcFirstLastPara="1" wrap="square" lIns="91425" tIns="91425" rIns="91425" bIns="91425" anchor="ctr" anchorCtr="0">
             <a:normAutofit/>
           </a:bodyPr>
           <a:lstStyle>
@@ -1539,7 +1699,7 @@
             </a:lvl9pPr>
           </a:lstStyle>
           <a:p>
-            <a:pPr indent="0" lvl="0" marL="0" rtl="0" algn="r">
+            <a:pPr marL="0" lvl="0" indent="0" algn="r" rtl="0">
               <a:spcBef>
                 <a:spcPts val="0"/>
               </a:spcBef>
@@ -1550,7 +1710,7 @@
             </a:pPr>
             <a:fld id="{00000000-1234-1234-1234-123412341234}" type="slidenum">
               <a:rPr lang="es"/>
-              <a:t>‹#›</a:t>
+              <a:t>‹Nº›</a:t>
             </a:fld>
             <a:endParaRPr/>
           </a:p>
@@ -1565,11 +1725,11 @@
 </file>
 
 <file path=ppt/slideLayouts/slideLayout10.xml><?xml version="1.0" encoding="utf-8"?>
-<p:sldLayout xmlns:a="http://schemas.openxmlformats.org/drawingml/2006/main" xmlns:r="http://schemas.openxmlformats.org/officeDocument/2006/relationships" xmlns:mc="http://schemas.openxmlformats.org/markup-compatibility/2006" xmlns:mv="urn:schemas-microsoft-com:mac:vml" xmlns:p="http://schemas.openxmlformats.org/presentationml/2006/main" xmlns:c="http://schemas.openxmlformats.org/drawingml/2006/chart" xmlns:dgm="http://schemas.openxmlformats.org/drawingml/2006/diagram" xmlns:o="urn:schemas-microsoft-com:office:office" xmlns:v="urn:schemas-microsoft-com:vml" xmlns:pvml="urn:schemas-microsoft-com:office:powerpoint" xmlns:com="http://schemas.openxmlformats.org/drawingml/2006/compatibility" xmlns:p14="http://schemas.microsoft.com/office/powerpoint/2010/main" xmlns:p15="http://schemas.microsoft.com/office/powerpoint/2012/main" xmlns:ahyp="http://schemas.microsoft.com/office/drawing/2018/hyperlinkcolor" matchingName="Big number">
+<p:sldLayout xmlns:a="http://schemas.openxmlformats.org/drawingml/2006/main" xmlns:r="http://schemas.openxmlformats.org/officeDocument/2006/relationships" xmlns:p="http://schemas.openxmlformats.org/presentationml/2006/main" matchingName="Big number">
   <p:cSld name="BIG_NUMBER">
     <p:spTree>
       <p:nvGrpSpPr>
-        <p:cNvPr id="44" name="Shape 44"/>
+        <p:cNvPr id="1" name="Shape 44"/>
         <p:cNvGrpSpPr/>
         <p:nvPr/>
       </p:nvGrpSpPr>
@@ -1584,9 +1744,11 @@
       <p:sp>
         <p:nvSpPr>
           <p:cNvPr id="45" name="Google Shape;45;p11"/>
-          <p:cNvSpPr txBox="1"/>
+          <p:cNvSpPr txBox="1">
+            <a:spLocks noGrp="1"/>
+          </p:cNvSpPr>
           <p:nvPr>
-            <p:ph hasCustomPrompt="1" type="title"/>
+            <p:ph type="title" hasCustomPrompt="1"/>
           </p:nvPr>
         </p:nvSpPr>
         <p:spPr>
@@ -1599,7 +1761,7 @@
           </a:prstGeom>
         </p:spPr>
         <p:txBody>
-          <a:bodyPr anchorCtr="0" anchor="b" bIns="91425" lIns="91425" spcFirstLastPara="1" rIns="91425" wrap="square" tIns="91425">
+          <a:bodyPr spcFirstLastPara="1" wrap="square" lIns="91425" tIns="91425" rIns="91425" bIns="91425" anchor="b" anchorCtr="0">
             <a:normAutofit/>
           </a:bodyPr>
           <a:lstStyle>
@@ -1713,9 +1875,11 @@
       <p:sp>
         <p:nvSpPr>
           <p:cNvPr id="46" name="Google Shape;46;p11"/>
-          <p:cNvSpPr txBox="1"/>
+          <p:cNvSpPr txBox="1">
+            <a:spLocks noGrp="1"/>
+          </p:cNvSpPr>
           <p:nvPr>
-            <p:ph idx="1" type="body"/>
+            <p:ph type="body" idx="1"/>
           </p:nvPr>
         </p:nvSpPr>
         <p:spPr>
@@ -1728,11 +1892,11 @@
           </a:prstGeom>
         </p:spPr>
         <p:txBody>
-          <a:bodyPr anchorCtr="0" anchor="t" bIns="91425" lIns="91425" spcFirstLastPara="1" rIns="91425" wrap="square" tIns="91425">
+          <a:bodyPr spcFirstLastPara="1" wrap="square" lIns="91425" tIns="91425" rIns="91425" bIns="91425" anchor="t" anchorCtr="0">
             <a:normAutofit/>
           </a:bodyPr>
           <a:lstStyle>
-            <a:lvl1pPr indent="-342900" lvl="0" marL="457200" algn="ctr">
+            <a:lvl1pPr marL="457200" lvl="0" indent="-342900" algn="ctr">
               <a:spcBef>
                 <a:spcPts val="0"/>
               </a:spcBef>
@@ -1743,7 +1907,7 @@
               <a:buChar char="●"/>
               <a:defRPr/>
             </a:lvl1pPr>
-            <a:lvl2pPr indent="-317500" lvl="1" marL="914400" algn="ctr">
+            <a:lvl2pPr marL="914400" lvl="1" indent="-317500" algn="ctr">
               <a:spcBef>
                 <a:spcPts val="0"/>
               </a:spcBef>
@@ -1754,7 +1918,7 @@
               <a:buChar char="○"/>
               <a:defRPr/>
             </a:lvl2pPr>
-            <a:lvl3pPr indent="-317500" lvl="2" marL="1371600" algn="ctr">
+            <a:lvl3pPr marL="1371600" lvl="2" indent="-317500" algn="ctr">
               <a:spcBef>
                 <a:spcPts val="0"/>
               </a:spcBef>
@@ -1765,7 +1929,7 @@
               <a:buChar char="■"/>
               <a:defRPr/>
             </a:lvl3pPr>
-            <a:lvl4pPr indent="-317500" lvl="3" marL="1828800" algn="ctr">
+            <a:lvl4pPr marL="1828800" lvl="3" indent="-317500" algn="ctr">
               <a:spcBef>
                 <a:spcPts val="0"/>
               </a:spcBef>
@@ -1776,7 +1940,7 @@
               <a:buChar char="●"/>
               <a:defRPr/>
             </a:lvl4pPr>
-            <a:lvl5pPr indent="-317500" lvl="4" marL="2286000" algn="ctr">
+            <a:lvl5pPr marL="2286000" lvl="4" indent="-317500" algn="ctr">
               <a:spcBef>
                 <a:spcPts val="0"/>
               </a:spcBef>
@@ -1787,7 +1951,7 @@
               <a:buChar char="○"/>
               <a:defRPr/>
             </a:lvl5pPr>
-            <a:lvl6pPr indent="-317500" lvl="5" marL="2743200" algn="ctr">
+            <a:lvl6pPr marL="2743200" lvl="5" indent="-317500" algn="ctr">
               <a:spcBef>
                 <a:spcPts val="0"/>
               </a:spcBef>
@@ -1798,7 +1962,7 @@
               <a:buChar char="■"/>
               <a:defRPr/>
             </a:lvl6pPr>
-            <a:lvl7pPr indent="-317500" lvl="6" marL="3200400" algn="ctr">
+            <a:lvl7pPr marL="3200400" lvl="6" indent="-317500" algn="ctr">
               <a:spcBef>
                 <a:spcPts val="0"/>
               </a:spcBef>
@@ -1809,7 +1973,7 @@
               <a:buChar char="●"/>
               <a:defRPr/>
             </a:lvl7pPr>
-            <a:lvl8pPr indent="-317500" lvl="7" marL="3657600" algn="ctr">
+            <a:lvl8pPr marL="3657600" lvl="7" indent="-317500" algn="ctr">
               <a:spcBef>
                 <a:spcPts val="0"/>
               </a:spcBef>
@@ -1820,7 +1984,7 @@
               <a:buChar char="○"/>
               <a:defRPr/>
             </a:lvl8pPr>
-            <a:lvl9pPr indent="-317500" lvl="8" marL="4114800" algn="ctr">
+            <a:lvl9pPr marL="4114800" lvl="8" indent="-317500" algn="ctr">
               <a:spcBef>
                 <a:spcPts val="0"/>
               </a:spcBef>
@@ -1832,15 +1996,19 @@
               <a:defRPr/>
             </a:lvl9pPr>
           </a:lstStyle>
-          <a:p/>
+          <a:p>
+            <a:endParaRPr/>
+          </a:p>
         </p:txBody>
       </p:sp>
       <p:sp>
         <p:nvSpPr>
           <p:cNvPr id="47" name="Google Shape;47;p11"/>
-          <p:cNvSpPr txBox="1"/>
+          <p:cNvSpPr txBox="1">
+            <a:spLocks noGrp="1"/>
+          </p:cNvSpPr>
           <p:nvPr>
-            <p:ph idx="12" type="sldNum"/>
+            <p:ph type="sldNum" idx="12"/>
           </p:nvPr>
         </p:nvSpPr>
         <p:spPr>
@@ -1853,7 +2021,7 @@
           </a:prstGeom>
         </p:spPr>
         <p:txBody>
-          <a:bodyPr anchorCtr="0" anchor="ctr" bIns="91425" lIns="91425" spcFirstLastPara="1" rIns="91425" wrap="square" tIns="91425">
+          <a:bodyPr spcFirstLastPara="1" wrap="square" lIns="91425" tIns="91425" rIns="91425" bIns="91425" anchor="ctr" anchorCtr="0">
             <a:normAutofit/>
           </a:bodyPr>
           <a:lstStyle>
@@ -1895,7 +2063,7 @@
             </a:lvl9pPr>
           </a:lstStyle>
           <a:p>
-            <a:pPr indent="0" lvl="0" marL="0" rtl="0" algn="r">
+            <a:pPr marL="0" lvl="0" indent="0" algn="r" rtl="0">
               <a:spcBef>
                 <a:spcPts val="0"/>
               </a:spcBef>
@@ -1906,7 +2074,7 @@
             </a:pPr>
             <a:fld id="{00000000-1234-1234-1234-123412341234}" type="slidenum">
               <a:rPr lang="es"/>
-              <a:t>‹#›</a:t>
+              <a:t>‹Nº›</a:t>
             </a:fld>
             <a:endParaRPr/>
           </a:p>
@@ -1921,11 +2089,11 @@
 </file>
 
 <file path=ppt/slideLayouts/slideLayout11.xml><?xml version="1.0" encoding="utf-8"?>
-<p:sldLayout xmlns:a="http://schemas.openxmlformats.org/drawingml/2006/main" xmlns:r="http://schemas.openxmlformats.org/officeDocument/2006/relationships" xmlns:mc="http://schemas.openxmlformats.org/markup-compatibility/2006" xmlns:mv="urn:schemas-microsoft-com:mac:vml" xmlns:p="http://schemas.openxmlformats.org/presentationml/2006/main" xmlns:c="http://schemas.openxmlformats.org/drawingml/2006/chart" xmlns:dgm="http://schemas.openxmlformats.org/drawingml/2006/diagram" xmlns:o="urn:schemas-microsoft-com:office:office" xmlns:v="urn:schemas-microsoft-com:vml" xmlns:pvml="urn:schemas-microsoft-com:office:powerpoint" xmlns:com="http://schemas.openxmlformats.org/drawingml/2006/compatibility" xmlns:p14="http://schemas.microsoft.com/office/powerpoint/2010/main" xmlns:p15="http://schemas.microsoft.com/office/powerpoint/2012/main" xmlns:ahyp="http://schemas.microsoft.com/office/drawing/2018/hyperlinkcolor" matchingName="Blank" type="blank">
+<p:sldLayout xmlns:a="http://schemas.openxmlformats.org/drawingml/2006/main" xmlns:r="http://schemas.openxmlformats.org/officeDocument/2006/relationships" xmlns:p="http://schemas.openxmlformats.org/presentationml/2006/main" matchingName="Blank" type="blank">
   <p:cSld name="BLANK">
     <p:spTree>
       <p:nvGrpSpPr>
-        <p:cNvPr id="48" name="Shape 48"/>
+        <p:cNvPr id="1" name="Shape 48"/>
         <p:cNvGrpSpPr/>
         <p:nvPr/>
       </p:nvGrpSpPr>
@@ -1940,9 +2108,11 @@
       <p:sp>
         <p:nvSpPr>
           <p:cNvPr id="49" name="Google Shape;49;p12"/>
-          <p:cNvSpPr txBox="1"/>
+          <p:cNvSpPr txBox="1">
+            <a:spLocks noGrp="1"/>
+          </p:cNvSpPr>
           <p:nvPr>
-            <p:ph idx="12" type="sldNum"/>
+            <p:ph type="sldNum" idx="12"/>
           </p:nvPr>
         </p:nvSpPr>
         <p:spPr>
@@ -1955,7 +2125,7 @@
           </a:prstGeom>
         </p:spPr>
         <p:txBody>
-          <a:bodyPr anchorCtr="0" anchor="ctr" bIns="91425" lIns="91425" spcFirstLastPara="1" rIns="91425" wrap="square" tIns="91425">
+          <a:bodyPr spcFirstLastPara="1" wrap="square" lIns="91425" tIns="91425" rIns="91425" bIns="91425" anchor="ctr" anchorCtr="0">
             <a:normAutofit/>
           </a:bodyPr>
           <a:lstStyle>
@@ -1997,7 +2167,7 @@
             </a:lvl9pPr>
           </a:lstStyle>
           <a:p>
-            <a:pPr indent="0" lvl="0" marL="0" rtl="0" algn="r">
+            <a:pPr marL="0" lvl="0" indent="0" algn="r" rtl="0">
               <a:spcBef>
                 <a:spcPts val="0"/>
               </a:spcBef>
@@ -2008,7 +2178,7 @@
             </a:pPr>
             <a:fld id="{00000000-1234-1234-1234-123412341234}" type="slidenum">
               <a:rPr lang="es"/>
-              <a:t>‹#›</a:t>
+              <a:t>‹Nº›</a:t>
             </a:fld>
             <a:endParaRPr/>
           </a:p>
@@ -2023,11 +2193,11 @@
 </file>
 
 <file path=ppt/slideLayouts/slideLayout2.xml><?xml version="1.0" encoding="utf-8"?>
-<p:sldLayout xmlns:a="http://schemas.openxmlformats.org/drawingml/2006/main" xmlns:r="http://schemas.openxmlformats.org/officeDocument/2006/relationships" xmlns:mc="http://schemas.openxmlformats.org/markup-compatibility/2006" xmlns:mv="urn:schemas-microsoft-com:mac:vml" xmlns:p="http://schemas.openxmlformats.org/presentationml/2006/main" xmlns:c="http://schemas.openxmlformats.org/drawingml/2006/chart" xmlns:dgm="http://schemas.openxmlformats.org/drawingml/2006/diagram" xmlns:o="urn:schemas-microsoft-com:office:office" xmlns:v="urn:schemas-microsoft-com:vml" xmlns:pvml="urn:schemas-microsoft-com:office:powerpoint" xmlns:com="http://schemas.openxmlformats.org/drawingml/2006/compatibility" xmlns:p14="http://schemas.microsoft.com/office/powerpoint/2010/main" xmlns:p15="http://schemas.microsoft.com/office/powerpoint/2012/main" xmlns:ahyp="http://schemas.microsoft.com/office/drawing/2018/hyperlinkcolor" matchingName="Section header" type="secHead">
+<p:sldLayout xmlns:a="http://schemas.openxmlformats.org/drawingml/2006/main" xmlns:r="http://schemas.openxmlformats.org/officeDocument/2006/relationships" xmlns:p="http://schemas.openxmlformats.org/presentationml/2006/main" matchingName="Section header" type="secHead">
   <p:cSld name="SECTION_HEADER">
     <p:spTree>
       <p:nvGrpSpPr>
-        <p:cNvPr id="13" name="Shape 13"/>
+        <p:cNvPr id="1" name="Shape 13"/>
         <p:cNvGrpSpPr/>
         <p:nvPr/>
       </p:nvGrpSpPr>
@@ -2042,7 +2212,9 @@
       <p:sp>
         <p:nvSpPr>
           <p:cNvPr id="14" name="Google Shape;14;p3"/>
-          <p:cNvSpPr txBox="1"/>
+          <p:cNvSpPr txBox="1">
+            <a:spLocks noGrp="1"/>
+          </p:cNvSpPr>
           <p:nvPr>
             <p:ph type="title"/>
           </p:nvPr>
@@ -2057,7 +2229,7 @@
           </a:prstGeom>
         </p:spPr>
         <p:txBody>
-          <a:bodyPr anchorCtr="0" anchor="ctr" bIns="91425" lIns="91425" spcFirstLastPara="1" rIns="91425" wrap="square" tIns="91425">
+          <a:bodyPr spcFirstLastPara="1" wrap="square" lIns="91425" tIns="91425" rIns="91425" bIns="91425" anchor="ctr" anchorCtr="0">
             <a:normAutofit/>
           </a:bodyPr>
           <a:lstStyle>
@@ -2161,15 +2333,19 @@
               <a:defRPr sz="3600"/>
             </a:lvl9pPr>
           </a:lstStyle>
-          <a:p/>
+          <a:p>
+            <a:endParaRPr/>
+          </a:p>
         </p:txBody>
       </p:sp>
       <p:sp>
         <p:nvSpPr>
           <p:cNvPr id="15" name="Google Shape;15;p3"/>
-          <p:cNvSpPr txBox="1"/>
+          <p:cNvSpPr txBox="1">
+            <a:spLocks noGrp="1"/>
+          </p:cNvSpPr>
           <p:nvPr>
-            <p:ph idx="12" type="sldNum"/>
+            <p:ph type="sldNum" idx="12"/>
           </p:nvPr>
         </p:nvSpPr>
         <p:spPr>
@@ -2182,7 +2358,7 @@
           </a:prstGeom>
         </p:spPr>
         <p:txBody>
-          <a:bodyPr anchorCtr="0" anchor="ctr" bIns="91425" lIns="91425" spcFirstLastPara="1" rIns="91425" wrap="square" tIns="91425">
+          <a:bodyPr spcFirstLastPara="1" wrap="square" lIns="91425" tIns="91425" rIns="91425" bIns="91425" anchor="ctr" anchorCtr="0">
             <a:normAutofit/>
           </a:bodyPr>
           <a:lstStyle>
@@ -2224,7 +2400,7 @@
             </a:lvl9pPr>
           </a:lstStyle>
           <a:p>
-            <a:pPr indent="0" lvl="0" marL="0" rtl="0" algn="r">
+            <a:pPr marL="0" lvl="0" indent="0" algn="r" rtl="0">
               <a:spcBef>
                 <a:spcPts val="0"/>
               </a:spcBef>
@@ -2235,7 +2411,7 @@
             </a:pPr>
             <a:fld id="{00000000-1234-1234-1234-123412341234}" type="slidenum">
               <a:rPr lang="es"/>
-              <a:t>‹#›</a:t>
+              <a:t>‹Nº›</a:t>
             </a:fld>
             <a:endParaRPr/>
           </a:p>
@@ -2250,11 +2426,11 @@
 </file>
 
 <file path=ppt/slideLayouts/slideLayout3.xml><?xml version="1.0" encoding="utf-8"?>
-<p:sldLayout xmlns:a="http://schemas.openxmlformats.org/drawingml/2006/main" xmlns:r="http://schemas.openxmlformats.org/officeDocument/2006/relationships" xmlns:mc="http://schemas.openxmlformats.org/markup-compatibility/2006" xmlns:mv="urn:schemas-microsoft-com:mac:vml" xmlns:p="http://schemas.openxmlformats.org/presentationml/2006/main" xmlns:c="http://schemas.openxmlformats.org/drawingml/2006/chart" xmlns:dgm="http://schemas.openxmlformats.org/drawingml/2006/diagram" xmlns:o="urn:schemas-microsoft-com:office:office" xmlns:v="urn:schemas-microsoft-com:vml" xmlns:pvml="urn:schemas-microsoft-com:office:powerpoint" xmlns:com="http://schemas.openxmlformats.org/drawingml/2006/compatibility" xmlns:p14="http://schemas.microsoft.com/office/powerpoint/2010/main" xmlns:p15="http://schemas.microsoft.com/office/powerpoint/2012/main" xmlns:ahyp="http://schemas.microsoft.com/office/drawing/2018/hyperlinkcolor" matchingName="Title and body" type="tx">
+<p:sldLayout xmlns:a="http://schemas.openxmlformats.org/drawingml/2006/main" xmlns:r="http://schemas.openxmlformats.org/officeDocument/2006/relationships" xmlns:p="http://schemas.openxmlformats.org/presentationml/2006/main" matchingName="Title and body" type="tx">
   <p:cSld name="TITLE_AND_BODY">
     <p:spTree>
       <p:nvGrpSpPr>
-        <p:cNvPr id="16" name="Shape 16"/>
+        <p:cNvPr id="1" name="Shape 16"/>
         <p:cNvGrpSpPr/>
         <p:nvPr/>
       </p:nvGrpSpPr>
@@ -2269,7 +2445,9 @@
       <p:sp>
         <p:nvSpPr>
           <p:cNvPr id="17" name="Google Shape;17;p4"/>
-          <p:cNvSpPr txBox="1"/>
+          <p:cNvSpPr txBox="1">
+            <a:spLocks noGrp="1"/>
+          </p:cNvSpPr>
           <p:nvPr>
             <p:ph type="title"/>
           </p:nvPr>
@@ -2284,7 +2462,7 @@
           </a:prstGeom>
         </p:spPr>
         <p:txBody>
-          <a:bodyPr anchorCtr="0" anchor="t" bIns="91425" lIns="91425" spcFirstLastPara="1" rIns="91425" wrap="square" tIns="91425">
+          <a:bodyPr spcFirstLastPara="1" wrap="square" lIns="91425" tIns="91425" rIns="91425" bIns="91425" anchor="t" anchorCtr="0">
             <a:normAutofit/>
           </a:bodyPr>
           <a:lstStyle>
@@ -2388,15 +2566,19 @@
               <a:defRPr/>
             </a:lvl9pPr>
           </a:lstStyle>
-          <a:p/>
+          <a:p>
+            <a:endParaRPr/>
+          </a:p>
         </p:txBody>
       </p:sp>
       <p:sp>
         <p:nvSpPr>
           <p:cNvPr id="18" name="Google Shape;18;p4"/>
-          <p:cNvSpPr txBox="1"/>
+          <p:cNvSpPr txBox="1">
+            <a:spLocks noGrp="1"/>
+          </p:cNvSpPr>
           <p:nvPr>
-            <p:ph idx="1" type="body"/>
+            <p:ph type="body" idx="1"/>
           </p:nvPr>
         </p:nvSpPr>
         <p:spPr>
@@ -2409,11 +2591,11 @@
           </a:prstGeom>
         </p:spPr>
         <p:txBody>
-          <a:bodyPr anchorCtr="0" anchor="t" bIns="91425" lIns="91425" spcFirstLastPara="1" rIns="91425" wrap="square" tIns="91425">
+          <a:bodyPr spcFirstLastPara="1" wrap="square" lIns="91425" tIns="91425" rIns="91425" bIns="91425" anchor="t" anchorCtr="0">
             <a:normAutofit/>
           </a:bodyPr>
           <a:lstStyle>
-            <a:lvl1pPr indent="-342900" lvl="0" marL="457200">
+            <a:lvl1pPr marL="457200" lvl="0" indent="-342900">
               <a:spcBef>
                 <a:spcPts val="0"/>
               </a:spcBef>
@@ -2424,7 +2606,7 @@
               <a:buChar char="●"/>
               <a:defRPr/>
             </a:lvl1pPr>
-            <a:lvl2pPr indent="-317500" lvl="1" marL="914400">
+            <a:lvl2pPr marL="914400" lvl="1" indent="-317500">
               <a:spcBef>
                 <a:spcPts val="0"/>
               </a:spcBef>
@@ -2435,7 +2617,7 @@
               <a:buChar char="○"/>
               <a:defRPr/>
             </a:lvl2pPr>
-            <a:lvl3pPr indent="-317500" lvl="2" marL="1371600">
+            <a:lvl3pPr marL="1371600" lvl="2" indent="-317500">
               <a:spcBef>
                 <a:spcPts val="0"/>
               </a:spcBef>
@@ -2446,7 +2628,7 @@
               <a:buChar char="■"/>
               <a:defRPr/>
             </a:lvl3pPr>
-            <a:lvl4pPr indent="-317500" lvl="3" marL="1828800">
+            <a:lvl4pPr marL="1828800" lvl="3" indent="-317500">
               <a:spcBef>
                 <a:spcPts val="0"/>
               </a:spcBef>
@@ -2457,7 +2639,7 @@
               <a:buChar char="●"/>
               <a:defRPr/>
             </a:lvl4pPr>
-            <a:lvl5pPr indent="-317500" lvl="4" marL="2286000">
+            <a:lvl5pPr marL="2286000" lvl="4" indent="-317500">
               <a:spcBef>
                 <a:spcPts val="0"/>
               </a:spcBef>
@@ -2468,7 +2650,7 @@
               <a:buChar char="○"/>
               <a:defRPr/>
             </a:lvl5pPr>
-            <a:lvl6pPr indent="-317500" lvl="5" marL="2743200">
+            <a:lvl6pPr marL="2743200" lvl="5" indent="-317500">
               <a:spcBef>
                 <a:spcPts val="0"/>
               </a:spcBef>
@@ -2479,7 +2661,7 @@
               <a:buChar char="■"/>
               <a:defRPr/>
             </a:lvl6pPr>
-            <a:lvl7pPr indent="-317500" lvl="6" marL="3200400">
+            <a:lvl7pPr marL="3200400" lvl="6" indent="-317500">
               <a:spcBef>
                 <a:spcPts val="0"/>
               </a:spcBef>
@@ -2490,7 +2672,7 @@
               <a:buChar char="●"/>
               <a:defRPr/>
             </a:lvl7pPr>
-            <a:lvl8pPr indent="-317500" lvl="7" marL="3657600">
+            <a:lvl8pPr marL="3657600" lvl="7" indent="-317500">
               <a:spcBef>
                 <a:spcPts val="0"/>
               </a:spcBef>
@@ -2501,7 +2683,7 @@
               <a:buChar char="○"/>
               <a:defRPr/>
             </a:lvl8pPr>
-            <a:lvl9pPr indent="-317500" lvl="8" marL="4114800">
+            <a:lvl9pPr marL="4114800" lvl="8" indent="-317500">
               <a:spcBef>
                 <a:spcPts val="0"/>
               </a:spcBef>
@@ -2513,15 +2695,19 @@
               <a:defRPr/>
             </a:lvl9pPr>
           </a:lstStyle>
-          <a:p/>
+          <a:p>
+            <a:endParaRPr/>
+          </a:p>
         </p:txBody>
       </p:sp>
       <p:sp>
         <p:nvSpPr>
           <p:cNvPr id="19" name="Google Shape;19;p4"/>
-          <p:cNvSpPr txBox="1"/>
+          <p:cNvSpPr txBox="1">
+            <a:spLocks noGrp="1"/>
+          </p:cNvSpPr>
           <p:nvPr>
-            <p:ph idx="12" type="sldNum"/>
+            <p:ph type="sldNum" idx="12"/>
           </p:nvPr>
         </p:nvSpPr>
         <p:spPr>
@@ -2534,7 +2720,7 @@
           </a:prstGeom>
         </p:spPr>
         <p:txBody>
-          <a:bodyPr anchorCtr="0" anchor="ctr" bIns="91425" lIns="91425" spcFirstLastPara="1" rIns="91425" wrap="square" tIns="91425">
+          <a:bodyPr spcFirstLastPara="1" wrap="square" lIns="91425" tIns="91425" rIns="91425" bIns="91425" anchor="ctr" anchorCtr="0">
             <a:normAutofit/>
           </a:bodyPr>
           <a:lstStyle>
@@ -2576,7 +2762,7 @@
             </a:lvl9pPr>
           </a:lstStyle>
           <a:p>
-            <a:pPr indent="0" lvl="0" marL="0" rtl="0" algn="r">
+            <a:pPr marL="0" lvl="0" indent="0" algn="r" rtl="0">
               <a:spcBef>
                 <a:spcPts val="0"/>
               </a:spcBef>
@@ -2587,7 +2773,7 @@
             </a:pPr>
             <a:fld id="{00000000-1234-1234-1234-123412341234}" type="slidenum">
               <a:rPr lang="es"/>
-              <a:t>‹#›</a:t>
+              <a:t>‹Nº›</a:t>
             </a:fld>
             <a:endParaRPr/>
           </a:p>
@@ -2602,11 +2788,11 @@
 </file>
 
 <file path=ppt/slideLayouts/slideLayout4.xml><?xml version="1.0" encoding="utf-8"?>
-<p:sldLayout xmlns:a="http://schemas.openxmlformats.org/drawingml/2006/main" xmlns:r="http://schemas.openxmlformats.org/officeDocument/2006/relationships" xmlns:mc="http://schemas.openxmlformats.org/markup-compatibility/2006" xmlns:mv="urn:schemas-microsoft-com:mac:vml" xmlns:p="http://schemas.openxmlformats.org/presentationml/2006/main" xmlns:c="http://schemas.openxmlformats.org/drawingml/2006/chart" xmlns:dgm="http://schemas.openxmlformats.org/drawingml/2006/diagram" xmlns:o="urn:schemas-microsoft-com:office:office" xmlns:v="urn:schemas-microsoft-com:vml" xmlns:pvml="urn:schemas-microsoft-com:office:powerpoint" xmlns:com="http://schemas.openxmlformats.org/drawingml/2006/compatibility" xmlns:p14="http://schemas.microsoft.com/office/powerpoint/2010/main" xmlns:p15="http://schemas.microsoft.com/office/powerpoint/2012/main" xmlns:ahyp="http://schemas.microsoft.com/office/drawing/2018/hyperlinkcolor" matchingName="Title and two columns" type="twoColTx">
+<p:sldLayout xmlns:a="http://schemas.openxmlformats.org/drawingml/2006/main" xmlns:r="http://schemas.openxmlformats.org/officeDocument/2006/relationships" xmlns:p="http://schemas.openxmlformats.org/presentationml/2006/main" matchingName="Title and two columns" type="twoColTx">
   <p:cSld name="TITLE_AND_TWO_COLUMNS">
     <p:spTree>
       <p:nvGrpSpPr>
-        <p:cNvPr id="20" name="Shape 20"/>
+        <p:cNvPr id="1" name="Shape 20"/>
         <p:cNvGrpSpPr/>
         <p:nvPr/>
       </p:nvGrpSpPr>
@@ -2621,7 +2807,9 @@
       <p:sp>
         <p:nvSpPr>
           <p:cNvPr id="21" name="Google Shape;21;p5"/>
-          <p:cNvSpPr txBox="1"/>
+          <p:cNvSpPr txBox="1">
+            <a:spLocks noGrp="1"/>
+          </p:cNvSpPr>
           <p:nvPr>
             <p:ph type="title"/>
           </p:nvPr>
@@ -2636,7 +2824,7 @@
           </a:prstGeom>
         </p:spPr>
         <p:txBody>
-          <a:bodyPr anchorCtr="0" anchor="t" bIns="91425" lIns="91425" spcFirstLastPara="1" rIns="91425" wrap="square" tIns="91425">
+          <a:bodyPr spcFirstLastPara="1" wrap="square" lIns="91425" tIns="91425" rIns="91425" bIns="91425" anchor="t" anchorCtr="0">
             <a:normAutofit/>
           </a:bodyPr>
           <a:lstStyle>
@@ -2740,15 +2928,19 @@
               <a:defRPr/>
             </a:lvl9pPr>
           </a:lstStyle>
-          <a:p/>
+          <a:p>
+            <a:endParaRPr/>
+          </a:p>
         </p:txBody>
       </p:sp>
       <p:sp>
         <p:nvSpPr>
           <p:cNvPr id="22" name="Google Shape;22;p5"/>
-          <p:cNvSpPr txBox="1"/>
+          <p:cNvSpPr txBox="1">
+            <a:spLocks noGrp="1"/>
+          </p:cNvSpPr>
           <p:nvPr>
-            <p:ph idx="1" type="body"/>
+            <p:ph type="body" idx="1"/>
           </p:nvPr>
         </p:nvSpPr>
         <p:spPr>
@@ -2761,11 +2953,11 @@
           </a:prstGeom>
         </p:spPr>
         <p:txBody>
-          <a:bodyPr anchorCtr="0" anchor="t" bIns="91425" lIns="91425" spcFirstLastPara="1" rIns="91425" wrap="square" tIns="91425">
+          <a:bodyPr spcFirstLastPara="1" wrap="square" lIns="91425" tIns="91425" rIns="91425" bIns="91425" anchor="t" anchorCtr="0">
             <a:normAutofit/>
           </a:bodyPr>
           <a:lstStyle>
-            <a:lvl1pPr indent="-317500" lvl="0" marL="457200">
+            <a:lvl1pPr marL="457200" lvl="0" indent="-317500">
               <a:spcBef>
                 <a:spcPts val="0"/>
               </a:spcBef>
@@ -2776,7 +2968,7 @@
               <a:buChar char="●"/>
               <a:defRPr sz="1400"/>
             </a:lvl1pPr>
-            <a:lvl2pPr indent="-304800" lvl="1" marL="914400">
+            <a:lvl2pPr marL="914400" lvl="1" indent="-304800">
               <a:spcBef>
                 <a:spcPts val="0"/>
               </a:spcBef>
@@ -2787,7 +2979,7 @@
               <a:buChar char="○"/>
               <a:defRPr sz="1200"/>
             </a:lvl2pPr>
-            <a:lvl3pPr indent="-304800" lvl="2" marL="1371600">
+            <a:lvl3pPr marL="1371600" lvl="2" indent="-304800">
               <a:spcBef>
                 <a:spcPts val="0"/>
               </a:spcBef>
@@ -2798,7 +2990,7 @@
               <a:buChar char="■"/>
               <a:defRPr sz="1200"/>
             </a:lvl3pPr>
-            <a:lvl4pPr indent="-304800" lvl="3" marL="1828800">
+            <a:lvl4pPr marL="1828800" lvl="3" indent="-304800">
               <a:spcBef>
                 <a:spcPts val="0"/>
               </a:spcBef>
@@ -2809,7 +3001,7 @@
               <a:buChar char="●"/>
               <a:defRPr sz="1200"/>
             </a:lvl4pPr>
-            <a:lvl5pPr indent="-304800" lvl="4" marL="2286000">
+            <a:lvl5pPr marL="2286000" lvl="4" indent="-304800">
               <a:spcBef>
                 <a:spcPts val="0"/>
               </a:spcBef>
@@ -2820,7 +3012,7 @@
               <a:buChar char="○"/>
               <a:defRPr sz="1200"/>
             </a:lvl5pPr>
-            <a:lvl6pPr indent="-304800" lvl="5" marL="2743200">
+            <a:lvl6pPr marL="2743200" lvl="5" indent="-304800">
               <a:spcBef>
                 <a:spcPts val="0"/>
               </a:spcBef>
@@ -2831,7 +3023,7 @@
               <a:buChar char="■"/>
               <a:defRPr sz="1200"/>
             </a:lvl6pPr>
-            <a:lvl7pPr indent="-304800" lvl="6" marL="3200400">
+            <a:lvl7pPr marL="3200400" lvl="6" indent="-304800">
               <a:spcBef>
                 <a:spcPts val="0"/>
               </a:spcBef>
@@ -2842,7 +3034,7 @@
               <a:buChar char="●"/>
               <a:defRPr sz="1200"/>
             </a:lvl7pPr>
-            <a:lvl8pPr indent="-304800" lvl="7" marL="3657600">
+            <a:lvl8pPr marL="3657600" lvl="7" indent="-304800">
               <a:spcBef>
                 <a:spcPts val="0"/>
               </a:spcBef>
@@ -2853,7 +3045,7 @@
               <a:buChar char="○"/>
               <a:defRPr sz="1200"/>
             </a:lvl8pPr>
-            <a:lvl9pPr indent="-304800" lvl="8" marL="4114800">
+            <a:lvl9pPr marL="4114800" lvl="8" indent="-304800">
               <a:spcBef>
                 <a:spcPts val="0"/>
               </a:spcBef>
@@ -2865,15 +3057,19 @@
               <a:defRPr sz="1200"/>
             </a:lvl9pPr>
           </a:lstStyle>
-          <a:p/>
+          <a:p>
+            <a:endParaRPr/>
+          </a:p>
         </p:txBody>
       </p:sp>
       <p:sp>
         <p:nvSpPr>
           <p:cNvPr id="23" name="Google Shape;23;p5"/>
-          <p:cNvSpPr txBox="1"/>
+          <p:cNvSpPr txBox="1">
+            <a:spLocks noGrp="1"/>
+          </p:cNvSpPr>
           <p:nvPr>
-            <p:ph idx="2" type="body"/>
+            <p:ph type="body" idx="2"/>
           </p:nvPr>
         </p:nvSpPr>
         <p:spPr>
@@ -2886,11 +3082,11 @@
           </a:prstGeom>
         </p:spPr>
         <p:txBody>
-          <a:bodyPr anchorCtr="0" anchor="t" bIns="91425" lIns="91425" spcFirstLastPara="1" rIns="91425" wrap="square" tIns="91425">
+          <a:bodyPr spcFirstLastPara="1" wrap="square" lIns="91425" tIns="91425" rIns="91425" bIns="91425" anchor="t" anchorCtr="0">
             <a:normAutofit/>
           </a:bodyPr>
           <a:lstStyle>
-            <a:lvl1pPr indent="-317500" lvl="0" marL="457200">
+            <a:lvl1pPr marL="457200" lvl="0" indent="-317500">
               <a:spcBef>
                 <a:spcPts val="0"/>
               </a:spcBef>
@@ -2901,7 +3097,7 @@
               <a:buChar char="●"/>
               <a:defRPr sz="1400"/>
             </a:lvl1pPr>
-            <a:lvl2pPr indent="-304800" lvl="1" marL="914400">
+            <a:lvl2pPr marL="914400" lvl="1" indent="-304800">
               <a:spcBef>
                 <a:spcPts val="0"/>
               </a:spcBef>
@@ -2912,7 +3108,7 @@
               <a:buChar char="○"/>
               <a:defRPr sz="1200"/>
             </a:lvl2pPr>
-            <a:lvl3pPr indent="-304800" lvl="2" marL="1371600">
+            <a:lvl3pPr marL="1371600" lvl="2" indent="-304800">
               <a:spcBef>
                 <a:spcPts val="0"/>
               </a:spcBef>
@@ -2923,7 +3119,7 @@
               <a:buChar char="■"/>
               <a:defRPr sz="1200"/>
             </a:lvl3pPr>
-            <a:lvl4pPr indent="-304800" lvl="3" marL="1828800">
+            <a:lvl4pPr marL="1828800" lvl="3" indent="-304800">
               <a:spcBef>
                 <a:spcPts val="0"/>
               </a:spcBef>
@@ -2934,7 +3130,7 @@
               <a:buChar char="●"/>
               <a:defRPr sz="1200"/>
             </a:lvl4pPr>
-            <a:lvl5pPr indent="-304800" lvl="4" marL="2286000">
+            <a:lvl5pPr marL="2286000" lvl="4" indent="-304800">
               <a:spcBef>
                 <a:spcPts val="0"/>
               </a:spcBef>
@@ -2945,7 +3141,7 @@
               <a:buChar char="○"/>
               <a:defRPr sz="1200"/>
             </a:lvl5pPr>
-            <a:lvl6pPr indent="-304800" lvl="5" marL="2743200">
+            <a:lvl6pPr marL="2743200" lvl="5" indent="-304800">
               <a:spcBef>
                 <a:spcPts val="0"/>
               </a:spcBef>
@@ -2956,7 +3152,7 @@
               <a:buChar char="■"/>
               <a:defRPr sz="1200"/>
             </a:lvl6pPr>
-            <a:lvl7pPr indent="-304800" lvl="6" marL="3200400">
+            <a:lvl7pPr marL="3200400" lvl="6" indent="-304800">
               <a:spcBef>
                 <a:spcPts val="0"/>
               </a:spcBef>
@@ -2967,7 +3163,7 @@
               <a:buChar char="●"/>
               <a:defRPr sz="1200"/>
             </a:lvl7pPr>
-            <a:lvl8pPr indent="-304800" lvl="7" marL="3657600">
+            <a:lvl8pPr marL="3657600" lvl="7" indent="-304800">
               <a:spcBef>
                 <a:spcPts val="0"/>
               </a:spcBef>
@@ -2978,7 +3174,7 @@
               <a:buChar char="○"/>
               <a:defRPr sz="1200"/>
             </a:lvl8pPr>
-            <a:lvl9pPr indent="-304800" lvl="8" marL="4114800">
+            <a:lvl9pPr marL="4114800" lvl="8" indent="-304800">
               <a:spcBef>
                 <a:spcPts val="0"/>
               </a:spcBef>
@@ -2990,15 +3186,19 @@
               <a:defRPr sz="1200"/>
             </a:lvl9pPr>
           </a:lstStyle>
-          <a:p/>
+          <a:p>
+            <a:endParaRPr/>
+          </a:p>
         </p:txBody>
       </p:sp>
       <p:sp>
         <p:nvSpPr>
           <p:cNvPr id="24" name="Google Shape;24;p5"/>
-          <p:cNvSpPr txBox="1"/>
+          <p:cNvSpPr txBox="1">
+            <a:spLocks noGrp="1"/>
+          </p:cNvSpPr>
           <p:nvPr>
-            <p:ph idx="12" type="sldNum"/>
+            <p:ph type="sldNum" idx="12"/>
           </p:nvPr>
         </p:nvSpPr>
         <p:spPr>
@@ -3011,7 +3211,7 @@
           </a:prstGeom>
         </p:spPr>
         <p:txBody>
-          <a:bodyPr anchorCtr="0" anchor="ctr" bIns="91425" lIns="91425" spcFirstLastPara="1" rIns="91425" wrap="square" tIns="91425">
+          <a:bodyPr spcFirstLastPara="1" wrap="square" lIns="91425" tIns="91425" rIns="91425" bIns="91425" anchor="ctr" anchorCtr="0">
             <a:normAutofit/>
           </a:bodyPr>
           <a:lstStyle>
@@ -3053,7 +3253,7 @@
             </a:lvl9pPr>
           </a:lstStyle>
           <a:p>
-            <a:pPr indent="0" lvl="0" marL="0" rtl="0" algn="r">
+            <a:pPr marL="0" lvl="0" indent="0" algn="r" rtl="0">
               <a:spcBef>
                 <a:spcPts val="0"/>
               </a:spcBef>
@@ -3064,7 +3264,7 @@
             </a:pPr>
             <a:fld id="{00000000-1234-1234-1234-123412341234}" type="slidenum">
               <a:rPr lang="es"/>
-              <a:t>‹#›</a:t>
+              <a:t>‹Nº›</a:t>
             </a:fld>
             <a:endParaRPr/>
           </a:p>
@@ -3079,11 +3279,11 @@
 </file>
 
 <file path=ppt/slideLayouts/slideLayout5.xml><?xml version="1.0" encoding="utf-8"?>
-<p:sldLayout xmlns:a="http://schemas.openxmlformats.org/drawingml/2006/main" xmlns:r="http://schemas.openxmlformats.org/officeDocument/2006/relationships" xmlns:mc="http://schemas.openxmlformats.org/markup-compatibility/2006" xmlns:mv="urn:schemas-microsoft-com:mac:vml" xmlns:p="http://schemas.openxmlformats.org/presentationml/2006/main" xmlns:c="http://schemas.openxmlformats.org/drawingml/2006/chart" xmlns:dgm="http://schemas.openxmlformats.org/drawingml/2006/diagram" xmlns:o="urn:schemas-microsoft-com:office:office" xmlns:v="urn:schemas-microsoft-com:vml" xmlns:pvml="urn:schemas-microsoft-com:office:powerpoint" xmlns:com="http://schemas.openxmlformats.org/drawingml/2006/compatibility" xmlns:p14="http://schemas.microsoft.com/office/powerpoint/2010/main" xmlns:p15="http://schemas.microsoft.com/office/powerpoint/2012/main" xmlns:ahyp="http://schemas.microsoft.com/office/drawing/2018/hyperlinkcolor" matchingName="Title only" type="titleOnly">
+<p:sldLayout xmlns:a="http://schemas.openxmlformats.org/drawingml/2006/main" xmlns:r="http://schemas.openxmlformats.org/officeDocument/2006/relationships" xmlns:p="http://schemas.openxmlformats.org/presentationml/2006/main" matchingName="Title only" type="titleOnly">
   <p:cSld name="TITLE_ONLY">
     <p:spTree>
       <p:nvGrpSpPr>
-        <p:cNvPr id="25" name="Shape 25"/>
+        <p:cNvPr id="1" name="Shape 25"/>
         <p:cNvGrpSpPr/>
         <p:nvPr/>
       </p:nvGrpSpPr>
@@ -3098,7 +3298,9 @@
       <p:sp>
         <p:nvSpPr>
           <p:cNvPr id="26" name="Google Shape;26;p6"/>
-          <p:cNvSpPr txBox="1"/>
+          <p:cNvSpPr txBox="1">
+            <a:spLocks noGrp="1"/>
+          </p:cNvSpPr>
           <p:nvPr>
             <p:ph type="title"/>
           </p:nvPr>
@@ -3113,7 +3315,7 @@
           </a:prstGeom>
         </p:spPr>
         <p:txBody>
-          <a:bodyPr anchorCtr="0" anchor="t" bIns="91425" lIns="91425" spcFirstLastPara="1" rIns="91425" wrap="square" tIns="91425">
+          <a:bodyPr spcFirstLastPara="1" wrap="square" lIns="91425" tIns="91425" rIns="91425" bIns="91425" anchor="t" anchorCtr="0">
             <a:normAutofit/>
           </a:bodyPr>
           <a:lstStyle>
@@ -3217,15 +3419,19 @@
               <a:defRPr/>
             </a:lvl9pPr>
           </a:lstStyle>
-          <a:p/>
+          <a:p>
+            <a:endParaRPr/>
+          </a:p>
         </p:txBody>
       </p:sp>
       <p:sp>
         <p:nvSpPr>
           <p:cNvPr id="27" name="Google Shape;27;p6"/>
-          <p:cNvSpPr txBox="1"/>
+          <p:cNvSpPr txBox="1">
+            <a:spLocks noGrp="1"/>
+          </p:cNvSpPr>
           <p:nvPr>
-            <p:ph idx="12" type="sldNum"/>
+            <p:ph type="sldNum" idx="12"/>
           </p:nvPr>
         </p:nvSpPr>
         <p:spPr>
@@ -3238,7 +3444,7 @@
           </a:prstGeom>
         </p:spPr>
         <p:txBody>
-          <a:bodyPr anchorCtr="0" anchor="ctr" bIns="91425" lIns="91425" spcFirstLastPara="1" rIns="91425" wrap="square" tIns="91425">
+          <a:bodyPr spcFirstLastPara="1" wrap="square" lIns="91425" tIns="91425" rIns="91425" bIns="91425" anchor="ctr" anchorCtr="0">
             <a:normAutofit/>
           </a:bodyPr>
           <a:lstStyle>
@@ -3280,7 +3486,7 @@
             </a:lvl9pPr>
           </a:lstStyle>
           <a:p>
-            <a:pPr indent="0" lvl="0" marL="0" rtl="0" algn="r">
+            <a:pPr marL="0" lvl="0" indent="0" algn="r" rtl="0">
               <a:spcBef>
                 <a:spcPts val="0"/>
               </a:spcBef>
@@ -3291,7 +3497,7 @@
             </a:pPr>
             <a:fld id="{00000000-1234-1234-1234-123412341234}" type="slidenum">
               <a:rPr lang="es"/>
-              <a:t>‹#›</a:t>
+              <a:t>‹Nº›</a:t>
             </a:fld>
             <a:endParaRPr/>
           </a:p>
@@ -3306,11 +3512,11 @@
 </file>
 
 <file path=ppt/slideLayouts/slideLayout6.xml><?xml version="1.0" encoding="utf-8"?>
-<p:sldLayout xmlns:a="http://schemas.openxmlformats.org/drawingml/2006/main" xmlns:r="http://schemas.openxmlformats.org/officeDocument/2006/relationships" xmlns:mc="http://schemas.openxmlformats.org/markup-compatibility/2006" xmlns:mv="urn:schemas-microsoft-com:mac:vml" xmlns:p="http://schemas.openxmlformats.org/presentationml/2006/main" xmlns:c="http://schemas.openxmlformats.org/drawingml/2006/chart" xmlns:dgm="http://schemas.openxmlformats.org/drawingml/2006/diagram" xmlns:o="urn:schemas-microsoft-com:office:office" xmlns:v="urn:schemas-microsoft-com:vml" xmlns:pvml="urn:schemas-microsoft-com:office:powerpoint" xmlns:com="http://schemas.openxmlformats.org/drawingml/2006/compatibility" xmlns:p14="http://schemas.microsoft.com/office/powerpoint/2010/main" xmlns:p15="http://schemas.microsoft.com/office/powerpoint/2012/main" xmlns:ahyp="http://schemas.microsoft.com/office/drawing/2018/hyperlinkcolor" matchingName="One column text">
+<p:sldLayout xmlns:a="http://schemas.openxmlformats.org/drawingml/2006/main" xmlns:r="http://schemas.openxmlformats.org/officeDocument/2006/relationships" xmlns:p="http://schemas.openxmlformats.org/presentationml/2006/main" matchingName="One column text">
   <p:cSld name="ONE_COLUMN_TEXT">
     <p:spTree>
       <p:nvGrpSpPr>
-        <p:cNvPr id="28" name="Shape 28"/>
+        <p:cNvPr id="1" name="Shape 28"/>
         <p:cNvGrpSpPr/>
         <p:nvPr/>
       </p:nvGrpSpPr>
@@ -3325,7 +3531,9 @@
       <p:sp>
         <p:nvSpPr>
           <p:cNvPr id="29" name="Google Shape;29;p7"/>
-          <p:cNvSpPr txBox="1"/>
+          <p:cNvSpPr txBox="1">
+            <a:spLocks noGrp="1"/>
+          </p:cNvSpPr>
           <p:nvPr>
             <p:ph type="title"/>
           </p:nvPr>
@@ -3340,7 +3548,7 @@
           </a:prstGeom>
         </p:spPr>
         <p:txBody>
-          <a:bodyPr anchorCtr="0" anchor="b" bIns="91425" lIns="91425" spcFirstLastPara="1" rIns="91425" wrap="square" tIns="91425">
+          <a:bodyPr spcFirstLastPara="1" wrap="square" lIns="91425" tIns="91425" rIns="91425" bIns="91425" anchor="b" anchorCtr="0">
             <a:normAutofit/>
           </a:bodyPr>
           <a:lstStyle>
@@ -3444,15 +3652,19 @@
               <a:defRPr sz="2400"/>
             </a:lvl9pPr>
           </a:lstStyle>
-          <a:p/>
+          <a:p>
+            <a:endParaRPr/>
+          </a:p>
         </p:txBody>
       </p:sp>
       <p:sp>
         <p:nvSpPr>
           <p:cNvPr id="30" name="Google Shape;30;p7"/>
-          <p:cNvSpPr txBox="1"/>
+          <p:cNvSpPr txBox="1">
+            <a:spLocks noGrp="1"/>
+          </p:cNvSpPr>
           <p:nvPr>
-            <p:ph idx="1" type="body"/>
+            <p:ph type="body" idx="1"/>
           </p:nvPr>
         </p:nvSpPr>
         <p:spPr>
@@ -3465,11 +3677,11 @@
           </a:prstGeom>
         </p:spPr>
         <p:txBody>
-          <a:bodyPr anchorCtr="0" anchor="t" bIns="91425" lIns="91425" spcFirstLastPara="1" rIns="91425" wrap="square" tIns="91425">
+          <a:bodyPr spcFirstLastPara="1" wrap="square" lIns="91425" tIns="91425" rIns="91425" bIns="91425" anchor="t" anchorCtr="0">
             <a:normAutofit/>
           </a:bodyPr>
           <a:lstStyle>
-            <a:lvl1pPr indent="-304800" lvl="0" marL="457200">
+            <a:lvl1pPr marL="457200" lvl="0" indent="-304800">
               <a:spcBef>
                 <a:spcPts val="0"/>
               </a:spcBef>
@@ -3480,7 +3692,7 @@
               <a:buChar char="●"/>
               <a:defRPr sz="1200"/>
             </a:lvl1pPr>
-            <a:lvl2pPr indent="-304800" lvl="1" marL="914400">
+            <a:lvl2pPr marL="914400" lvl="1" indent="-304800">
               <a:spcBef>
                 <a:spcPts val="0"/>
               </a:spcBef>
@@ -3491,7 +3703,7 @@
               <a:buChar char="○"/>
               <a:defRPr sz="1200"/>
             </a:lvl2pPr>
-            <a:lvl3pPr indent="-304800" lvl="2" marL="1371600">
+            <a:lvl3pPr marL="1371600" lvl="2" indent="-304800">
               <a:spcBef>
                 <a:spcPts val="0"/>
               </a:spcBef>
@@ -3502,7 +3714,7 @@
               <a:buChar char="■"/>
               <a:defRPr sz="1200"/>
             </a:lvl3pPr>
-            <a:lvl4pPr indent="-304800" lvl="3" marL="1828800">
+            <a:lvl4pPr marL="1828800" lvl="3" indent="-304800">
               <a:spcBef>
                 <a:spcPts val="0"/>
               </a:spcBef>
@@ -3513,7 +3725,7 @@
               <a:buChar char="●"/>
               <a:defRPr sz="1200"/>
             </a:lvl4pPr>
-            <a:lvl5pPr indent="-304800" lvl="4" marL="2286000">
+            <a:lvl5pPr marL="2286000" lvl="4" indent="-304800">
               <a:spcBef>
                 <a:spcPts val="0"/>
               </a:spcBef>
@@ -3524,7 +3736,7 @@
               <a:buChar char="○"/>
               <a:defRPr sz="1200"/>
             </a:lvl5pPr>
-            <a:lvl6pPr indent="-304800" lvl="5" marL="2743200">
+            <a:lvl6pPr marL="2743200" lvl="5" indent="-304800">
               <a:spcBef>
                 <a:spcPts val="0"/>
               </a:spcBef>
@@ -3535,7 +3747,7 @@
               <a:buChar char="■"/>
               <a:defRPr sz="1200"/>
             </a:lvl6pPr>
-            <a:lvl7pPr indent="-304800" lvl="6" marL="3200400">
+            <a:lvl7pPr marL="3200400" lvl="6" indent="-304800">
               <a:spcBef>
                 <a:spcPts val="0"/>
               </a:spcBef>
@@ -3546,7 +3758,7 @@
               <a:buChar char="●"/>
               <a:defRPr sz="1200"/>
             </a:lvl7pPr>
-            <a:lvl8pPr indent="-304800" lvl="7" marL="3657600">
+            <a:lvl8pPr marL="3657600" lvl="7" indent="-304800">
               <a:spcBef>
                 <a:spcPts val="0"/>
               </a:spcBef>
@@ -3557,7 +3769,7 @@
               <a:buChar char="○"/>
               <a:defRPr sz="1200"/>
             </a:lvl8pPr>
-            <a:lvl9pPr indent="-304800" lvl="8" marL="4114800">
+            <a:lvl9pPr marL="4114800" lvl="8" indent="-304800">
               <a:spcBef>
                 <a:spcPts val="0"/>
               </a:spcBef>
@@ -3569,15 +3781,19 @@
               <a:defRPr sz="1200"/>
             </a:lvl9pPr>
           </a:lstStyle>
-          <a:p/>
+          <a:p>
+            <a:endParaRPr/>
+          </a:p>
         </p:txBody>
       </p:sp>
       <p:sp>
         <p:nvSpPr>
           <p:cNvPr id="31" name="Google Shape;31;p7"/>
-          <p:cNvSpPr txBox="1"/>
+          <p:cNvSpPr txBox="1">
+            <a:spLocks noGrp="1"/>
+          </p:cNvSpPr>
           <p:nvPr>
-            <p:ph idx="12" type="sldNum"/>
+            <p:ph type="sldNum" idx="12"/>
           </p:nvPr>
         </p:nvSpPr>
         <p:spPr>
@@ -3590,7 +3806,7 @@
           </a:prstGeom>
         </p:spPr>
         <p:txBody>
-          <a:bodyPr anchorCtr="0" anchor="ctr" bIns="91425" lIns="91425" spcFirstLastPara="1" rIns="91425" wrap="square" tIns="91425">
+          <a:bodyPr spcFirstLastPara="1" wrap="square" lIns="91425" tIns="91425" rIns="91425" bIns="91425" anchor="ctr" anchorCtr="0">
             <a:normAutofit/>
           </a:bodyPr>
           <a:lstStyle>
@@ -3632,7 +3848,7 @@
             </a:lvl9pPr>
           </a:lstStyle>
           <a:p>
-            <a:pPr indent="0" lvl="0" marL="0" rtl="0" algn="r">
+            <a:pPr marL="0" lvl="0" indent="0" algn="r" rtl="0">
               <a:spcBef>
                 <a:spcPts val="0"/>
               </a:spcBef>
@@ -3643,7 +3859,7 @@
             </a:pPr>
             <a:fld id="{00000000-1234-1234-1234-123412341234}" type="slidenum">
               <a:rPr lang="es"/>
-              <a:t>‹#›</a:t>
+              <a:t>‹Nº›</a:t>
             </a:fld>
             <a:endParaRPr/>
           </a:p>
@@ -3658,11 +3874,11 @@
 </file>
 
 <file path=ppt/slideLayouts/slideLayout7.xml><?xml version="1.0" encoding="utf-8"?>
-<p:sldLayout xmlns:a="http://schemas.openxmlformats.org/drawingml/2006/main" xmlns:r="http://schemas.openxmlformats.org/officeDocument/2006/relationships" xmlns:mc="http://schemas.openxmlformats.org/markup-compatibility/2006" xmlns:mv="urn:schemas-microsoft-com:mac:vml" xmlns:p="http://schemas.openxmlformats.org/presentationml/2006/main" xmlns:c="http://schemas.openxmlformats.org/drawingml/2006/chart" xmlns:dgm="http://schemas.openxmlformats.org/drawingml/2006/diagram" xmlns:o="urn:schemas-microsoft-com:office:office" xmlns:v="urn:schemas-microsoft-com:vml" xmlns:pvml="urn:schemas-microsoft-com:office:powerpoint" xmlns:com="http://schemas.openxmlformats.org/drawingml/2006/compatibility" xmlns:p14="http://schemas.microsoft.com/office/powerpoint/2010/main" xmlns:p15="http://schemas.microsoft.com/office/powerpoint/2012/main" xmlns:ahyp="http://schemas.microsoft.com/office/drawing/2018/hyperlinkcolor" matchingName="Main point">
+<p:sldLayout xmlns:a="http://schemas.openxmlformats.org/drawingml/2006/main" xmlns:r="http://schemas.openxmlformats.org/officeDocument/2006/relationships" xmlns:p="http://schemas.openxmlformats.org/presentationml/2006/main" matchingName="Main point">
   <p:cSld name="MAIN_POINT">
     <p:spTree>
       <p:nvGrpSpPr>
-        <p:cNvPr id="32" name="Shape 32"/>
+        <p:cNvPr id="1" name="Shape 32"/>
         <p:cNvGrpSpPr/>
         <p:nvPr/>
       </p:nvGrpSpPr>
@@ -3677,7 +3893,9 @@
       <p:sp>
         <p:nvSpPr>
           <p:cNvPr id="33" name="Google Shape;33;p8"/>
-          <p:cNvSpPr txBox="1"/>
+          <p:cNvSpPr txBox="1">
+            <a:spLocks noGrp="1"/>
+          </p:cNvSpPr>
           <p:nvPr>
             <p:ph type="title"/>
           </p:nvPr>
@@ -3692,7 +3910,7 @@
           </a:prstGeom>
         </p:spPr>
         <p:txBody>
-          <a:bodyPr anchorCtr="0" anchor="ctr" bIns="91425" lIns="91425" spcFirstLastPara="1" rIns="91425" wrap="square" tIns="91425">
+          <a:bodyPr spcFirstLastPara="1" wrap="square" lIns="91425" tIns="91425" rIns="91425" bIns="91425" anchor="ctr" anchorCtr="0">
             <a:normAutofit/>
           </a:bodyPr>
           <a:lstStyle>
@@ -3796,15 +4014,19 @@
               <a:defRPr sz="4800"/>
             </a:lvl9pPr>
           </a:lstStyle>
-          <a:p/>
+          <a:p>
+            <a:endParaRPr/>
+          </a:p>
         </p:txBody>
       </p:sp>
       <p:sp>
         <p:nvSpPr>
           <p:cNvPr id="34" name="Google Shape;34;p8"/>
-          <p:cNvSpPr txBox="1"/>
+          <p:cNvSpPr txBox="1">
+            <a:spLocks noGrp="1"/>
+          </p:cNvSpPr>
           <p:nvPr>
-            <p:ph idx="12" type="sldNum"/>
+            <p:ph type="sldNum" idx="12"/>
           </p:nvPr>
         </p:nvSpPr>
         <p:spPr>
@@ -3817,7 +4039,7 @@
           </a:prstGeom>
         </p:spPr>
         <p:txBody>
-          <a:bodyPr anchorCtr="0" anchor="ctr" bIns="91425" lIns="91425" spcFirstLastPara="1" rIns="91425" wrap="square" tIns="91425">
+          <a:bodyPr spcFirstLastPara="1" wrap="square" lIns="91425" tIns="91425" rIns="91425" bIns="91425" anchor="ctr" anchorCtr="0">
             <a:normAutofit/>
           </a:bodyPr>
           <a:lstStyle>
@@ -3859,7 +4081,7 @@
             </a:lvl9pPr>
           </a:lstStyle>
           <a:p>
-            <a:pPr indent="0" lvl="0" marL="0" rtl="0" algn="r">
+            <a:pPr marL="0" lvl="0" indent="0" algn="r" rtl="0">
               <a:spcBef>
                 <a:spcPts val="0"/>
               </a:spcBef>
@@ -3870,7 +4092,7 @@
             </a:pPr>
             <a:fld id="{00000000-1234-1234-1234-123412341234}" type="slidenum">
               <a:rPr lang="es"/>
-              <a:t>‹#›</a:t>
+              <a:t>‹Nº›</a:t>
             </a:fld>
             <a:endParaRPr/>
           </a:p>
@@ -3885,11 +4107,11 @@
 </file>
 
 <file path=ppt/slideLayouts/slideLayout8.xml><?xml version="1.0" encoding="utf-8"?>
-<p:sldLayout xmlns:a="http://schemas.openxmlformats.org/drawingml/2006/main" xmlns:r="http://schemas.openxmlformats.org/officeDocument/2006/relationships" xmlns:mc="http://schemas.openxmlformats.org/markup-compatibility/2006" xmlns:mv="urn:schemas-microsoft-com:mac:vml" xmlns:p="http://schemas.openxmlformats.org/presentationml/2006/main" xmlns:c="http://schemas.openxmlformats.org/drawingml/2006/chart" xmlns:dgm="http://schemas.openxmlformats.org/drawingml/2006/diagram" xmlns:o="urn:schemas-microsoft-com:office:office" xmlns:v="urn:schemas-microsoft-com:vml" xmlns:pvml="urn:schemas-microsoft-com:office:powerpoint" xmlns:com="http://schemas.openxmlformats.org/drawingml/2006/compatibility" xmlns:p14="http://schemas.microsoft.com/office/powerpoint/2010/main" xmlns:p15="http://schemas.microsoft.com/office/powerpoint/2012/main" xmlns:ahyp="http://schemas.microsoft.com/office/drawing/2018/hyperlinkcolor" matchingName="Section title and description">
+<p:sldLayout xmlns:a="http://schemas.openxmlformats.org/drawingml/2006/main" xmlns:r="http://schemas.openxmlformats.org/officeDocument/2006/relationships" xmlns:p="http://schemas.openxmlformats.org/presentationml/2006/main" matchingName="Section title and description">
   <p:cSld name="SECTION_TITLE_AND_DESCRIPTION">
     <p:spTree>
       <p:nvGrpSpPr>
-        <p:cNvPr id="35" name="Shape 35"/>
+        <p:cNvPr id="1" name="Shape 35"/>
         <p:cNvGrpSpPr/>
         <p:nvPr/>
       </p:nvGrpSpPr>
@@ -3923,12 +4145,12 @@
           </a:ln>
         </p:spPr>
         <p:txBody>
-          <a:bodyPr anchorCtr="0" anchor="ctr" bIns="91425" lIns="91425" spcFirstLastPara="1" rIns="91425" wrap="square" tIns="91425">
+          <a:bodyPr spcFirstLastPara="1" wrap="square" lIns="91425" tIns="91425" rIns="91425" bIns="91425" anchor="ctr" anchorCtr="0">
             <a:noAutofit/>
           </a:bodyPr>
           <a:lstStyle/>
           <a:p>
-            <a:pPr indent="0" lvl="0" marL="0" rtl="0" algn="l">
+            <a:pPr marL="0" lvl="0" indent="0" algn="l" rtl="0">
               <a:spcBef>
                 <a:spcPts val="0"/>
               </a:spcBef>
@@ -3937,9 +4159,6 @@
               </a:spcAft>
               <a:buNone/>
             </a:pPr>
-            <a:r>
-              <a:t/>
-            </a:r>
             <a:endParaRPr/>
           </a:p>
         </p:txBody>
@@ -3947,7 +4166,9 @@
       <p:sp>
         <p:nvSpPr>
           <p:cNvPr id="37" name="Google Shape;37;p9"/>
-          <p:cNvSpPr txBox="1"/>
+          <p:cNvSpPr txBox="1">
+            <a:spLocks noGrp="1"/>
+          </p:cNvSpPr>
           <p:nvPr>
             <p:ph type="title"/>
           </p:nvPr>
@@ -3962,7 +4183,7 @@
           </a:prstGeom>
         </p:spPr>
         <p:txBody>
-          <a:bodyPr anchorCtr="0" anchor="b" bIns="91425" lIns="91425" spcFirstLastPara="1" rIns="91425" wrap="square" tIns="91425">
+          <a:bodyPr spcFirstLastPara="1" wrap="square" lIns="91425" tIns="91425" rIns="91425" bIns="91425" anchor="b" anchorCtr="0">
             <a:normAutofit/>
           </a:bodyPr>
           <a:lstStyle>
@@ -4066,15 +4287,19 @@
               <a:defRPr sz="4200"/>
             </a:lvl9pPr>
           </a:lstStyle>
-          <a:p/>
+          <a:p>
+            <a:endParaRPr/>
+          </a:p>
         </p:txBody>
       </p:sp>
       <p:sp>
         <p:nvSpPr>
           <p:cNvPr id="38" name="Google Shape;38;p9"/>
-          <p:cNvSpPr txBox="1"/>
+          <p:cNvSpPr txBox="1">
+            <a:spLocks noGrp="1"/>
+          </p:cNvSpPr>
           <p:nvPr>
-            <p:ph idx="1" type="subTitle"/>
+            <p:ph type="subTitle" idx="1"/>
           </p:nvPr>
         </p:nvSpPr>
         <p:spPr>
@@ -4087,7 +4312,7 @@
           </a:prstGeom>
         </p:spPr>
         <p:txBody>
-          <a:bodyPr anchorCtr="0" anchor="t" bIns="91425" lIns="91425" spcFirstLastPara="1" rIns="91425" wrap="square" tIns="91425">
+          <a:bodyPr spcFirstLastPara="1" wrap="square" lIns="91425" tIns="91425" rIns="91425" bIns="91425" anchor="t" anchorCtr="0">
             <a:normAutofit/>
           </a:bodyPr>
           <a:lstStyle>
@@ -4218,15 +4443,19 @@
               <a:defRPr sz="2100"/>
             </a:lvl9pPr>
           </a:lstStyle>
-          <a:p/>
+          <a:p>
+            <a:endParaRPr/>
+          </a:p>
         </p:txBody>
       </p:sp>
       <p:sp>
         <p:nvSpPr>
           <p:cNvPr id="39" name="Google Shape;39;p9"/>
-          <p:cNvSpPr txBox="1"/>
+          <p:cNvSpPr txBox="1">
+            <a:spLocks noGrp="1"/>
+          </p:cNvSpPr>
           <p:nvPr>
-            <p:ph idx="2" type="body"/>
+            <p:ph type="body" idx="2"/>
           </p:nvPr>
         </p:nvSpPr>
         <p:spPr>
@@ -4239,11 +4468,11 @@
           </a:prstGeom>
         </p:spPr>
         <p:txBody>
-          <a:bodyPr anchorCtr="0" anchor="ctr" bIns="91425" lIns="91425" spcFirstLastPara="1" rIns="91425" wrap="square" tIns="91425">
+          <a:bodyPr spcFirstLastPara="1" wrap="square" lIns="91425" tIns="91425" rIns="91425" bIns="91425" anchor="ctr" anchorCtr="0">
             <a:normAutofit/>
           </a:bodyPr>
           <a:lstStyle>
-            <a:lvl1pPr indent="-342900" lvl="0" marL="457200">
+            <a:lvl1pPr marL="457200" lvl="0" indent="-342900">
               <a:spcBef>
                 <a:spcPts val="0"/>
               </a:spcBef>
@@ -4254,7 +4483,7 @@
               <a:buChar char="●"/>
               <a:defRPr/>
             </a:lvl1pPr>
-            <a:lvl2pPr indent="-317500" lvl="1" marL="914400">
+            <a:lvl2pPr marL="914400" lvl="1" indent="-317500">
               <a:spcBef>
                 <a:spcPts val="0"/>
               </a:spcBef>
@@ -4265,7 +4494,7 @@
               <a:buChar char="○"/>
               <a:defRPr/>
             </a:lvl2pPr>
-            <a:lvl3pPr indent="-317500" lvl="2" marL="1371600">
+            <a:lvl3pPr marL="1371600" lvl="2" indent="-317500">
               <a:spcBef>
                 <a:spcPts val="0"/>
               </a:spcBef>
@@ -4276,7 +4505,7 @@
               <a:buChar char="■"/>
               <a:defRPr/>
             </a:lvl3pPr>
-            <a:lvl4pPr indent="-317500" lvl="3" marL="1828800">
+            <a:lvl4pPr marL="1828800" lvl="3" indent="-317500">
               <a:spcBef>
                 <a:spcPts val="0"/>
               </a:spcBef>
@@ -4287,7 +4516,7 @@
               <a:buChar char="●"/>
               <a:defRPr/>
             </a:lvl4pPr>
-            <a:lvl5pPr indent="-317500" lvl="4" marL="2286000">
+            <a:lvl5pPr marL="2286000" lvl="4" indent="-317500">
               <a:spcBef>
                 <a:spcPts val="0"/>
               </a:spcBef>
@@ -4298,7 +4527,7 @@
               <a:buChar char="○"/>
               <a:defRPr/>
             </a:lvl5pPr>
-            <a:lvl6pPr indent="-317500" lvl="5" marL="2743200">
+            <a:lvl6pPr marL="2743200" lvl="5" indent="-317500">
               <a:spcBef>
                 <a:spcPts val="0"/>
               </a:spcBef>
@@ -4309,7 +4538,7 @@
               <a:buChar char="■"/>
               <a:defRPr/>
             </a:lvl6pPr>
-            <a:lvl7pPr indent="-317500" lvl="6" marL="3200400">
+            <a:lvl7pPr marL="3200400" lvl="6" indent="-317500">
               <a:spcBef>
                 <a:spcPts val="0"/>
               </a:spcBef>
@@ -4320,7 +4549,7 @@
               <a:buChar char="●"/>
               <a:defRPr/>
             </a:lvl7pPr>
-            <a:lvl8pPr indent="-317500" lvl="7" marL="3657600">
+            <a:lvl8pPr marL="3657600" lvl="7" indent="-317500">
               <a:spcBef>
                 <a:spcPts val="0"/>
               </a:spcBef>
@@ -4331,7 +4560,7 @@
               <a:buChar char="○"/>
               <a:defRPr/>
             </a:lvl8pPr>
-            <a:lvl9pPr indent="-317500" lvl="8" marL="4114800">
+            <a:lvl9pPr marL="4114800" lvl="8" indent="-317500">
               <a:spcBef>
                 <a:spcPts val="0"/>
               </a:spcBef>
@@ -4343,15 +4572,19 @@
               <a:defRPr/>
             </a:lvl9pPr>
           </a:lstStyle>
-          <a:p/>
+          <a:p>
+            <a:endParaRPr/>
+          </a:p>
         </p:txBody>
       </p:sp>
       <p:sp>
         <p:nvSpPr>
           <p:cNvPr id="40" name="Google Shape;40;p9"/>
-          <p:cNvSpPr txBox="1"/>
+          <p:cNvSpPr txBox="1">
+            <a:spLocks noGrp="1"/>
+          </p:cNvSpPr>
           <p:nvPr>
-            <p:ph idx="12" type="sldNum"/>
+            <p:ph type="sldNum" idx="12"/>
           </p:nvPr>
         </p:nvSpPr>
         <p:spPr>
@@ -4364,7 +4597,7 @@
           </a:prstGeom>
         </p:spPr>
         <p:txBody>
-          <a:bodyPr anchorCtr="0" anchor="ctr" bIns="91425" lIns="91425" spcFirstLastPara="1" rIns="91425" wrap="square" tIns="91425">
+          <a:bodyPr spcFirstLastPara="1" wrap="square" lIns="91425" tIns="91425" rIns="91425" bIns="91425" anchor="ctr" anchorCtr="0">
             <a:normAutofit/>
           </a:bodyPr>
           <a:lstStyle>
@@ -4406,7 +4639,7 @@
             </a:lvl9pPr>
           </a:lstStyle>
           <a:p>
-            <a:pPr indent="0" lvl="0" marL="0" rtl="0" algn="r">
+            <a:pPr marL="0" lvl="0" indent="0" algn="r" rtl="0">
               <a:spcBef>
                 <a:spcPts val="0"/>
               </a:spcBef>
@@ -4417,7 +4650,7 @@
             </a:pPr>
             <a:fld id="{00000000-1234-1234-1234-123412341234}" type="slidenum">
               <a:rPr lang="es"/>
-              <a:t>‹#›</a:t>
+              <a:t>‹Nº›</a:t>
             </a:fld>
             <a:endParaRPr/>
           </a:p>
@@ -4432,11 +4665,11 @@
 </file>
 
 <file path=ppt/slideLayouts/slideLayout9.xml><?xml version="1.0" encoding="utf-8"?>
-<p:sldLayout xmlns:a="http://schemas.openxmlformats.org/drawingml/2006/main" xmlns:r="http://schemas.openxmlformats.org/officeDocument/2006/relationships" xmlns:mc="http://schemas.openxmlformats.org/markup-compatibility/2006" xmlns:mv="urn:schemas-microsoft-com:mac:vml" xmlns:p="http://schemas.openxmlformats.org/presentationml/2006/main" xmlns:c="http://schemas.openxmlformats.org/drawingml/2006/chart" xmlns:dgm="http://schemas.openxmlformats.org/drawingml/2006/diagram" xmlns:o="urn:schemas-microsoft-com:office:office" xmlns:v="urn:schemas-microsoft-com:vml" xmlns:pvml="urn:schemas-microsoft-com:office:powerpoint" xmlns:com="http://schemas.openxmlformats.org/drawingml/2006/compatibility" xmlns:p14="http://schemas.microsoft.com/office/powerpoint/2010/main" xmlns:p15="http://schemas.microsoft.com/office/powerpoint/2012/main" xmlns:ahyp="http://schemas.microsoft.com/office/drawing/2018/hyperlinkcolor" matchingName="Caption">
+<p:sldLayout xmlns:a="http://schemas.openxmlformats.org/drawingml/2006/main" xmlns:r="http://schemas.openxmlformats.org/officeDocument/2006/relationships" xmlns:p="http://schemas.openxmlformats.org/presentationml/2006/main" matchingName="Caption">
   <p:cSld name="CAPTION_ONLY">
     <p:spTree>
       <p:nvGrpSpPr>
-        <p:cNvPr id="41" name="Shape 41"/>
+        <p:cNvPr id="1" name="Shape 41"/>
         <p:cNvGrpSpPr/>
         <p:nvPr/>
       </p:nvGrpSpPr>
@@ -4451,9 +4684,11 @@
       <p:sp>
         <p:nvSpPr>
           <p:cNvPr id="42" name="Google Shape;42;p10"/>
-          <p:cNvSpPr txBox="1"/>
+          <p:cNvSpPr txBox="1">
+            <a:spLocks noGrp="1"/>
+          </p:cNvSpPr>
           <p:nvPr>
-            <p:ph idx="1" type="body"/>
+            <p:ph type="body" idx="1"/>
           </p:nvPr>
         </p:nvSpPr>
         <p:spPr>
@@ -4466,11 +4701,11 @@
           </a:prstGeom>
         </p:spPr>
         <p:txBody>
-          <a:bodyPr anchorCtr="0" anchor="ctr" bIns="91425" lIns="91425" spcFirstLastPara="1" rIns="91425" wrap="square" tIns="91425">
+          <a:bodyPr spcFirstLastPara="1" wrap="square" lIns="91425" tIns="91425" rIns="91425" bIns="91425" anchor="ctr" anchorCtr="0">
             <a:normAutofit/>
           </a:bodyPr>
           <a:lstStyle>
-            <a:lvl1pPr indent="-228600" lvl="0" marL="457200">
+            <a:lvl1pPr marL="457200" lvl="0" indent="-228600">
               <a:lnSpc>
                 <a:spcPct val="100000"/>
               </a:lnSpc>
@@ -4485,15 +4720,19 @@
               <a:defRPr/>
             </a:lvl1pPr>
           </a:lstStyle>
-          <a:p/>
+          <a:p>
+            <a:endParaRPr/>
+          </a:p>
         </p:txBody>
       </p:sp>
       <p:sp>
         <p:nvSpPr>
           <p:cNvPr id="43" name="Google Shape;43;p10"/>
-          <p:cNvSpPr txBox="1"/>
+          <p:cNvSpPr txBox="1">
+            <a:spLocks noGrp="1"/>
+          </p:cNvSpPr>
           <p:nvPr>
-            <p:ph idx="12" type="sldNum"/>
+            <p:ph type="sldNum" idx="12"/>
           </p:nvPr>
         </p:nvSpPr>
         <p:spPr>
@@ -4506,7 +4745,7 @@
           </a:prstGeom>
         </p:spPr>
         <p:txBody>
-          <a:bodyPr anchorCtr="0" anchor="ctr" bIns="91425" lIns="91425" spcFirstLastPara="1" rIns="91425" wrap="square" tIns="91425">
+          <a:bodyPr spcFirstLastPara="1" wrap="square" lIns="91425" tIns="91425" rIns="91425" bIns="91425" anchor="ctr" anchorCtr="0">
             <a:normAutofit/>
           </a:bodyPr>
           <a:lstStyle>
@@ -4548,7 +4787,7 @@
             </a:lvl9pPr>
           </a:lstStyle>
           <a:p>
-            <a:pPr indent="0" lvl="0" marL="0" rtl="0" algn="r">
+            <a:pPr marL="0" lvl="0" indent="0" algn="r" rtl="0">
               <a:spcBef>
                 <a:spcPts val="0"/>
               </a:spcBef>
@@ -4559,7 +4798,7 @@
             </a:pPr>
             <a:fld id="{00000000-1234-1234-1234-123412341234}" type="slidenum">
               <a:rPr lang="es"/>
-              <a:t>‹#›</a:t>
+              <a:t>‹Nº›</a:t>
             </a:fld>
             <a:endParaRPr/>
           </a:p>
@@ -4574,18 +4813,19 @@
 </file>
 
 <file path=ppt/slideMasters/slideMaster1.xml><?xml version="1.0" encoding="utf-8"?>
-<p:sldMaster xmlns:a="http://schemas.openxmlformats.org/drawingml/2006/main" xmlns:r="http://schemas.openxmlformats.org/officeDocument/2006/relationships" xmlns:mc="http://schemas.openxmlformats.org/markup-compatibility/2006" xmlns:mv="urn:schemas-microsoft-com:mac:vml" xmlns:p="http://schemas.openxmlformats.org/presentationml/2006/main" xmlns:c="http://schemas.openxmlformats.org/drawingml/2006/chart" xmlns:dgm="http://schemas.openxmlformats.org/drawingml/2006/diagram" xmlns:o="urn:schemas-microsoft-com:office:office" xmlns:v="urn:schemas-microsoft-com:vml" xmlns:pvml="urn:schemas-microsoft-com:office:powerpoint" xmlns:com="http://schemas.openxmlformats.org/drawingml/2006/compatibility" xmlns:p14="http://schemas.microsoft.com/office/powerpoint/2010/main" xmlns:p15="http://schemas.microsoft.com/office/powerpoint/2012/main" xmlns:ahyp="http://schemas.microsoft.com/office/drawing/2018/hyperlinkcolor">
+<p:sldMaster xmlns:a="http://schemas.openxmlformats.org/drawingml/2006/main" xmlns:r="http://schemas.openxmlformats.org/officeDocument/2006/relationships" xmlns:p="http://schemas.openxmlformats.org/presentationml/2006/main">
   <p:cSld name="simple-light-2">
     <p:bg>
       <p:bgPr>
         <a:solidFill>
           <a:schemeClr val="lt1"/>
         </a:solidFill>
+        <a:effectLst/>
       </p:bgPr>
     </p:bg>
     <p:spTree>
       <p:nvGrpSpPr>
-        <p:cNvPr id="5" name="Shape 5"/>
+        <p:cNvPr id="1" name="Shape 5"/>
         <p:cNvGrpSpPr/>
         <p:nvPr/>
       </p:nvGrpSpPr>
@@ -4600,7 +4840,9 @@
       <p:sp>
         <p:nvSpPr>
           <p:cNvPr id="6" name="Google Shape;6;p1"/>
-          <p:cNvSpPr txBox="1"/>
+          <p:cNvSpPr txBox="1">
+            <a:spLocks noGrp="1"/>
+          </p:cNvSpPr>
           <p:nvPr>
             <p:ph type="title"/>
           </p:nvPr>
@@ -4619,7 +4861,7 @@
           </a:ln>
         </p:spPr>
         <p:txBody>
-          <a:bodyPr anchorCtr="0" anchor="t" bIns="91425" lIns="91425" spcFirstLastPara="1" rIns="91425" wrap="square" tIns="91425">
+          <a:bodyPr spcFirstLastPara="1" wrap="square" lIns="91425" tIns="91425" rIns="91425" bIns="91425" anchor="t" anchorCtr="0">
             <a:normAutofit/>
           </a:bodyPr>
           <a:lstStyle>
@@ -4786,15 +5028,19 @@
               </a:defRPr>
             </a:lvl9pPr>
           </a:lstStyle>
-          <a:p/>
+          <a:p>
+            <a:endParaRPr/>
+          </a:p>
         </p:txBody>
       </p:sp>
       <p:sp>
         <p:nvSpPr>
           <p:cNvPr id="7" name="Google Shape;7;p1"/>
-          <p:cNvSpPr txBox="1"/>
+          <p:cNvSpPr txBox="1">
+            <a:spLocks noGrp="1"/>
+          </p:cNvSpPr>
           <p:nvPr>
-            <p:ph idx="1" type="body"/>
+            <p:ph type="body" idx="1"/>
           </p:nvPr>
         </p:nvSpPr>
         <p:spPr>
@@ -4811,11 +5057,11 @@
           </a:ln>
         </p:spPr>
         <p:txBody>
-          <a:bodyPr anchorCtr="0" anchor="t" bIns="91425" lIns="91425" spcFirstLastPara="1" rIns="91425" wrap="square" tIns="91425">
+          <a:bodyPr spcFirstLastPara="1" wrap="square" lIns="91425" tIns="91425" rIns="91425" bIns="91425" anchor="t" anchorCtr="0">
             <a:normAutofit/>
           </a:bodyPr>
           <a:lstStyle>
-            <a:lvl1pPr indent="-342900" lvl="0" marL="457200">
+            <a:lvl1pPr marL="457200" lvl="0" indent="-342900">
               <a:lnSpc>
                 <a:spcPct val="115000"/>
               </a:lnSpc>
@@ -4836,7 +5082,7 @@
                 </a:solidFill>
               </a:defRPr>
             </a:lvl1pPr>
-            <a:lvl2pPr indent="-317500" lvl="1" marL="914400">
+            <a:lvl2pPr marL="914400" lvl="1" indent="-317500">
               <a:lnSpc>
                 <a:spcPct val="115000"/>
               </a:lnSpc>
@@ -4857,7 +5103,7 @@
                 </a:solidFill>
               </a:defRPr>
             </a:lvl2pPr>
-            <a:lvl3pPr indent="-317500" lvl="2" marL="1371600">
+            <a:lvl3pPr marL="1371600" lvl="2" indent="-317500">
               <a:lnSpc>
                 <a:spcPct val="115000"/>
               </a:lnSpc>
@@ -4878,7 +5124,7 @@
                 </a:solidFill>
               </a:defRPr>
             </a:lvl3pPr>
-            <a:lvl4pPr indent="-317500" lvl="3" marL="1828800">
+            <a:lvl4pPr marL="1828800" lvl="3" indent="-317500">
               <a:lnSpc>
                 <a:spcPct val="115000"/>
               </a:lnSpc>
@@ -4899,7 +5145,7 @@
                 </a:solidFill>
               </a:defRPr>
             </a:lvl4pPr>
-            <a:lvl5pPr indent="-317500" lvl="4" marL="2286000">
+            <a:lvl5pPr marL="2286000" lvl="4" indent="-317500">
               <a:lnSpc>
                 <a:spcPct val="115000"/>
               </a:lnSpc>
@@ -4920,7 +5166,7 @@
                 </a:solidFill>
               </a:defRPr>
             </a:lvl5pPr>
-            <a:lvl6pPr indent="-317500" lvl="5" marL="2743200">
+            <a:lvl6pPr marL="2743200" lvl="5" indent="-317500">
               <a:lnSpc>
                 <a:spcPct val="115000"/>
               </a:lnSpc>
@@ -4941,7 +5187,7 @@
                 </a:solidFill>
               </a:defRPr>
             </a:lvl6pPr>
-            <a:lvl7pPr indent="-317500" lvl="6" marL="3200400">
+            <a:lvl7pPr marL="3200400" lvl="6" indent="-317500">
               <a:lnSpc>
                 <a:spcPct val="115000"/>
               </a:lnSpc>
@@ -4962,7 +5208,7 @@
                 </a:solidFill>
               </a:defRPr>
             </a:lvl7pPr>
-            <a:lvl8pPr indent="-317500" lvl="7" marL="3657600">
+            <a:lvl8pPr marL="3657600" lvl="7" indent="-317500">
               <a:lnSpc>
                 <a:spcPct val="115000"/>
               </a:lnSpc>
@@ -4983,7 +5229,7 @@
                 </a:solidFill>
               </a:defRPr>
             </a:lvl8pPr>
-            <a:lvl9pPr indent="-317500" lvl="8" marL="4114800">
+            <a:lvl9pPr marL="4114800" lvl="8" indent="-317500">
               <a:lnSpc>
                 <a:spcPct val="115000"/>
               </a:lnSpc>
@@ -5005,15 +5251,19 @@
               </a:defRPr>
             </a:lvl9pPr>
           </a:lstStyle>
-          <a:p/>
+          <a:p>
+            <a:endParaRPr/>
+          </a:p>
         </p:txBody>
       </p:sp>
       <p:sp>
         <p:nvSpPr>
           <p:cNvPr id="8" name="Google Shape;8;p1"/>
-          <p:cNvSpPr txBox="1"/>
+          <p:cNvSpPr txBox="1">
+            <a:spLocks noGrp="1"/>
+          </p:cNvSpPr>
           <p:nvPr>
-            <p:ph idx="12" type="sldNum"/>
+            <p:ph type="sldNum" idx="12"/>
           </p:nvPr>
         </p:nvSpPr>
         <p:spPr>
@@ -5030,7 +5280,7 @@
           </a:ln>
         </p:spPr>
         <p:txBody>
-          <a:bodyPr anchorCtr="0" anchor="ctr" bIns="91425" lIns="91425" spcFirstLastPara="1" rIns="91425" wrap="square" tIns="91425">
+          <a:bodyPr spcFirstLastPara="1" wrap="square" lIns="91425" tIns="91425" rIns="91425" bIns="91425" anchor="ctr" anchorCtr="0">
             <a:normAutofit/>
           </a:bodyPr>
           <a:lstStyle>
@@ -5108,7 +5358,7 @@
             </a:lvl9pPr>
           </a:lstStyle>
           <a:p>
-            <a:pPr indent="0" lvl="0" marL="0" rtl="0" algn="r">
+            <a:pPr marL="0" lvl="0" indent="0" algn="r" rtl="0">
               <a:spcBef>
                 <a:spcPts val="0"/>
               </a:spcBef>
@@ -5119,7 +5369,7 @@
             </a:pPr>
             <a:fld id="{00000000-1234-1234-1234-123412341234}" type="slidenum">
               <a:rPr lang="es"/>
-              <a:t>‹#›</a:t>
+              <a:t>‹Nº›</a:t>
             </a:fld>
             <a:endParaRPr/>
           </a:p>
@@ -5127,7 +5377,7 @@
       </p:sp>
     </p:spTree>
   </p:cSld>
-  <p:clrMap accent1="accent1" accent2="accent2" accent3="accent3" accent4="accent4" accent5="accent5" accent6="accent6" bg1="lt1" bg2="dk2" tx1="dk1" tx2="lt2" folHlink="folHlink" hlink="hlink"/>
+  <p:clrMap bg1="lt1" tx1="dk1" bg2="dk2" tx2="lt2" accent1="accent1" accent2="accent2" accent3="accent3" accent4="accent4" accent5="accent5" accent6="accent6" hlink="hlink" folHlink="folHlink"/>
   <p:sldLayoutIdLst>
     <p:sldLayoutId id="2147483648" r:id="rId1"/>
     <p:sldLayoutId id="2147483649" r:id="rId2"/>
@@ -5141,10 +5391,10 @@
     <p:sldLayoutId id="2147483657" r:id="rId10"/>
     <p:sldLayoutId id="2147483658" r:id="rId11"/>
   </p:sldLayoutIdLst>
-  <p:hf dt="0" ftr="0" hdr="0" sldNum="0"/>
+  <p:hf sldNum="0" hdr="0" ftr="0" dt="0"/>
   <p:txStyles>
     <p:titleStyle>
-      <a:defPPr lvl="0" marR="0" rtl="0" algn="l">
+      <a:defPPr marR="0" lvl="0" algn="l" rtl="0">
         <a:lnSpc>
           <a:spcPct val="100000"/>
         </a:lnSpc>
@@ -5155,7 +5405,7 @@
           <a:spcPts val="0"/>
         </a:spcAft>
       </a:defPPr>
-      <a:lvl1pPr lvl="0" marR="0" rtl="0" algn="l">
+      <a:lvl1pPr marR="0" lvl="0" algn="l" rtl="0">
         <a:lnSpc>
           <a:spcPct val="100000"/>
         </a:lnSpc>
@@ -5169,7 +5419,7 @@
           <a:srgbClr val="000000"/>
         </a:buClr>
         <a:buFont typeface="Arial"/>
-        <a:defRPr b="0" i="0" sz="1400" u="none" cap="none" strike="noStrike">
+        <a:defRPr sz="1400" b="0" i="0" u="none" strike="noStrike" cap="none">
           <a:solidFill>
             <a:srgbClr val="000000"/>
           </a:solidFill>
@@ -5179,7 +5429,7 @@
           <a:sym typeface="Arial"/>
         </a:defRPr>
       </a:lvl1pPr>
-      <a:lvl2pPr lvl="1" marR="0" rtl="0" algn="l">
+      <a:lvl2pPr marR="0" lvl="1" algn="l" rtl="0">
         <a:lnSpc>
           <a:spcPct val="100000"/>
         </a:lnSpc>
@@ -5193,7 +5443,7 @@
           <a:srgbClr val="000000"/>
         </a:buClr>
         <a:buFont typeface="Arial"/>
-        <a:defRPr b="0" i="0" sz="1400" u="none" cap="none" strike="noStrike">
+        <a:defRPr sz="1400" b="0" i="0" u="none" strike="noStrike" cap="none">
           <a:solidFill>
             <a:srgbClr val="000000"/>
           </a:solidFill>
@@ -5203,7 +5453,7 @@
           <a:sym typeface="Arial"/>
         </a:defRPr>
       </a:lvl2pPr>
-      <a:lvl3pPr lvl="2" marR="0" rtl="0" algn="l">
+      <a:lvl3pPr marR="0" lvl="2" algn="l" rtl="0">
         <a:lnSpc>
           <a:spcPct val="100000"/>
         </a:lnSpc>
@@ -5217,7 +5467,7 @@
           <a:srgbClr val="000000"/>
         </a:buClr>
         <a:buFont typeface="Arial"/>
-        <a:defRPr b="0" i="0" sz="1400" u="none" cap="none" strike="noStrike">
+        <a:defRPr sz="1400" b="0" i="0" u="none" strike="noStrike" cap="none">
           <a:solidFill>
             <a:srgbClr val="000000"/>
           </a:solidFill>
@@ -5227,7 +5477,7 @@
           <a:sym typeface="Arial"/>
         </a:defRPr>
       </a:lvl3pPr>
-      <a:lvl4pPr lvl="3" marR="0" rtl="0" algn="l">
+      <a:lvl4pPr marR="0" lvl="3" algn="l" rtl="0">
         <a:lnSpc>
           <a:spcPct val="100000"/>
         </a:lnSpc>
@@ -5241,7 +5491,7 @@
           <a:srgbClr val="000000"/>
         </a:buClr>
         <a:buFont typeface="Arial"/>
-        <a:defRPr b="0" i="0" sz="1400" u="none" cap="none" strike="noStrike">
+        <a:defRPr sz="1400" b="0" i="0" u="none" strike="noStrike" cap="none">
           <a:solidFill>
             <a:srgbClr val="000000"/>
           </a:solidFill>
@@ -5251,7 +5501,7 @@
           <a:sym typeface="Arial"/>
         </a:defRPr>
       </a:lvl4pPr>
-      <a:lvl5pPr lvl="4" marR="0" rtl="0" algn="l">
+      <a:lvl5pPr marR="0" lvl="4" algn="l" rtl="0">
         <a:lnSpc>
           <a:spcPct val="100000"/>
         </a:lnSpc>
@@ -5265,7 +5515,7 @@
           <a:srgbClr val="000000"/>
         </a:buClr>
         <a:buFont typeface="Arial"/>
-        <a:defRPr b="0" i="0" sz="1400" u="none" cap="none" strike="noStrike">
+        <a:defRPr sz="1400" b="0" i="0" u="none" strike="noStrike" cap="none">
           <a:solidFill>
             <a:srgbClr val="000000"/>
           </a:solidFill>
@@ -5275,7 +5525,7 @@
           <a:sym typeface="Arial"/>
         </a:defRPr>
       </a:lvl5pPr>
-      <a:lvl6pPr lvl="5" marR="0" rtl="0" algn="l">
+      <a:lvl6pPr marR="0" lvl="5" algn="l" rtl="0">
         <a:lnSpc>
           <a:spcPct val="100000"/>
         </a:lnSpc>
@@ -5289,7 +5539,7 @@
           <a:srgbClr val="000000"/>
         </a:buClr>
         <a:buFont typeface="Arial"/>
-        <a:defRPr b="0" i="0" sz="1400" u="none" cap="none" strike="noStrike">
+        <a:defRPr sz="1400" b="0" i="0" u="none" strike="noStrike" cap="none">
           <a:solidFill>
             <a:srgbClr val="000000"/>
           </a:solidFill>
@@ -5299,7 +5549,7 @@
           <a:sym typeface="Arial"/>
         </a:defRPr>
       </a:lvl6pPr>
-      <a:lvl7pPr lvl="6" marR="0" rtl="0" algn="l">
+      <a:lvl7pPr marR="0" lvl="6" algn="l" rtl="0">
         <a:lnSpc>
           <a:spcPct val="100000"/>
         </a:lnSpc>
@@ -5313,7 +5563,7 @@
           <a:srgbClr val="000000"/>
         </a:buClr>
         <a:buFont typeface="Arial"/>
-        <a:defRPr b="0" i="0" sz="1400" u="none" cap="none" strike="noStrike">
+        <a:defRPr sz="1400" b="0" i="0" u="none" strike="noStrike" cap="none">
           <a:solidFill>
             <a:srgbClr val="000000"/>
           </a:solidFill>
@@ -5323,7 +5573,7 @@
           <a:sym typeface="Arial"/>
         </a:defRPr>
       </a:lvl7pPr>
-      <a:lvl8pPr lvl="7" marR="0" rtl="0" algn="l">
+      <a:lvl8pPr marR="0" lvl="7" algn="l" rtl="0">
         <a:lnSpc>
           <a:spcPct val="100000"/>
         </a:lnSpc>
@@ -5337,7 +5587,7 @@
           <a:srgbClr val="000000"/>
         </a:buClr>
         <a:buFont typeface="Arial"/>
-        <a:defRPr b="0" i="0" sz="1400" u="none" cap="none" strike="noStrike">
+        <a:defRPr sz="1400" b="0" i="0" u="none" strike="noStrike" cap="none">
           <a:solidFill>
             <a:srgbClr val="000000"/>
           </a:solidFill>
@@ -5347,7 +5597,7 @@
           <a:sym typeface="Arial"/>
         </a:defRPr>
       </a:lvl8pPr>
-      <a:lvl9pPr lvl="8" marR="0" rtl="0" algn="l">
+      <a:lvl9pPr marR="0" lvl="8" algn="l" rtl="0">
         <a:lnSpc>
           <a:spcPct val="100000"/>
         </a:lnSpc>
@@ -5361,7 +5611,7 @@
           <a:srgbClr val="000000"/>
         </a:buClr>
         <a:buFont typeface="Arial"/>
-        <a:defRPr b="0" i="0" sz="1400" u="none" cap="none" strike="noStrike">
+        <a:defRPr sz="1400" b="0" i="0" u="none" strike="noStrike" cap="none">
           <a:solidFill>
             <a:srgbClr val="000000"/>
           </a:solidFill>
@@ -5373,7 +5623,7 @@
       </a:lvl9pPr>
     </p:titleStyle>
     <p:bodyStyle>
-      <a:defPPr lvl="0" marR="0" rtl="0" algn="l">
+      <a:defPPr marR="0" lvl="0" algn="l" rtl="0">
         <a:lnSpc>
           <a:spcPct val="100000"/>
         </a:lnSpc>
@@ -5384,7 +5634,7 @@
           <a:spcPts val="0"/>
         </a:spcAft>
       </a:defPPr>
-      <a:lvl1pPr lvl="0" marR="0" rtl="0" algn="l">
+      <a:lvl1pPr marR="0" lvl="0" algn="l" rtl="0">
         <a:lnSpc>
           <a:spcPct val="100000"/>
         </a:lnSpc>
@@ -5398,7 +5648,7 @@
           <a:srgbClr val="000000"/>
         </a:buClr>
         <a:buFont typeface="Arial"/>
-        <a:defRPr b="0" i="0" sz="1400" u="none" cap="none" strike="noStrike">
+        <a:defRPr sz="1400" b="0" i="0" u="none" strike="noStrike" cap="none">
           <a:solidFill>
             <a:srgbClr val="000000"/>
           </a:solidFill>
@@ -5408,7 +5658,7 @@
           <a:sym typeface="Arial"/>
         </a:defRPr>
       </a:lvl1pPr>
-      <a:lvl2pPr lvl="1" marR="0" rtl="0" algn="l">
+      <a:lvl2pPr marR="0" lvl="1" algn="l" rtl="0">
         <a:lnSpc>
           <a:spcPct val="100000"/>
         </a:lnSpc>
@@ -5422,7 +5672,7 @@
           <a:srgbClr val="000000"/>
         </a:buClr>
         <a:buFont typeface="Arial"/>
-        <a:defRPr b="0" i="0" sz="1400" u="none" cap="none" strike="noStrike">
+        <a:defRPr sz="1400" b="0" i="0" u="none" strike="noStrike" cap="none">
           <a:solidFill>
             <a:srgbClr val="000000"/>
           </a:solidFill>
@@ -5432,7 +5682,7 @@
           <a:sym typeface="Arial"/>
         </a:defRPr>
       </a:lvl2pPr>
-      <a:lvl3pPr lvl="2" marR="0" rtl="0" algn="l">
+      <a:lvl3pPr marR="0" lvl="2" algn="l" rtl="0">
         <a:lnSpc>
           <a:spcPct val="100000"/>
         </a:lnSpc>
@@ -5446,7 +5696,7 @@
           <a:srgbClr val="000000"/>
         </a:buClr>
         <a:buFont typeface="Arial"/>
-        <a:defRPr b="0" i="0" sz="1400" u="none" cap="none" strike="noStrike">
+        <a:defRPr sz="1400" b="0" i="0" u="none" strike="noStrike" cap="none">
           <a:solidFill>
             <a:srgbClr val="000000"/>
           </a:solidFill>
@@ -5456,7 +5706,7 @@
           <a:sym typeface="Arial"/>
         </a:defRPr>
       </a:lvl3pPr>
-      <a:lvl4pPr lvl="3" marR="0" rtl="0" algn="l">
+      <a:lvl4pPr marR="0" lvl="3" algn="l" rtl="0">
         <a:lnSpc>
           <a:spcPct val="100000"/>
         </a:lnSpc>
@@ -5470,7 +5720,7 @@
           <a:srgbClr val="000000"/>
         </a:buClr>
         <a:buFont typeface="Arial"/>
-        <a:defRPr b="0" i="0" sz="1400" u="none" cap="none" strike="noStrike">
+        <a:defRPr sz="1400" b="0" i="0" u="none" strike="noStrike" cap="none">
           <a:solidFill>
             <a:srgbClr val="000000"/>
           </a:solidFill>
@@ -5480,7 +5730,7 @@
           <a:sym typeface="Arial"/>
         </a:defRPr>
       </a:lvl4pPr>
-      <a:lvl5pPr lvl="4" marR="0" rtl="0" algn="l">
+      <a:lvl5pPr marR="0" lvl="4" algn="l" rtl="0">
         <a:lnSpc>
           <a:spcPct val="100000"/>
         </a:lnSpc>
@@ -5494,7 +5744,7 @@
           <a:srgbClr val="000000"/>
         </a:buClr>
         <a:buFont typeface="Arial"/>
-        <a:defRPr b="0" i="0" sz="1400" u="none" cap="none" strike="noStrike">
+        <a:defRPr sz="1400" b="0" i="0" u="none" strike="noStrike" cap="none">
           <a:solidFill>
             <a:srgbClr val="000000"/>
           </a:solidFill>
@@ -5504,7 +5754,7 @@
           <a:sym typeface="Arial"/>
         </a:defRPr>
       </a:lvl5pPr>
-      <a:lvl6pPr lvl="5" marR="0" rtl="0" algn="l">
+      <a:lvl6pPr marR="0" lvl="5" algn="l" rtl="0">
         <a:lnSpc>
           <a:spcPct val="100000"/>
         </a:lnSpc>
@@ -5518,7 +5768,7 @@
           <a:srgbClr val="000000"/>
         </a:buClr>
         <a:buFont typeface="Arial"/>
-        <a:defRPr b="0" i="0" sz="1400" u="none" cap="none" strike="noStrike">
+        <a:defRPr sz="1400" b="0" i="0" u="none" strike="noStrike" cap="none">
           <a:solidFill>
             <a:srgbClr val="000000"/>
           </a:solidFill>
@@ -5528,7 +5778,7 @@
           <a:sym typeface="Arial"/>
         </a:defRPr>
       </a:lvl6pPr>
-      <a:lvl7pPr lvl="6" marR="0" rtl="0" algn="l">
+      <a:lvl7pPr marR="0" lvl="6" algn="l" rtl="0">
         <a:lnSpc>
           <a:spcPct val="100000"/>
         </a:lnSpc>
@@ -5542,7 +5792,7 @@
           <a:srgbClr val="000000"/>
         </a:buClr>
         <a:buFont typeface="Arial"/>
-        <a:defRPr b="0" i="0" sz="1400" u="none" cap="none" strike="noStrike">
+        <a:defRPr sz="1400" b="0" i="0" u="none" strike="noStrike" cap="none">
           <a:solidFill>
             <a:srgbClr val="000000"/>
           </a:solidFill>
@@ -5552,7 +5802,7 @@
           <a:sym typeface="Arial"/>
         </a:defRPr>
       </a:lvl7pPr>
-      <a:lvl8pPr lvl="7" marR="0" rtl="0" algn="l">
+      <a:lvl8pPr marR="0" lvl="7" algn="l" rtl="0">
         <a:lnSpc>
           <a:spcPct val="100000"/>
         </a:lnSpc>
@@ -5566,7 +5816,7 @@
           <a:srgbClr val="000000"/>
         </a:buClr>
         <a:buFont typeface="Arial"/>
-        <a:defRPr b="0" i="0" sz="1400" u="none" cap="none" strike="noStrike">
+        <a:defRPr sz="1400" b="0" i="0" u="none" strike="noStrike" cap="none">
           <a:solidFill>
             <a:srgbClr val="000000"/>
           </a:solidFill>
@@ -5576,7 +5826,7 @@
           <a:sym typeface="Arial"/>
         </a:defRPr>
       </a:lvl8pPr>
-      <a:lvl9pPr lvl="8" marR="0" rtl="0" algn="l">
+      <a:lvl9pPr marR="0" lvl="8" algn="l" rtl="0">
         <a:lnSpc>
           <a:spcPct val="100000"/>
         </a:lnSpc>
@@ -5590,7 +5840,7 @@
           <a:srgbClr val="000000"/>
         </a:buClr>
         <a:buFont typeface="Arial"/>
-        <a:defRPr b="0" i="0" sz="1400" u="none" cap="none" strike="noStrike">
+        <a:defRPr sz="1400" b="0" i="0" u="none" strike="noStrike" cap="none">
           <a:solidFill>
             <a:srgbClr val="000000"/>
           </a:solidFill>
@@ -5602,7 +5852,7 @@
       </a:lvl9pPr>
     </p:bodyStyle>
     <p:otherStyle>
-      <a:defPPr lvl="0" marR="0" rtl="0" algn="l">
+      <a:defPPr marR="0" lvl="0" algn="l" rtl="0">
         <a:lnSpc>
           <a:spcPct val="100000"/>
         </a:lnSpc>
@@ -5613,7 +5863,7 @@
           <a:spcPts val="0"/>
         </a:spcAft>
       </a:defPPr>
-      <a:lvl1pPr lvl="0" marR="0" rtl="0" algn="l">
+      <a:lvl1pPr marR="0" lvl="0" algn="l" rtl="0">
         <a:lnSpc>
           <a:spcPct val="100000"/>
         </a:lnSpc>
@@ -5627,7 +5877,7 @@
           <a:srgbClr val="000000"/>
         </a:buClr>
         <a:buFont typeface="Arial"/>
-        <a:defRPr b="0" i="0" sz="1400" u="none" cap="none" strike="noStrike">
+        <a:defRPr sz="1400" b="0" i="0" u="none" strike="noStrike" cap="none">
           <a:solidFill>
             <a:srgbClr val="000000"/>
           </a:solidFill>
@@ -5637,7 +5887,7 @@
           <a:sym typeface="Arial"/>
         </a:defRPr>
       </a:lvl1pPr>
-      <a:lvl2pPr lvl="1" marR="0" rtl="0" algn="l">
+      <a:lvl2pPr marR="0" lvl="1" algn="l" rtl="0">
         <a:lnSpc>
           <a:spcPct val="100000"/>
         </a:lnSpc>
@@ -5651,7 +5901,7 @@
           <a:srgbClr val="000000"/>
         </a:buClr>
         <a:buFont typeface="Arial"/>
-        <a:defRPr b="0" i="0" sz="1400" u="none" cap="none" strike="noStrike">
+        <a:defRPr sz="1400" b="0" i="0" u="none" strike="noStrike" cap="none">
           <a:solidFill>
             <a:srgbClr val="000000"/>
           </a:solidFill>
@@ -5661,7 +5911,7 @@
           <a:sym typeface="Arial"/>
         </a:defRPr>
       </a:lvl2pPr>
-      <a:lvl3pPr lvl="2" marR="0" rtl="0" algn="l">
+      <a:lvl3pPr marR="0" lvl="2" algn="l" rtl="0">
         <a:lnSpc>
           <a:spcPct val="100000"/>
         </a:lnSpc>
@@ -5675,7 +5925,7 @@
           <a:srgbClr val="000000"/>
         </a:buClr>
         <a:buFont typeface="Arial"/>
-        <a:defRPr b="0" i="0" sz="1400" u="none" cap="none" strike="noStrike">
+        <a:defRPr sz="1400" b="0" i="0" u="none" strike="noStrike" cap="none">
           <a:solidFill>
             <a:srgbClr val="000000"/>
           </a:solidFill>
@@ -5685,7 +5935,7 @@
           <a:sym typeface="Arial"/>
         </a:defRPr>
       </a:lvl3pPr>
-      <a:lvl4pPr lvl="3" marR="0" rtl="0" algn="l">
+      <a:lvl4pPr marR="0" lvl="3" algn="l" rtl="0">
         <a:lnSpc>
           <a:spcPct val="100000"/>
         </a:lnSpc>
@@ -5699,7 +5949,7 @@
           <a:srgbClr val="000000"/>
         </a:buClr>
         <a:buFont typeface="Arial"/>
-        <a:defRPr b="0" i="0" sz="1400" u="none" cap="none" strike="noStrike">
+        <a:defRPr sz="1400" b="0" i="0" u="none" strike="noStrike" cap="none">
           <a:solidFill>
             <a:srgbClr val="000000"/>
           </a:solidFill>
@@ -5709,7 +5959,7 @@
           <a:sym typeface="Arial"/>
         </a:defRPr>
       </a:lvl4pPr>
-      <a:lvl5pPr lvl="4" marR="0" rtl="0" algn="l">
+      <a:lvl5pPr marR="0" lvl="4" algn="l" rtl="0">
         <a:lnSpc>
           <a:spcPct val="100000"/>
         </a:lnSpc>
@@ -5723,7 +5973,7 @@
           <a:srgbClr val="000000"/>
         </a:buClr>
         <a:buFont typeface="Arial"/>
-        <a:defRPr b="0" i="0" sz="1400" u="none" cap="none" strike="noStrike">
+        <a:defRPr sz="1400" b="0" i="0" u="none" strike="noStrike" cap="none">
           <a:solidFill>
             <a:srgbClr val="000000"/>
           </a:solidFill>
@@ -5733,7 +5983,7 @@
           <a:sym typeface="Arial"/>
         </a:defRPr>
       </a:lvl5pPr>
-      <a:lvl6pPr lvl="5" marR="0" rtl="0" algn="l">
+      <a:lvl6pPr marR="0" lvl="5" algn="l" rtl="0">
         <a:lnSpc>
           <a:spcPct val="100000"/>
         </a:lnSpc>
@@ -5747,7 +5997,7 @@
           <a:srgbClr val="000000"/>
         </a:buClr>
         <a:buFont typeface="Arial"/>
-        <a:defRPr b="0" i="0" sz="1400" u="none" cap="none" strike="noStrike">
+        <a:defRPr sz="1400" b="0" i="0" u="none" strike="noStrike" cap="none">
           <a:solidFill>
             <a:srgbClr val="000000"/>
           </a:solidFill>
@@ -5757,7 +6007,7 @@
           <a:sym typeface="Arial"/>
         </a:defRPr>
       </a:lvl6pPr>
-      <a:lvl7pPr lvl="6" marR="0" rtl="0" algn="l">
+      <a:lvl7pPr marR="0" lvl="6" algn="l" rtl="0">
         <a:lnSpc>
           <a:spcPct val="100000"/>
         </a:lnSpc>
@@ -5771,7 +6021,7 @@
           <a:srgbClr val="000000"/>
         </a:buClr>
         <a:buFont typeface="Arial"/>
-        <a:defRPr b="0" i="0" sz="1400" u="none" cap="none" strike="noStrike">
+        <a:defRPr sz="1400" b="0" i="0" u="none" strike="noStrike" cap="none">
           <a:solidFill>
             <a:srgbClr val="000000"/>
           </a:solidFill>
@@ -5781,7 +6031,7 @@
           <a:sym typeface="Arial"/>
         </a:defRPr>
       </a:lvl7pPr>
-      <a:lvl8pPr lvl="7" marR="0" rtl="0" algn="l">
+      <a:lvl8pPr marR="0" lvl="7" algn="l" rtl="0">
         <a:lnSpc>
           <a:spcPct val="100000"/>
         </a:lnSpc>
@@ -5795,7 +6045,7 @@
           <a:srgbClr val="000000"/>
         </a:buClr>
         <a:buFont typeface="Arial"/>
-        <a:defRPr b="0" i="0" sz="1400" u="none" cap="none" strike="noStrike">
+        <a:defRPr sz="1400" b="0" i="0" u="none" strike="noStrike" cap="none">
           <a:solidFill>
             <a:srgbClr val="000000"/>
           </a:solidFill>
@@ -5805,7 +6055,7 @@
           <a:sym typeface="Arial"/>
         </a:defRPr>
       </a:lvl8pPr>
-      <a:lvl9pPr lvl="8" marR="0" rtl="0" algn="l">
+      <a:lvl9pPr marR="0" lvl="8" algn="l" rtl="0">
         <a:lnSpc>
           <a:spcPct val="100000"/>
         </a:lnSpc>
@@ -5819,7 +6069,7 @@
           <a:srgbClr val="000000"/>
         </a:buClr>
         <a:buFont typeface="Arial"/>
-        <a:defRPr b="0" i="0" sz="1400" u="none" cap="none" strike="noStrike">
+        <a:defRPr sz="1400" b="0" i="0" u="none" strike="noStrike" cap="none">
           <a:solidFill>
             <a:srgbClr val="000000"/>
           </a:solidFill>
@@ -5835,7 +6085,7 @@
 </file>
 
 <file path=ppt/slides/slide1.xml><?xml version="1.0" encoding="utf-8"?>
-<p:sld xmlns:a="http://schemas.openxmlformats.org/drawingml/2006/main" xmlns:r="http://schemas.openxmlformats.org/officeDocument/2006/relationships" xmlns:mc="http://schemas.openxmlformats.org/markup-compatibility/2006" xmlns:mv="urn:schemas-microsoft-com:mac:vml" xmlns:p="http://schemas.openxmlformats.org/presentationml/2006/main" xmlns:c="http://schemas.openxmlformats.org/drawingml/2006/chart" xmlns:dgm="http://schemas.openxmlformats.org/drawingml/2006/diagram" xmlns:o="urn:schemas-microsoft-com:office:office" xmlns:v="urn:schemas-microsoft-com:vml" xmlns:pvml="urn:schemas-microsoft-com:office:powerpoint" xmlns:com="http://schemas.openxmlformats.org/drawingml/2006/compatibility" xmlns:p14="http://schemas.microsoft.com/office/powerpoint/2010/main" xmlns:p15="http://schemas.microsoft.com/office/powerpoint/2012/main" xmlns:ahyp="http://schemas.microsoft.com/office/drawing/2018/hyperlinkcolor">
+<p:sld xmlns:a="http://schemas.openxmlformats.org/drawingml/2006/main" xmlns:r="http://schemas.openxmlformats.org/officeDocument/2006/relationships" xmlns:p="http://schemas.openxmlformats.org/presentationml/2006/main">
   <p:cSld>
     <p:bg>
       <p:bgPr>
@@ -5847,11 +6097,12 @@
             <a:fillRect/>
           </a:stretch>
         </a:blipFill>
+        <a:effectLst/>
       </p:bgPr>
     </p:bg>
     <p:spTree>
       <p:nvGrpSpPr>
-        <p:cNvPr id="53" name="Shape 53"/>
+        <p:cNvPr id="1" name="Shape 53"/>
         <p:cNvGrpSpPr/>
         <p:nvPr/>
       </p:nvGrpSpPr>
@@ -5866,7 +6117,9 @@
       <p:sp>
         <p:nvSpPr>
           <p:cNvPr id="54" name="Google Shape;54;p13"/>
-          <p:cNvSpPr txBox="1"/>
+          <p:cNvSpPr txBox="1">
+            <a:spLocks noGrp="1"/>
+          </p:cNvSpPr>
           <p:nvPr>
             <p:ph type="ctrTitle"/>
           </p:nvPr>
@@ -5881,12 +6134,12 @@
           </a:prstGeom>
         </p:spPr>
         <p:txBody>
-          <a:bodyPr anchorCtr="0" anchor="b" bIns="91425" lIns="91425" spcFirstLastPara="1" rIns="91425" wrap="square" tIns="91425">
+          <a:bodyPr spcFirstLastPara="1" wrap="square" lIns="91425" tIns="91425" rIns="91425" bIns="91425" anchor="b" anchorCtr="0">
             <a:normAutofit/>
           </a:bodyPr>
           <a:lstStyle/>
           <a:p>
-            <a:pPr indent="0" lvl="0" marL="0" rtl="0" algn="ctr">
+            <a:pPr marL="0" lvl="0" indent="0" algn="ctr" rtl="0">
               <a:spcBef>
                 <a:spcPts val="0"/>
               </a:spcBef>
@@ -5896,7 +6149,7 @@
               <a:buNone/>
             </a:pPr>
             <a:r>
-              <a:rPr b="1" lang="es"/>
+              <a:rPr lang="es" b="1"/>
               <a:t>Sistema de vuelos</a:t>
             </a:r>
             <a:r>
@@ -5910,9 +6163,11 @@
       <p:sp>
         <p:nvSpPr>
           <p:cNvPr id="55" name="Google Shape;55;p13"/>
-          <p:cNvSpPr txBox="1"/>
+          <p:cNvSpPr txBox="1">
+            <a:spLocks noGrp="1"/>
+          </p:cNvSpPr>
           <p:nvPr>
-            <p:ph idx="1" type="subTitle"/>
+            <p:ph type="subTitle" idx="1"/>
           </p:nvPr>
         </p:nvSpPr>
         <p:spPr>
@@ -5925,12 +6180,12 @@
           </a:prstGeom>
         </p:spPr>
         <p:txBody>
-          <a:bodyPr anchorCtr="0" anchor="t" bIns="91425" lIns="91425" spcFirstLastPara="1" rIns="91425" wrap="square" tIns="91425">
+          <a:bodyPr spcFirstLastPara="1" wrap="square" lIns="91425" tIns="91425" rIns="91425" bIns="91425" anchor="t" anchorCtr="0">
             <a:normAutofit/>
           </a:bodyPr>
           <a:lstStyle/>
           <a:p>
-            <a:pPr indent="0" lvl="0" marL="0" rtl="0" algn="ctr">
+            <a:pPr marL="0" lvl="0" indent="0" algn="ctr" rtl="0">
               <a:spcBef>
                 <a:spcPts val="0"/>
               </a:spcBef>
@@ -5940,12 +6195,8 @@
               <a:buNone/>
             </a:pPr>
             <a:r>
-              <a:rPr b="1" lang="es"/>
-              <a:t>comisión</a:t>
-            </a:r>
-            <a:r>
-              <a:rPr b="1" lang="es"/>
-              <a:t> 6 de Estructura de datos</a:t>
+              <a:rPr lang="es" b="1"/>
+              <a:t>comisión 6 de Estructura de datos</a:t>
             </a:r>
             <a:r>
               <a:rPr lang="es"/>
@@ -5975,12 +6226,12 @@
           </a:ln>
         </p:spPr>
         <p:txBody>
-          <a:bodyPr anchorCtr="0" anchor="t" bIns="91425" lIns="91425" spcFirstLastPara="1" rIns="91425" wrap="square" tIns="91425">
+          <a:bodyPr spcFirstLastPara="1" wrap="square" lIns="91425" tIns="91425" rIns="91425" bIns="91425" anchor="t" anchorCtr="0">
             <a:noAutofit/>
           </a:bodyPr>
           <a:lstStyle/>
           <a:p>
-            <a:pPr indent="0" lvl="0" marL="0" rtl="0" algn="l">
+            <a:pPr marL="0" lvl="0" indent="0" algn="l" rtl="0">
               <a:spcBef>
                 <a:spcPts val="0"/>
               </a:spcBef>
@@ -5990,21 +6241,21 @@
               <a:buNone/>
             </a:pPr>
             <a:r>
-              <a:rPr b="1" lang="es" sz="1800">
+              <a:rPr lang="es" sz="1800" b="1">
                 <a:solidFill>
                   <a:schemeClr val="dk2"/>
                 </a:solidFill>
               </a:rPr>
               <a:t>Alumnos:</a:t>
             </a:r>
-            <a:endParaRPr b="1" sz="1800">
+            <a:endParaRPr sz="1800" b="1">
               <a:solidFill>
                 <a:schemeClr val="dk2"/>
               </a:solidFill>
             </a:endParaRPr>
           </a:p>
           <a:p>
-            <a:pPr indent="0" lvl="0" marL="0" rtl="0" algn="l">
+            <a:pPr marL="0" lvl="0" indent="0" algn="l" rtl="0">
               <a:spcBef>
                 <a:spcPts val="0"/>
               </a:spcBef>
@@ -6014,21 +6265,21 @@
               <a:buNone/>
             </a:pPr>
             <a:r>
-              <a:rPr b="1" lang="es" sz="1800">
+              <a:rPr lang="es" sz="1800" b="1">
                 <a:solidFill>
                   <a:schemeClr val="dk2"/>
                 </a:solidFill>
               </a:rPr>
               <a:t>Andrade David </a:t>
             </a:r>
-            <a:endParaRPr b="1" sz="1800">
+            <a:endParaRPr sz="1800" b="1">
               <a:solidFill>
                 <a:schemeClr val="dk2"/>
               </a:solidFill>
             </a:endParaRPr>
           </a:p>
           <a:p>
-            <a:pPr indent="0" lvl="0" marL="0" rtl="0" algn="l">
+            <a:pPr marL="0" lvl="0" indent="0" algn="l" rtl="0">
               <a:spcBef>
                 <a:spcPts val="0"/>
               </a:spcBef>
@@ -6038,21 +6289,21 @@
               <a:buNone/>
             </a:pPr>
             <a:r>
-              <a:rPr b="1" lang="es" sz="1800">
+              <a:rPr lang="es" sz="1800" b="1">
                 <a:solidFill>
                   <a:schemeClr val="dk2"/>
                 </a:solidFill>
               </a:rPr>
               <a:t>Matias Coronel</a:t>
             </a:r>
-            <a:endParaRPr b="1" sz="1800">
+            <a:endParaRPr sz="1800" b="1">
               <a:solidFill>
                 <a:schemeClr val="dk2"/>
               </a:solidFill>
             </a:endParaRPr>
           </a:p>
           <a:p>
-            <a:pPr indent="0" lvl="0" marL="0" rtl="0" algn="l">
+            <a:pPr marL="0" lvl="0" indent="0" algn="l" rtl="0">
               <a:spcBef>
                 <a:spcPts val="0"/>
               </a:spcBef>
@@ -6062,21 +6313,21 @@
               <a:buNone/>
             </a:pPr>
             <a:r>
-              <a:rPr b="1" lang="es" sz="1800">
+              <a:rPr lang="es" sz="1800" b="1">
                 <a:solidFill>
                   <a:schemeClr val="dk2"/>
                 </a:solidFill>
               </a:rPr>
               <a:t>Perez Mariela</a:t>
             </a:r>
-            <a:endParaRPr b="1" sz="1800">
+            <a:endParaRPr sz="1800" b="1">
               <a:solidFill>
                 <a:schemeClr val="dk2"/>
               </a:solidFill>
             </a:endParaRPr>
           </a:p>
           <a:p>
-            <a:pPr indent="0" lvl="0" marL="0" rtl="0" algn="l">
+            <a:pPr marL="0" lvl="0" indent="0" algn="l" rtl="0">
               <a:spcBef>
                 <a:spcPts val="0"/>
               </a:spcBef>
@@ -6085,9 +6336,6 @@
               </a:spcAft>
               <a:buNone/>
             </a:pPr>
-            <a:r>
-              <a:t/>
-            </a:r>
             <a:endParaRPr sz="1800">
               <a:solidFill>
                 <a:schemeClr val="dk2"/>
@@ -6105,7 +6353,7 @@
 </file>
 
 <file path=ppt/slides/slide2.xml><?xml version="1.0" encoding="utf-8"?>
-<p:sld xmlns:a="http://schemas.openxmlformats.org/drawingml/2006/main" xmlns:r="http://schemas.openxmlformats.org/officeDocument/2006/relationships" xmlns:mc="http://schemas.openxmlformats.org/markup-compatibility/2006" xmlns:mv="urn:schemas-microsoft-com:mac:vml" xmlns:p="http://schemas.openxmlformats.org/presentationml/2006/main" xmlns:c="http://schemas.openxmlformats.org/drawingml/2006/chart" xmlns:dgm="http://schemas.openxmlformats.org/drawingml/2006/diagram" xmlns:o="urn:schemas-microsoft-com:office:office" xmlns:v="urn:schemas-microsoft-com:vml" xmlns:pvml="urn:schemas-microsoft-com:office:powerpoint" xmlns:com="http://schemas.openxmlformats.org/drawingml/2006/compatibility" xmlns:p14="http://schemas.microsoft.com/office/powerpoint/2010/main" xmlns:p15="http://schemas.microsoft.com/office/powerpoint/2012/main" xmlns:ahyp="http://schemas.microsoft.com/office/drawing/2018/hyperlinkcolor">
+<p:sld xmlns:a="http://schemas.openxmlformats.org/drawingml/2006/main" xmlns:r="http://schemas.openxmlformats.org/officeDocument/2006/relationships" xmlns:p="http://schemas.openxmlformats.org/presentationml/2006/main">
   <p:cSld>
     <p:bg>
       <p:bgPr>
@@ -6117,11 +6365,12 @@
             <a:fillRect/>
           </a:stretch>
         </a:blipFill>
+        <a:effectLst/>
       </p:bgPr>
     </p:bg>
     <p:spTree>
       <p:nvGrpSpPr>
-        <p:cNvPr id="60" name="Shape 60"/>
+        <p:cNvPr id="1" name="Shape 60"/>
         <p:cNvGrpSpPr/>
         <p:nvPr/>
       </p:nvGrpSpPr>
@@ -6136,9 +6385,11 @@
       <p:sp>
         <p:nvSpPr>
           <p:cNvPr id="61" name="Google Shape;61;p14"/>
-          <p:cNvSpPr txBox="1"/>
+          <p:cNvSpPr txBox="1">
+            <a:spLocks noGrp="1"/>
+          </p:cNvSpPr>
           <p:nvPr>
-            <p:ph idx="1" type="subTitle"/>
+            <p:ph type="subTitle" idx="1"/>
           </p:nvPr>
         </p:nvSpPr>
         <p:spPr>
@@ -6151,12 +6402,12 @@
           </a:prstGeom>
         </p:spPr>
         <p:txBody>
-          <a:bodyPr anchorCtr="0" anchor="t" bIns="91425" lIns="91425" spcFirstLastPara="1" rIns="91425" wrap="square" tIns="91425">
-            <a:normAutofit fontScale="55000" lnSpcReduction="10000"/>
+          <a:bodyPr spcFirstLastPara="1" wrap="square" lIns="91425" tIns="91425" rIns="91425" bIns="91425" anchor="t" anchorCtr="0">
+            <a:normAutofit fontScale="62500" lnSpcReduction="20000"/>
           </a:bodyPr>
           <a:lstStyle/>
           <a:p>
-            <a:pPr indent="0" lvl="0" marL="0" rtl="0" algn="l">
+            <a:pPr marL="0" lvl="0" indent="0" algn="l" rtl="0">
               <a:spcBef>
                 <a:spcPts val="0"/>
               </a:spcBef>
@@ -6185,7 +6436,7 @@
             </a:endParaRPr>
           </a:p>
           <a:p>
-            <a:pPr indent="0" lvl="0" marL="0" rtl="0" algn="l">
+            <a:pPr marL="0" lvl="0" indent="0" algn="l" rtl="0">
               <a:spcBef>
                 <a:spcPts val="0"/>
               </a:spcBef>
@@ -6214,7 +6465,7 @@
             </a:endParaRPr>
           </a:p>
           <a:p>
-            <a:pPr indent="0" lvl="0" marL="0" rtl="0" algn="l">
+            <a:pPr marL="0" lvl="0" indent="0" algn="l" rtl="0">
               <a:spcBef>
                 <a:spcPts val="0"/>
               </a:spcBef>
@@ -6243,7 +6494,7 @@
             </a:endParaRPr>
           </a:p>
           <a:p>
-            <a:pPr indent="0" lvl="0" marL="0" rtl="0" algn="l">
+            <a:pPr marL="0" lvl="0" indent="0" algn="l" rtl="0">
               <a:spcBef>
                 <a:spcPts val="0"/>
               </a:spcBef>
@@ -6272,7 +6523,7 @@
             </a:endParaRPr>
           </a:p>
           <a:p>
-            <a:pPr indent="0" lvl="0" marL="0" rtl="0" algn="l">
+            <a:pPr marL="0" lvl="0" indent="0" algn="l" rtl="0">
               <a:spcBef>
                 <a:spcPts val="0"/>
               </a:spcBef>
@@ -6301,7 +6552,7 @@
             </a:endParaRPr>
           </a:p>
           <a:p>
-            <a:pPr indent="0" lvl="0" marL="0" rtl="0" algn="l">
+            <a:pPr marL="0" lvl="0" indent="0" algn="l" rtl="0">
               <a:spcBef>
                 <a:spcPts val="0"/>
               </a:spcBef>
@@ -6310,9 +6561,6 @@
               </a:spcAft>
               <a:buNone/>
             </a:pPr>
-            <a:r>
-              <a:t/>
-            </a:r>
             <a:endParaRPr/>
           </a:p>
         </p:txBody>
@@ -6326,7 +6574,7 @@
 </file>
 
 <file path=ppt/slides/slide3.xml><?xml version="1.0" encoding="utf-8"?>
-<p:sld xmlns:a="http://schemas.openxmlformats.org/drawingml/2006/main" xmlns:r="http://schemas.openxmlformats.org/officeDocument/2006/relationships" xmlns:mc="http://schemas.openxmlformats.org/markup-compatibility/2006" xmlns:mv="urn:schemas-microsoft-com:mac:vml" xmlns:p="http://schemas.openxmlformats.org/presentationml/2006/main" xmlns:c="http://schemas.openxmlformats.org/drawingml/2006/chart" xmlns:dgm="http://schemas.openxmlformats.org/drawingml/2006/diagram" xmlns:o="urn:schemas-microsoft-com:office:office" xmlns:v="urn:schemas-microsoft-com:vml" xmlns:pvml="urn:schemas-microsoft-com:office:powerpoint" xmlns:com="http://schemas.openxmlformats.org/drawingml/2006/compatibility" xmlns:p14="http://schemas.microsoft.com/office/powerpoint/2010/main" xmlns:p15="http://schemas.microsoft.com/office/powerpoint/2012/main" xmlns:ahyp="http://schemas.microsoft.com/office/drawing/2018/hyperlinkcolor">
+<p:sld xmlns:a="http://schemas.openxmlformats.org/drawingml/2006/main" xmlns:r="http://schemas.openxmlformats.org/officeDocument/2006/relationships" xmlns:p="http://schemas.openxmlformats.org/presentationml/2006/main">
   <p:cSld>
     <p:bg>
       <p:bgPr>
@@ -6338,11 +6586,12 @@
             <a:fillRect/>
           </a:stretch>
         </a:blipFill>
+        <a:effectLst/>
       </p:bgPr>
     </p:bg>
     <p:spTree>
       <p:nvGrpSpPr>
-        <p:cNvPr id="65" name="Shape 65"/>
+        <p:cNvPr id="1" name="Shape 65"/>
         <p:cNvGrpSpPr/>
         <p:nvPr/>
       </p:nvGrpSpPr>
@@ -6357,7 +6606,9 @@
       <p:sp>
         <p:nvSpPr>
           <p:cNvPr id="66" name="Google Shape;66;p15"/>
-          <p:cNvSpPr txBox="1"/>
+          <p:cNvSpPr txBox="1">
+            <a:spLocks noGrp="1"/>
+          </p:cNvSpPr>
           <p:nvPr>
             <p:ph type="title"/>
           </p:nvPr>
@@ -6372,12 +6623,12 @@
           </a:prstGeom>
         </p:spPr>
         <p:txBody>
-          <a:bodyPr anchorCtr="0" anchor="t" bIns="91425" lIns="91425" spcFirstLastPara="1" rIns="91425" wrap="square" tIns="91425">
+          <a:bodyPr spcFirstLastPara="1" wrap="square" lIns="91425" tIns="91425" rIns="91425" bIns="91425" anchor="t" anchorCtr="0">
             <a:noAutofit/>
           </a:bodyPr>
           <a:lstStyle/>
           <a:p>
-            <a:pPr indent="0" lvl="0" marL="0" rtl="0" algn="l">
+            <a:pPr marL="0" lvl="0" indent="0" algn="l" rtl="0">
               <a:spcBef>
                 <a:spcPts val="0"/>
               </a:spcBef>
@@ -6388,14 +6639,14 @@
               <a:buNone/>
             </a:pPr>
             <a:r>
-              <a:rPr b="1" lang="es" sz="2320">
+              <a:rPr lang="es" sz="2320" b="1">
                 <a:solidFill>
                   <a:srgbClr val="000000"/>
                 </a:solidFill>
               </a:rPr>
               <a:t>Estructura de Clases y Relaciones del Sistema de Vuelos</a:t>
             </a:r>
-            <a:endParaRPr b="1" sz="2320">
+            <a:endParaRPr sz="2320" b="1">
               <a:solidFill>
                 <a:srgbClr val="000000"/>
               </a:solidFill>
@@ -6440,7 +6691,7 @@
 </file>
 
 <file path=ppt/slides/slide4.xml><?xml version="1.0" encoding="utf-8"?>
-<p:sld xmlns:a="http://schemas.openxmlformats.org/drawingml/2006/main" xmlns:r="http://schemas.openxmlformats.org/officeDocument/2006/relationships" xmlns:mc="http://schemas.openxmlformats.org/markup-compatibility/2006" xmlns:mv="urn:schemas-microsoft-com:mac:vml" xmlns:p="http://schemas.openxmlformats.org/presentationml/2006/main" xmlns:c="http://schemas.openxmlformats.org/drawingml/2006/chart" xmlns:dgm="http://schemas.openxmlformats.org/drawingml/2006/diagram" xmlns:o="urn:schemas-microsoft-com:office:office" xmlns:v="urn:schemas-microsoft-com:vml" xmlns:pvml="urn:schemas-microsoft-com:office:powerpoint" xmlns:com="http://schemas.openxmlformats.org/drawingml/2006/compatibility" xmlns:p14="http://schemas.microsoft.com/office/powerpoint/2010/main" xmlns:p15="http://schemas.microsoft.com/office/powerpoint/2012/main" xmlns:ahyp="http://schemas.microsoft.com/office/drawing/2018/hyperlinkcolor">
+<p:sld xmlns:a="http://schemas.openxmlformats.org/drawingml/2006/main" xmlns:r="http://schemas.openxmlformats.org/officeDocument/2006/relationships" xmlns:p="http://schemas.openxmlformats.org/presentationml/2006/main">
   <p:cSld>
     <p:bg>
       <p:bgPr>
@@ -6452,11 +6703,12 @@
             <a:fillRect/>
           </a:stretch>
         </a:blipFill>
+        <a:effectLst/>
       </p:bgPr>
     </p:bg>
     <p:spTree>
       <p:nvGrpSpPr>
-        <p:cNvPr id="71" name="Shape 71"/>
+        <p:cNvPr id="1" name="Shape 71"/>
         <p:cNvGrpSpPr/>
         <p:nvPr/>
       </p:nvGrpSpPr>
@@ -6471,7 +6723,9 @@
       <p:sp>
         <p:nvSpPr>
           <p:cNvPr id="72" name="Google Shape;72;p16"/>
-          <p:cNvSpPr txBox="1"/>
+          <p:cNvSpPr txBox="1">
+            <a:spLocks noGrp="1"/>
+          </p:cNvSpPr>
           <p:nvPr>
             <p:ph type="title"/>
           </p:nvPr>
@@ -6486,12 +6740,12 @@
           </a:prstGeom>
         </p:spPr>
         <p:txBody>
-          <a:bodyPr anchorCtr="0" anchor="t" bIns="91425" lIns="91425" spcFirstLastPara="1" rIns="91425" wrap="square" tIns="91425">
+          <a:bodyPr spcFirstLastPara="1" wrap="square" lIns="91425" tIns="91425" rIns="91425" bIns="91425" anchor="t" anchorCtr="0">
             <a:normAutofit/>
           </a:bodyPr>
           <a:lstStyle/>
           <a:p>
-            <a:pPr indent="0" lvl="0" marL="0" rtl="0" algn="l">
+            <a:pPr marL="0" lvl="0" indent="0" algn="l" rtl="0">
               <a:spcBef>
                 <a:spcPts val="0"/>
               </a:spcBef>
@@ -6506,19 +6760,21 @@
               <a:buNone/>
             </a:pPr>
             <a:r>
-              <a:rPr b="1" lang="es" sz="2400"/>
+              <a:rPr lang="es" sz="2400" b="1"/>
               <a:t>Estructura de Clases y Relaciones del Sistema de Vuelos</a:t>
             </a:r>
-            <a:endParaRPr b="1" sz="2400"/>
+            <a:endParaRPr sz="2400" b="1"/>
           </a:p>
         </p:txBody>
       </p:sp>
       <p:sp>
         <p:nvSpPr>
           <p:cNvPr id="73" name="Google Shape;73;p16"/>
-          <p:cNvSpPr txBox="1"/>
+          <p:cNvSpPr txBox="1">
+            <a:spLocks noGrp="1"/>
+          </p:cNvSpPr>
           <p:nvPr>
-            <p:ph idx="1" type="body"/>
+            <p:ph type="body" idx="1"/>
           </p:nvPr>
         </p:nvSpPr>
         <p:spPr>
@@ -6531,12 +6787,12 @@
           </a:prstGeom>
         </p:spPr>
         <p:txBody>
-          <a:bodyPr anchorCtr="0" anchor="t" bIns="91425" lIns="91425" spcFirstLastPara="1" rIns="91425" wrap="square" tIns="91425">
+          <a:bodyPr spcFirstLastPara="1" wrap="square" lIns="91425" tIns="91425" rIns="91425" bIns="91425" anchor="t" anchorCtr="0">
             <a:noAutofit/>
           </a:bodyPr>
           <a:lstStyle/>
           <a:p>
-            <a:pPr indent="0" lvl="0" marL="0" rtl="0" algn="l">
+            <a:pPr marL="0" lvl="0" indent="0" algn="l" rtl="0">
               <a:lnSpc>
                 <a:spcPct val="95000"/>
               </a:lnSpc>
@@ -6550,7 +6806,7 @@
               <a:buNone/>
             </a:pPr>
             <a:r>
-              <a:rPr lang="es" sz="970">
+              <a:rPr lang="es" sz="970" dirty="0">
                 <a:solidFill>
                   <a:schemeClr val="dk1"/>
                 </a:solidFill>
@@ -6558,7 +6814,7 @@
               <a:t>En el siguiente diagrama se representa el </a:t>
             </a:r>
             <a:r>
-              <a:rPr b="1" lang="es" sz="970">
+              <a:rPr lang="es" sz="970" b="1" dirty="0">
                 <a:solidFill>
                   <a:schemeClr val="dk1"/>
                 </a:solidFill>
@@ -6566,21 +6822,21 @@
               <a:t>modelo de clases</a:t>
             </a:r>
             <a:r>
-              <a:rPr lang="es" sz="970">
+              <a:rPr lang="es" sz="970" dirty="0">
                 <a:solidFill>
                   <a:schemeClr val="dk1"/>
                 </a:solidFill>
               </a:rPr>
               <a:t> del sistema de gestión de vuelos.</a:t>
             </a:r>
-            <a:endParaRPr sz="970">
+            <a:endParaRPr sz="970" dirty="0">
               <a:solidFill>
                 <a:schemeClr val="dk1"/>
               </a:solidFill>
             </a:endParaRPr>
           </a:p>
           <a:p>
-            <a:pPr indent="0" lvl="0" marL="0" rtl="0" algn="l">
+            <a:pPr marL="0" lvl="0" indent="0" algn="l" rtl="0">
               <a:lnSpc>
                 <a:spcPct val="95000"/>
               </a:lnSpc>
@@ -6598,21 +6854,21 @@
               <a:buNone/>
             </a:pPr>
             <a:r>
-              <a:rPr lang="es" sz="970">
+              <a:rPr lang="es" sz="970" dirty="0">
                 <a:solidFill>
                   <a:schemeClr val="dk1"/>
                 </a:solidFill>
               </a:rPr>
               <a:t>Cada clase  contiene  sus propios datos y métodos, lo que permite mantener la información organizada .</a:t>
             </a:r>
-            <a:endParaRPr sz="970">
+            <a:endParaRPr sz="970" dirty="0">
               <a:solidFill>
                 <a:schemeClr val="dk1"/>
               </a:solidFill>
             </a:endParaRPr>
           </a:p>
           <a:p>
-            <a:pPr indent="-290195" lvl="0" marL="457200" rtl="0" algn="l">
+            <a:pPr marL="457200" lvl="0" indent="-290195" algn="l" rtl="0">
               <a:lnSpc>
                 <a:spcPct val="95000"/>
               </a:lnSpc>
@@ -6629,7 +6885,7 @@
               <a:buChar char="●"/>
             </a:pPr>
             <a:r>
-              <a:rPr b="1" lang="es" sz="970">
+              <a:rPr lang="es" sz="970" b="1" dirty="0">
                 <a:solidFill>
                   <a:schemeClr val="dk1"/>
                 </a:solidFill>
@@ -6637,7 +6893,7 @@
               <a:t>Pasajero</a:t>
             </a:r>
             <a:r>
-              <a:rPr lang="es" sz="970">
+              <a:rPr lang="es" sz="970" dirty="0">
                 <a:solidFill>
                   <a:schemeClr val="dk1"/>
                 </a:solidFill>
@@ -6645,20 +6901,20 @@
               <a:t>: almacena los datos personales y el historial de vuelos del cliente y el equipaje.</a:t>
             </a:r>
             <a:br>
-              <a:rPr lang="es" sz="970">
+              <a:rPr lang="es" sz="970" dirty="0">
                 <a:solidFill>
                   <a:schemeClr val="dk1"/>
                 </a:solidFill>
               </a:rPr>
             </a:br>
-            <a:endParaRPr sz="970">
+            <a:endParaRPr sz="970" dirty="0">
               <a:solidFill>
                 <a:schemeClr val="dk1"/>
               </a:solidFill>
             </a:endParaRPr>
           </a:p>
           <a:p>
-            <a:pPr indent="-290195" lvl="0" marL="457200" rtl="0" algn="l">
+            <a:pPr marL="457200" lvl="0" indent="-290195" algn="l" rtl="0">
               <a:lnSpc>
                 <a:spcPct val="95000"/>
               </a:lnSpc>
@@ -6675,7 +6931,7 @@
               <a:buChar char="●"/>
             </a:pPr>
             <a:r>
-              <a:rPr b="1" lang="es" sz="970">
+              <a:rPr lang="es" sz="970" b="1" dirty="0">
                 <a:solidFill>
                   <a:schemeClr val="dk1"/>
                 </a:solidFill>
@@ -6683,7 +6939,7 @@
               <a:t>Vuelo</a:t>
             </a:r>
             <a:r>
-              <a:rPr lang="es" sz="970">
+              <a:rPr lang="es" sz="970" dirty="0">
                 <a:solidFill>
                   <a:schemeClr val="dk1"/>
                 </a:solidFill>
@@ -6691,20 +6947,20 @@
               <a:t>: contiene la información del vuelo, como el código, destino, fecha y lista de pasajeros.</a:t>
             </a:r>
             <a:br>
-              <a:rPr lang="es" sz="970">
+              <a:rPr lang="es" sz="970" dirty="0">
                 <a:solidFill>
                   <a:schemeClr val="dk1"/>
                 </a:solidFill>
               </a:rPr>
             </a:br>
-            <a:endParaRPr sz="970">
+            <a:endParaRPr sz="970" dirty="0">
               <a:solidFill>
                 <a:schemeClr val="dk1"/>
               </a:solidFill>
             </a:endParaRPr>
           </a:p>
           <a:p>
-            <a:pPr indent="-290195" lvl="0" marL="457200" rtl="0" algn="l">
+            <a:pPr marL="457200" lvl="0" indent="-290195" algn="l" rtl="0">
               <a:lnSpc>
                 <a:spcPct val="95000"/>
               </a:lnSpc>
@@ -6721,7 +6977,7 @@
               <a:buChar char="●"/>
             </a:pPr>
             <a:r>
-              <a:rPr b="1" lang="es" sz="970">
+              <a:rPr lang="es" sz="970" b="1" dirty="0">
                 <a:solidFill>
                   <a:schemeClr val="dk1"/>
                 </a:solidFill>
@@ -6729,7 +6985,7 @@
               <a:t>Reserva</a:t>
             </a:r>
             <a:r>
-              <a:rPr lang="es" sz="970">
+              <a:rPr lang="es" sz="970" dirty="0">
                 <a:solidFill>
                   <a:schemeClr val="dk1"/>
                 </a:solidFill>
@@ -6737,20 +6993,20 @@
               <a:t>: actúa como vínculo entre un pasajero y un vuelo, controlando la disponibilidad de cupos y evitando duplicaciones.</a:t>
             </a:r>
             <a:br>
-              <a:rPr lang="es" sz="970">
+              <a:rPr lang="es" sz="970" dirty="0">
                 <a:solidFill>
                   <a:schemeClr val="dk1"/>
                 </a:solidFill>
               </a:rPr>
             </a:br>
-            <a:endParaRPr sz="970">
+            <a:endParaRPr sz="970" dirty="0">
               <a:solidFill>
                 <a:schemeClr val="dk1"/>
               </a:solidFill>
             </a:endParaRPr>
           </a:p>
           <a:p>
-            <a:pPr indent="-290195" lvl="0" marL="457200" rtl="0" algn="l">
+            <a:pPr marL="457200" lvl="0" indent="-290195" algn="l" rtl="0">
               <a:lnSpc>
                 <a:spcPct val="95000"/>
               </a:lnSpc>
@@ -6767,7 +7023,7 @@
               <a:buChar char="●"/>
             </a:pPr>
             <a:r>
-              <a:rPr b="1" lang="es" sz="970">
+              <a:rPr lang="es" sz="970" b="1" dirty="0">
                 <a:solidFill>
                   <a:schemeClr val="dk1"/>
                 </a:solidFill>
@@ -6775,21 +7031,21 @@
               <a:t>Equipaje</a:t>
             </a:r>
             <a:r>
-              <a:rPr lang="es" sz="970">
+              <a:rPr lang="es" sz="970" dirty="0">
                 <a:solidFill>
                   <a:schemeClr val="dk1"/>
                 </a:solidFill>
               </a:rPr>
               <a:t>: se asocia directamente al pasajero, registrando la cantidad y el peso total de las maletas.</a:t>
             </a:r>
-            <a:endParaRPr sz="970">
+            <a:endParaRPr sz="970" dirty="0">
               <a:solidFill>
                 <a:schemeClr val="dk1"/>
               </a:solidFill>
             </a:endParaRPr>
           </a:p>
           <a:p>
-            <a:pPr indent="0" lvl="0" marL="0" rtl="0" algn="l">
+            <a:pPr marL="0" lvl="0" indent="0" algn="l" rtl="0">
               <a:lnSpc>
                 <a:spcPct val="95000"/>
               </a:lnSpc>
@@ -6802,17 +7058,14 @@
               <a:buSzPts val="770"/>
               <a:buNone/>
             </a:pPr>
-            <a:r>
-              <a:t/>
-            </a:r>
-            <a:endParaRPr sz="970">
+            <a:endParaRPr sz="970" dirty="0">
               <a:solidFill>
                 <a:schemeClr val="dk1"/>
               </a:solidFill>
             </a:endParaRPr>
           </a:p>
           <a:p>
-            <a:pPr indent="0" lvl="0" marL="0" rtl="0" algn="l">
+            <a:pPr marL="0" lvl="0" indent="0" algn="l" rtl="0">
               <a:lnSpc>
                 <a:spcPct val="95000"/>
               </a:lnSpc>
@@ -6830,7 +7083,7 @@
               <a:buNone/>
             </a:pPr>
             <a:r>
-              <a:rPr lang="es" sz="970">
+              <a:rPr lang="es" sz="970" dirty="0">
                 <a:solidFill>
                   <a:schemeClr val="dk1"/>
                 </a:solidFill>
@@ -6838,7 +7091,7 @@
               <a:t>Las  flechas entre las clases muestran las </a:t>
             </a:r>
             <a:r>
-              <a:rPr b="1" lang="es" sz="970">
+              <a:rPr lang="es" sz="970" b="1" dirty="0">
                 <a:solidFill>
                   <a:schemeClr val="dk1"/>
                 </a:solidFill>
@@ -6846,21 +7099,21 @@
               <a:t>relaciones</a:t>
             </a:r>
             <a:r>
-              <a:rPr lang="es" sz="970">
+              <a:rPr lang="es" sz="970" dirty="0">
                 <a:solidFill>
                   <a:schemeClr val="dk1"/>
                 </a:solidFill>
               </a:rPr>
               <a:t>:</a:t>
             </a:r>
-            <a:endParaRPr sz="970">
+            <a:endParaRPr sz="970" dirty="0">
               <a:solidFill>
                 <a:schemeClr val="dk1"/>
               </a:solidFill>
             </a:endParaRPr>
           </a:p>
           <a:p>
-            <a:pPr indent="-290195" lvl="0" marL="457200" rtl="0" algn="l">
+            <a:pPr marL="457200" lvl="0" indent="-290195" algn="l" rtl="0">
               <a:lnSpc>
                 <a:spcPct val="95000"/>
               </a:lnSpc>
@@ -6877,37 +7130,21 @@
               <a:buChar char="●"/>
             </a:pPr>
             <a:r>
-              <a:rPr lang="es" sz="970">
+              <a:rPr lang="es" sz="970" dirty="0">
                 <a:solidFill>
                   <a:schemeClr val="dk1"/>
                 </a:solidFill>
               </a:rPr>
-              <a:t>Un pasajero puede realizar diferentes vuelos a  su vez un vuelo lleva </a:t>
+              <a:t>Un pasajero puede realizar diferentes vuelos a  su vez un vuelo lleva muchos pasajeros</a:t>
             </a:r>
-            <a:r>
-              <a:rPr lang="es" sz="970">
-                <a:solidFill>
-                  <a:schemeClr val="dk1"/>
-                </a:solidFill>
-              </a:rPr>
-              <a:t>muchos</a:t>
-            </a:r>
-            <a:r>
-              <a:rPr lang="es" sz="970">
-                <a:solidFill>
-                  <a:schemeClr val="dk1"/>
-                </a:solidFill>
-              </a:rPr>
-              <a:t> pasajeros</a:t>
-            </a:r>
-            <a:endParaRPr sz="970">
+            <a:endParaRPr sz="970" dirty="0">
               <a:solidFill>
                 <a:schemeClr val="dk1"/>
               </a:solidFill>
             </a:endParaRPr>
           </a:p>
           <a:p>
-            <a:pPr indent="-290195" lvl="0" marL="457200" rtl="0" algn="l">
+            <a:pPr marL="457200" lvl="0" indent="-290195" algn="l" rtl="0">
               <a:lnSpc>
                 <a:spcPct val="95000"/>
               </a:lnSpc>
@@ -6924,21 +7161,21 @@
               <a:buChar char="●"/>
             </a:pPr>
             <a:r>
-              <a:rPr lang="es" sz="970">
+              <a:rPr lang="es" sz="970" dirty="0">
                 <a:solidFill>
                   <a:schemeClr val="dk1"/>
                 </a:solidFill>
               </a:rPr>
               <a:t>Un pasajero puede realizar varias reservas</a:t>
             </a:r>
-            <a:endParaRPr sz="970">
+            <a:endParaRPr sz="970" dirty="0">
               <a:solidFill>
                 <a:schemeClr val="dk1"/>
               </a:solidFill>
             </a:endParaRPr>
           </a:p>
           <a:p>
-            <a:pPr indent="-290195" lvl="0" marL="457200" rtl="0" algn="l">
+            <a:pPr marL="457200" lvl="0" indent="-290195" algn="l" rtl="0">
               <a:lnSpc>
                 <a:spcPct val="95000"/>
               </a:lnSpc>
@@ -6955,21 +7192,21 @@
               <a:buChar char="●"/>
             </a:pPr>
             <a:r>
-              <a:rPr lang="es" sz="970">
+              <a:rPr lang="es" sz="970" dirty="0">
                 <a:solidFill>
                   <a:schemeClr val="dk1"/>
                 </a:solidFill>
               </a:rPr>
               <a:t>Cada reserva corresponde a un solo vuelo, pero un vuelo puede tener muchas reservas.</a:t>
             </a:r>
-            <a:endParaRPr sz="970">
+            <a:endParaRPr sz="970" dirty="0">
               <a:solidFill>
                 <a:schemeClr val="dk1"/>
               </a:solidFill>
             </a:endParaRPr>
           </a:p>
           <a:p>
-            <a:pPr indent="0" lvl="0" marL="0" rtl="0" algn="l">
+            <a:pPr marL="0" lvl="0" indent="0" algn="l" rtl="0">
               <a:lnSpc>
                 <a:spcPct val="95000"/>
               </a:lnSpc>
@@ -6982,17 +7219,14 @@
               <a:buSzPts val="770"/>
               <a:buNone/>
             </a:pPr>
-            <a:r>
-              <a:t/>
-            </a:r>
-            <a:endParaRPr sz="970">
+            <a:endParaRPr sz="970" dirty="0">
               <a:solidFill>
                 <a:schemeClr val="dk1"/>
               </a:solidFill>
             </a:endParaRPr>
           </a:p>
           <a:p>
-            <a:pPr indent="0" lvl="0" marL="0" rtl="0" algn="l">
+            <a:pPr marL="0" lvl="0" indent="0" algn="l" rtl="0">
               <a:lnSpc>
                 <a:spcPct val="95000"/>
               </a:lnSpc>
@@ -7005,10 +7239,7 @@
               <a:buSzPts val="770"/>
               <a:buNone/>
             </a:pPr>
-            <a:r>
-              <a:t/>
-            </a:r>
-            <a:endParaRPr sz="970">
+            <a:endParaRPr sz="970" dirty="0">
               <a:solidFill>
                 <a:schemeClr val="dk1"/>
               </a:solidFill>
@@ -7025,7 +7256,7 @@
 </file>
 
 <file path=ppt/slides/slide5.xml><?xml version="1.0" encoding="utf-8"?>
-<p:sld xmlns:a="http://schemas.openxmlformats.org/drawingml/2006/main" xmlns:r="http://schemas.openxmlformats.org/officeDocument/2006/relationships" xmlns:mc="http://schemas.openxmlformats.org/markup-compatibility/2006" xmlns:mv="urn:schemas-microsoft-com:mac:vml" xmlns:p="http://schemas.openxmlformats.org/presentationml/2006/main" xmlns:c="http://schemas.openxmlformats.org/drawingml/2006/chart" xmlns:dgm="http://schemas.openxmlformats.org/drawingml/2006/diagram" xmlns:o="urn:schemas-microsoft-com:office:office" xmlns:v="urn:schemas-microsoft-com:vml" xmlns:pvml="urn:schemas-microsoft-com:office:powerpoint" xmlns:com="http://schemas.openxmlformats.org/drawingml/2006/compatibility" xmlns:p14="http://schemas.microsoft.com/office/powerpoint/2010/main" xmlns:p15="http://schemas.microsoft.com/office/powerpoint/2012/main" xmlns:ahyp="http://schemas.microsoft.com/office/drawing/2018/hyperlinkcolor">
+<p:sld xmlns:a="http://schemas.openxmlformats.org/drawingml/2006/main" xmlns:r="http://schemas.openxmlformats.org/officeDocument/2006/relationships" xmlns:p="http://schemas.openxmlformats.org/presentationml/2006/main">
   <p:cSld>
     <p:bg>
       <p:bgPr>
@@ -7037,11 +7268,12 @@
             <a:fillRect/>
           </a:stretch>
         </a:blipFill>
+        <a:effectLst/>
       </p:bgPr>
     </p:bg>
     <p:spTree>
       <p:nvGrpSpPr>
-        <p:cNvPr id="77" name="Shape 77"/>
+        <p:cNvPr id="1" name="Shape 77"/>
         <p:cNvGrpSpPr/>
         <p:nvPr/>
       </p:nvGrpSpPr>
@@ -7056,7 +7288,9 @@
       <p:sp>
         <p:nvSpPr>
           <p:cNvPr id="78" name="Google Shape;78;p17"/>
-          <p:cNvSpPr txBox="1"/>
+          <p:cNvSpPr txBox="1">
+            <a:spLocks noGrp="1"/>
+          </p:cNvSpPr>
           <p:nvPr>
             <p:ph type="title"/>
           </p:nvPr>
@@ -7071,12 +7305,12 @@
           </a:prstGeom>
         </p:spPr>
         <p:txBody>
-          <a:bodyPr anchorCtr="0" anchor="t" bIns="91425" lIns="91425" spcFirstLastPara="1" rIns="91425" wrap="square" tIns="91425">
+          <a:bodyPr spcFirstLastPara="1" wrap="square" lIns="91425" tIns="91425" rIns="91425" bIns="91425" anchor="t" anchorCtr="0">
             <a:normAutofit fontScale="90000"/>
           </a:bodyPr>
           <a:lstStyle/>
           <a:p>
-            <a:pPr indent="0" lvl="0" marL="0" rtl="0" algn="l">
+            <a:pPr marL="0" lvl="0" indent="0" algn="l" rtl="0">
               <a:spcBef>
                 <a:spcPts val="0"/>
               </a:spcBef>
@@ -7086,7 +7320,7 @@
               <a:buNone/>
             </a:pPr>
             <a:r>
-              <a:rPr b="1" lang="es"/>
+              <a:rPr lang="es" b="1"/>
               <a:t>Concepto de Encapsulamiento</a:t>
             </a:r>
             <a:endParaRPr b="1"/>
@@ -7096,9 +7330,11 @@
       <p:sp>
         <p:nvSpPr>
           <p:cNvPr id="79" name="Google Shape;79;p17"/>
-          <p:cNvSpPr txBox="1"/>
+          <p:cNvSpPr txBox="1">
+            <a:spLocks noGrp="1"/>
+          </p:cNvSpPr>
           <p:nvPr>
-            <p:ph idx="1" type="body"/>
+            <p:ph type="body" idx="1"/>
           </p:nvPr>
         </p:nvSpPr>
         <p:spPr>
@@ -7111,12 +7347,12 @@
           </a:prstGeom>
         </p:spPr>
         <p:txBody>
-          <a:bodyPr anchorCtr="0" anchor="t" bIns="91425" lIns="91425" spcFirstLastPara="1" rIns="91425" wrap="square" tIns="91425">
+          <a:bodyPr spcFirstLastPara="1" wrap="square" lIns="91425" tIns="91425" rIns="91425" bIns="91425" anchor="t" anchorCtr="0">
             <a:normAutofit/>
           </a:bodyPr>
           <a:lstStyle/>
           <a:p>
-            <a:pPr indent="0" lvl="0" marL="0" rtl="0" algn="l">
+            <a:pPr marL="0" lvl="0" indent="0" algn="l" rtl="0">
               <a:spcBef>
                 <a:spcPts val="0"/>
               </a:spcBef>
@@ -7126,21 +7362,21 @@
               <a:buNone/>
             </a:pPr>
             <a:r>
-              <a:rPr b="1" lang="es">
+              <a:rPr lang="es" b="1" dirty="0">
                 <a:solidFill>
                   <a:schemeClr val="dk1"/>
                 </a:solidFill>
               </a:rPr>
               <a:t>Se utiliza para ocultar los atributos internos del objeto y restringir el acceso directo desde fuera de la clase ya que los atributos no deben poder modificarse por fuera. </a:t>
             </a:r>
-            <a:endParaRPr b="1">
+            <a:endParaRPr b="1" dirty="0">
               <a:solidFill>
                 <a:schemeClr val="dk1"/>
               </a:solidFill>
             </a:endParaRPr>
           </a:p>
           <a:p>
-            <a:pPr indent="0" lvl="0" marL="0" rtl="0" algn="l">
+            <a:pPr marL="0" lvl="0" indent="0" algn="l" rtl="0">
               <a:spcBef>
                 <a:spcPts val="1200"/>
               </a:spcBef>
@@ -7149,10 +7385,7 @@
               </a:spcAft>
               <a:buNone/>
             </a:pPr>
-            <a:r>
-              <a:t/>
-            </a:r>
-            <a:endParaRPr/>
+            <a:endParaRPr dirty="0"/>
           </a:p>
         </p:txBody>
       </p:sp>
@@ -7164,8 +7397,218 @@
 </p:sld>
 </file>
 
+<file path=ppt/slides/slide6.xml><?xml version="1.0" encoding="utf-8"?>
+<p:sld xmlns:a="http://schemas.openxmlformats.org/drawingml/2006/main" xmlns:r="http://schemas.openxmlformats.org/officeDocument/2006/relationships" xmlns:p="http://schemas.openxmlformats.org/presentationml/2006/main">
+  <p:cSld>
+    <p:bg>
+      <p:bgPr>
+        <a:blipFill>
+          <a:blip r:embed="rId3">
+            <a:alphaModFix/>
+          </a:blip>
+          <a:stretch>
+            <a:fillRect/>
+          </a:stretch>
+        </a:blipFill>
+        <a:effectLst/>
+      </p:bgPr>
+    </p:bg>
+    <p:spTree>
+      <p:nvGrpSpPr>
+        <p:cNvPr id="1" name="Shape 77"/>
+        <p:cNvGrpSpPr/>
+        <p:nvPr/>
+      </p:nvGrpSpPr>
+      <p:grpSpPr>
+        <a:xfrm>
+          <a:off x="0" y="0"/>
+          <a:ext cx="0" cy="0"/>
+          <a:chOff x="0" y="0"/>
+          <a:chExt cx="0" cy="0"/>
+        </a:xfrm>
+      </p:grpSpPr>
+      <p:sp>
+        <p:nvSpPr>
+          <p:cNvPr id="78" name="Google Shape;78;p17"/>
+          <p:cNvSpPr txBox="1">
+            <a:spLocks noGrp="1"/>
+          </p:cNvSpPr>
+          <p:nvPr>
+            <p:ph type="title"/>
+          </p:nvPr>
+        </p:nvSpPr>
+        <p:spPr>
+          <a:xfrm>
+            <a:off x="179450" y="1267975"/>
+            <a:ext cx="8520600" cy="572700"/>
+          </a:xfrm>
+          <a:prstGeom prst="rect">
+            <a:avLst/>
+          </a:prstGeom>
+        </p:spPr>
+        <p:txBody>
+          <a:bodyPr spcFirstLastPara="1" wrap="square" lIns="91425" tIns="91425" rIns="91425" bIns="91425" anchor="t" anchorCtr="0">
+            <a:normAutofit fontScale="90000"/>
+          </a:bodyPr>
+          <a:lstStyle/>
+          <a:p>
+            <a:pPr marL="0" lvl="0" indent="0" algn="l" rtl="0">
+              <a:spcBef>
+                <a:spcPts val="0"/>
+              </a:spcBef>
+              <a:spcAft>
+                <a:spcPts val="0"/>
+              </a:spcAft>
+              <a:buNone/>
+            </a:pPr>
+            <a:r>
+              <a:rPr lang="es-AR" b="1" dirty="0"/>
+              <a:t>L</a:t>
+            </a:r>
+            <a:r>
+              <a:rPr lang="es" b="1" dirty="0"/>
+              <a:t>istas vs pilas</a:t>
+            </a:r>
+            <a:endParaRPr b="1" dirty="0"/>
+          </a:p>
+        </p:txBody>
+      </p:sp>
+      <p:sp>
+        <p:nvSpPr>
+          <p:cNvPr id="79" name="Google Shape;79;p17"/>
+          <p:cNvSpPr txBox="1">
+            <a:spLocks noGrp="1"/>
+          </p:cNvSpPr>
+          <p:nvPr>
+            <p:ph type="body" idx="1"/>
+          </p:nvPr>
+        </p:nvSpPr>
+        <p:spPr>
+          <a:xfrm>
+            <a:off x="179450" y="2210575"/>
+            <a:ext cx="8520600" cy="1904100"/>
+          </a:xfrm>
+          <a:prstGeom prst="rect">
+            <a:avLst/>
+          </a:prstGeom>
+        </p:spPr>
+        <p:txBody>
+          <a:bodyPr spcFirstLastPara="1" wrap="square" lIns="91425" tIns="91425" rIns="91425" bIns="91425" anchor="t" anchorCtr="0">
+            <a:normAutofit lnSpcReduction="10000"/>
+          </a:bodyPr>
+          <a:lstStyle/>
+          <a:p>
+            <a:pPr marL="167005" lvl="0" indent="0" algn="l" rtl="0">
+              <a:lnSpc>
+                <a:spcPct val="95000"/>
+              </a:lnSpc>
+              <a:spcBef>
+                <a:spcPts val="1200"/>
+              </a:spcBef>
+              <a:spcAft>
+                <a:spcPts val="0"/>
+              </a:spcAft>
+              <a:buClr>
+                <a:schemeClr val="dk1"/>
+              </a:buClr>
+              <a:buSzPts val="970"/>
+              <a:buNone/>
+            </a:pPr>
+            <a:r>
+              <a:rPr lang="es" sz="1800" dirty="0">
+                <a:solidFill>
+                  <a:schemeClr val="dk1"/>
+                </a:solidFill>
+              </a:rPr>
+              <a:t>Para  este trabajo (hasta el momento) usamos listas ordenadas de pasajeros y vuelos.</a:t>
+            </a:r>
+          </a:p>
+          <a:p>
+            <a:pPr marL="167005" lvl="0" indent="0" algn="l" rtl="0">
+              <a:lnSpc>
+                <a:spcPct val="95000"/>
+              </a:lnSpc>
+              <a:spcBef>
+                <a:spcPts val="1200"/>
+              </a:spcBef>
+              <a:spcAft>
+                <a:spcPts val="0"/>
+              </a:spcAft>
+              <a:buClr>
+                <a:schemeClr val="dk1"/>
+              </a:buClr>
+              <a:buSzPts val="970"/>
+              <a:buNone/>
+            </a:pPr>
+            <a:r>
+              <a:rPr lang="es" sz="1800" dirty="0">
+                <a:solidFill>
+                  <a:schemeClr val="dk1"/>
+                </a:solidFill>
+              </a:rPr>
+              <a:t>	El uso de pilas en este caso y su definicion de LIFO nos impide la selecci</a:t>
+            </a:r>
+            <a:r>
+              <a:rPr lang="es-AR" sz="1800" dirty="0" err="1">
+                <a:solidFill>
+                  <a:schemeClr val="dk1"/>
+                </a:solidFill>
+              </a:rPr>
+              <a:t>ó</a:t>
+            </a:r>
+            <a:r>
+              <a:rPr lang="es" sz="1800" dirty="0">
+                <a:solidFill>
+                  <a:schemeClr val="dk1"/>
+                </a:solidFill>
+              </a:rPr>
+              <a:t>n de elementos intermedios para su eliminacion o busqueda eficiente.</a:t>
+            </a:r>
+          </a:p>
+          <a:p>
+            <a:pPr marL="167005" lvl="0" indent="0" algn="l" rtl="0">
+              <a:lnSpc>
+                <a:spcPct val="95000"/>
+              </a:lnSpc>
+              <a:spcBef>
+                <a:spcPts val="1200"/>
+              </a:spcBef>
+              <a:spcAft>
+                <a:spcPts val="0"/>
+              </a:spcAft>
+              <a:buClr>
+                <a:schemeClr val="dk1"/>
+              </a:buClr>
+              <a:buSzPts val="970"/>
+              <a:buNone/>
+            </a:pPr>
+            <a:r>
+              <a:rPr lang="es" b="1" dirty="0">
+                <a:solidFill>
+                  <a:schemeClr val="dk1"/>
+                </a:solidFill>
+              </a:rPr>
+              <a:t>	</a:t>
+            </a:r>
+            <a:endParaRPr dirty="0"/>
+          </a:p>
+        </p:txBody>
+      </p:sp>
+    </p:spTree>
+    <p:extLst>
+      <p:ext uri="{BB962C8B-B14F-4D97-AF65-F5344CB8AC3E}">
+        <p14:creationId xmlns:p14="http://schemas.microsoft.com/office/powerpoint/2010/main" val="2338826300"/>
+      </p:ext>
+    </p:extLst>
+  </p:cSld>
+  <p:clrMapOvr>
+    <a:masterClrMapping/>
+  </p:clrMapOvr>
+</p:sld>
+</file>
+
 <file path=ppt/theme/theme1.xml><?xml version="1.0" encoding="utf-8"?>
-<a:theme xmlns:a="http://schemas.openxmlformats.org/drawingml/2006/main" xmlns:r="http://schemas.openxmlformats.org/officeDocument/2006/relationships" name="Simple Light">
+<a:theme xmlns:a="http://schemas.openxmlformats.org/drawingml/2006/main" name="Simple Light">
   <a:themeElements>
     <a:clrScheme name="Simple Light">
       <a:dk1>
@@ -7440,11 +7883,13 @@
       </a:bgFillStyleLst>
     </a:fmtScheme>
   </a:themeElements>
+  <a:objectDefaults/>
+  <a:extraClrSchemeLst/>
 </a:theme>
 </file>
 
 <file path=ppt/theme/theme2.xml><?xml version="1.0" encoding="utf-8"?>
-<a:theme xmlns:a="http://schemas.openxmlformats.org/drawingml/2006/main" xmlns:r="http://schemas.openxmlformats.org/officeDocument/2006/relationships">
+<a:theme xmlns:a="http://schemas.openxmlformats.org/drawingml/2006/main">
   <a:themeElements>
     <a:clrScheme name="Default">
       <a:dk1>
@@ -7719,5 +8164,7 @@
       </a:bgFillStyleLst>
     </a:fmtScheme>
   </a:themeElements>
+  <a:objectDefaults/>
+  <a:extraClrSchemeLst/>
 </a:theme>
 </file>
--- a/Sistema de vuelos.pptx
+++ b/Sistema de vuelos.pptx
@@ -5,7 +5,7 @@
     <p:sldMasterId id="2147483659" r:id="rId1"/>
   </p:sldMasterIdLst>
   <p:notesMasterIdLst>
-    <p:notesMasterId r:id="rId8"/>
+    <p:notesMasterId r:id="rId10"/>
   </p:notesMasterIdLst>
   <p:sldIdLst>
     <p:sldId id="256" r:id="rId2"/>
@@ -14,6 +14,8 @@
     <p:sldId id="259" r:id="rId5"/>
     <p:sldId id="260" r:id="rId6"/>
     <p:sldId id="261" r:id="rId7"/>
+    <p:sldId id="264" r:id="rId8"/>
+    <p:sldId id="262" r:id="rId9"/>
   </p:sldIdLst>
   <p:sldSz cx="9144000" cy="5143500" type="screen16x9"/>
   <p:notesSz cx="6858000" cy="9144000"/>
@@ -472,6 +474,11 @@
         </p:txBody>
       </p:sp>
     </p:spTree>
+    <p:extLst>
+      <p:ext uri="{BB962C8B-B14F-4D97-AF65-F5344CB8AC3E}">
+        <p14:creationId xmlns:p14="http://schemas.microsoft.com/office/powerpoint/2010/main" val="2286034597"/>
+      </p:ext>
+    </p:extLst>
   </p:cSld>
   <p:clrMap bg1="lt1" tx1="dk1" bg2="dk2" tx2="lt2" accent1="accent1" accent2="accent2" accent3="accent3" accent4="accent4" accent5="accent5" accent6="accent6" hlink="hlink" folHlink="folHlink"/>
   <p:notesStyle>
@@ -803,6 +810,11 @@
         </p:txBody>
       </p:sp>
     </p:spTree>
+    <p:extLst>
+      <p:ext uri="{BB962C8B-B14F-4D97-AF65-F5344CB8AC3E}">
+        <p14:creationId xmlns:p14="http://schemas.microsoft.com/office/powerpoint/2010/main" val="3448746230"/>
+      </p:ext>
+    </p:extLst>
   </p:cSld>
   <p:clrMapOvr>
     <a:masterClrMapping/>
@@ -907,6 +919,11 @@
         </p:txBody>
       </p:sp>
     </p:spTree>
+    <p:extLst>
+      <p:ext uri="{BB962C8B-B14F-4D97-AF65-F5344CB8AC3E}">
+        <p14:creationId xmlns:p14="http://schemas.microsoft.com/office/powerpoint/2010/main" val="2408085901"/>
+      </p:ext>
+    </p:extLst>
   </p:cSld>
   <p:clrMapOvr>
     <a:masterClrMapping/>
@@ -1011,6 +1028,11 @@
         </p:txBody>
       </p:sp>
     </p:spTree>
+    <p:extLst>
+      <p:ext uri="{BB962C8B-B14F-4D97-AF65-F5344CB8AC3E}">
+        <p14:creationId xmlns:p14="http://schemas.microsoft.com/office/powerpoint/2010/main" val="3941357061"/>
+      </p:ext>
+    </p:extLst>
   </p:cSld>
   <p:clrMapOvr>
     <a:masterClrMapping/>
@@ -1115,6 +1137,11 @@
         </p:txBody>
       </p:sp>
     </p:spTree>
+    <p:extLst>
+      <p:ext uri="{BB962C8B-B14F-4D97-AF65-F5344CB8AC3E}">
+        <p14:creationId xmlns:p14="http://schemas.microsoft.com/office/powerpoint/2010/main" val="3684577913"/>
+      </p:ext>
+    </p:extLst>
   </p:cSld>
   <p:clrMapOvr>
     <a:masterClrMapping/>
@@ -1219,6 +1246,11 @@
         </p:txBody>
       </p:sp>
     </p:spTree>
+    <p:extLst>
+      <p:ext uri="{BB962C8B-B14F-4D97-AF65-F5344CB8AC3E}">
+        <p14:creationId xmlns:p14="http://schemas.microsoft.com/office/powerpoint/2010/main" val="3983314112"/>
+      </p:ext>
+    </p:extLst>
   </p:cSld>
   <p:clrMapOvr>
     <a:masterClrMapping/>
@@ -6403,37 +6435,19 @@
         </p:spPr>
         <p:txBody>
           <a:bodyPr spcFirstLastPara="1" wrap="square" lIns="91425" tIns="91425" rIns="91425" bIns="91425" anchor="t" anchorCtr="0">
-            <a:normAutofit fontScale="62500" lnSpcReduction="20000"/>
+            <a:normAutofit/>
           </a:bodyPr>
           <a:lstStyle/>
           <a:p>
-            <a:pPr marL="0" lvl="0" indent="0" algn="l" rtl="0">
-              <a:spcBef>
-                <a:spcPts val="0"/>
-              </a:spcBef>
-              <a:spcAft>
-                <a:spcPts val="0"/>
-              </a:spcAft>
-              <a:buClr>
-                <a:schemeClr val="dk1"/>
-              </a:buClr>
-              <a:buSzPct val="39285"/>
-              <a:buFont typeface="Arial"/>
-              <a:buNone/>
-            </a:pPr>
+            <a:pPr marL="0" indent="0" algn="l"/>
             <a:r>
-              <a:rPr lang="es">
+              <a:rPr lang="es-MX" b="1" dirty="0">
                 <a:solidFill>
-                  <a:srgbClr val="000000"/>
+                  <a:schemeClr val="tx1"/>
                 </a:solidFill>
               </a:rPr>
-              <a:t>Entrega 1: Modelado y Encapsulamiento (Unidades 1 y 2)</a:t>
+              <a:t>Proyecto que modela un sistema de reservas de vuelos con manejo de pasajeros, vuelos, reservas y rutas.</a:t>
             </a:r>
-            <a:endParaRPr>
-              <a:solidFill>
-                <a:srgbClr val="000000"/>
-              </a:solidFill>
-            </a:endParaRPr>
           </a:p>
           <a:p>
             <a:pPr marL="0" lvl="0" indent="0" algn="l" rtl="0">
@@ -6443,125 +6457,9 @@
               <a:spcAft>
                 <a:spcPts val="0"/>
               </a:spcAft>
-              <a:buClr>
-                <a:schemeClr val="dk1"/>
-              </a:buClr>
-              <a:buSzPct val="39285"/>
-              <a:buFont typeface="Arial"/>
               <a:buNone/>
             </a:pPr>
-            <a:r>
-              <a:rPr lang="es">
-                <a:solidFill>
-                  <a:srgbClr val="000000"/>
-                </a:solidFill>
-              </a:rPr>
-              <a:t>Teoría</a:t>
-            </a:r>
-            <a:endParaRPr>
-              <a:solidFill>
-                <a:srgbClr val="000000"/>
-              </a:solidFill>
-            </a:endParaRPr>
-          </a:p>
-          <a:p>
-            <a:pPr marL="0" lvl="0" indent="0" algn="l" rtl="0">
-              <a:spcBef>
-                <a:spcPts val="0"/>
-              </a:spcBef>
-              <a:spcAft>
-                <a:spcPts val="0"/>
-              </a:spcAft>
-              <a:buClr>
-                <a:schemeClr val="dk1"/>
-              </a:buClr>
-              <a:buSzPct val="39285"/>
-              <a:buFont typeface="Arial"/>
-              <a:buNone/>
-            </a:pPr>
-            <a:r>
-              <a:rPr lang="es">
-                <a:solidFill>
-                  <a:srgbClr val="000000"/>
-                </a:solidFill>
-              </a:rPr>
-              <a:t>Explicar el concepto de encapsulamiento y su importancia en la programación orientada a objetos.</a:t>
-            </a:r>
-            <a:endParaRPr>
-              <a:solidFill>
-                <a:srgbClr val="000000"/>
-              </a:solidFill>
-            </a:endParaRPr>
-          </a:p>
-          <a:p>
-            <a:pPr marL="0" lvl="0" indent="0" algn="l" rtl="0">
-              <a:spcBef>
-                <a:spcPts val="0"/>
-              </a:spcBef>
-              <a:spcAft>
-                <a:spcPts val="0"/>
-              </a:spcAft>
-              <a:buClr>
-                <a:schemeClr val="dk1"/>
-              </a:buClr>
-              <a:buSzPct val="39285"/>
-              <a:buFont typeface="Arial"/>
-              <a:buNone/>
-            </a:pPr>
-            <a:r>
-              <a:rPr lang="es">
-                <a:solidFill>
-                  <a:srgbClr val="000000"/>
-                </a:solidFill>
-              </a:rPr>
-              <a:t>Justificar la elección de atributos y métodos para modelar pasajeros, vuelos y reservas.</a:t>
-            </a:r>
-            <a:endParaRPr>
-              <a:solidFill>
-                <a:srgbClr val="000000"/>
-              </a:solidFill>
-            </a:endParaRPr>
-          </a:p>
-          <a:p>
-            <a:pPr marL="0" lvl="0" indent="0" algn="l" rtl="0">
-              <a:spcBef>
-                <a:spcPts val="0"/>
-              </a:spcBef>
-              <a:spcAft>
-                <a:spcPts val="0"/>
-              </a:spcAft>
-              <a:buClr>
-                <a:schemeClr val="dk1"/>
-              </a:buClr>
-              <a:buSzPct val="39285"/>
-              <a:buFont typeface="Arial"/>
-              <a:buNone/>
-            </a:pPr>
-            <a:r>
-              <a:rPr lang="es">
-                <a:solidFill>
-                  <a:srgbClr val="000000"/>
-                </a:solidFill>
-              </a:rPr>
-              <a:t>Analizar ventajas y desventajas de distintas representaciones de listas y pilas para gestionar reservas   y equipaje.</a:t>
-            </a:r>
-            <a:endParaRPr>
-              <a:solidFill>
-                <a:srgbClr val="000000"/>
-              </a:solidFill>
-            </a:endParaRPr>
-          </a:p>
-          <a:p>
-            <a:pPr marL="0" lvl="0" indent="0" algn="l" rtl="0">
-              <a:spcBef>
-                <a:spcPts val="0"/>
-              </a:spcBef>
-              <a:spcAft>
-                <a:spcPts val="0"/>
-              </a:spcAft>
-              <a:buNone/>
-            </a:pPr>
-            <a:endParaRPr/>
+            <a:endParaRPr dirty="0"/>
           </a:p>
         </p:txBody>
       </p:sp>
@@ -6868,21 +6766,17 @@
             </a:endParaRPr>
           </a:p>
           <a:p>
-            <a:pPr marL="457200" lvl="0" indent="-290195" algn="l" rtl="0">
+            <a:pPr indent="-290195">
               <a:lnSpc>
                 <a:spcPct val="95000"/>
               </a:lnSpc>
               <a:spcBef>
                 <a:spcPts val="1200"/>
               </a:spcBef>
-              <a:spcAft>
-                <a:spcPts val="0"/>
-              </a:spcAft>
               <a:buClr>
                 <a:schemeClr val="dk1"/>
               </a:buClr>
               <a:buSzPts val="970"/>
-              <a:buChar char="●"/>
             </a:pPr>
             <a:r>
               <a:rPr lang="es" sz="970" b="1" dirty="0">
@@ -6898,7 +6792,39 @@
                   <a:schemeClr val="dk1"/>
                 </a:solidFill>
               </a:rPr>
-              <a:t>: almacena los datos personales y el historial de vuelos del cliente y el equipaje.</a:t>
+              <a:t>: almacena los datos personales y el historial de vuelos del cliente y el equipaje</a:t>
+            </a:r>
+            <a:r>
+              <a:rPr lang="es" sz="970" dirty="0" smtClean="0">
+                <a:solidFill>
+                  <a:schemeClr val="dk1"/>
+                </a:solidFill>
+              </a:rPr>
+              <a:t>. El equipaje </a:t>
+            </a:r>
+            <a:r>
+              <a:rPr lang="es-MX" sz="970" dirty="0">
+                <a:solidFill>
+                  <a:schemeClr val="dk1"/>
+                </a:solidFill>
+              </a:rPr>
+              <a:t>se asocia directamente al pasajero, registrando la cantidad y el peso total de las maletas</a:t>
+            </a:r>
+            <a:r>
+              <a:rPr lang="es-MX" sz="970" dirty="0" smtClean="0">
+                <a:solidFill>
+                  <a:schemeClr val="dk1"/>
+                </a:solidFill>
+              </a:rPr>
+              <a:t>.</a:t>
+            </a:r>
+            <a:r>
+              <a:rPr lang="es" sz="970" dirty="0">
+                <a:solidFill>
+                  <a:schemeClr val="dk1"/>
+                </a:solidFill>
+              </a:rPr>
+              <a:t/>
             </a:r>
             <a:br>
               <a:rPr lang="es" sz="970" dirty="0">
@@ -6999,45 +6925,6 @@
                 </a:solidFill>
               </a:rPr>
             </a:br>
-            <a:endParaRPr sz="970" dirty="0">
-              <a:solidFill>
-                <a:schemeClr val="dk1"/>
-              </a:solidFill>
-            </a:endParaRPr>
-          </a:p>
-          <a:p>
-            <a:pPr marL="457200" lvl="0" indent="-290195" algn="l" rtl="0">
-              <a:lnSpc>
-                <a:spcPct val="95000"/>
-              </a:lnSpc>
-              <a:spcBef>
-                <a:spcPts val="0"/>
-              </a:spcBef>
-              <a:spcAft>
-                <a:spcPts val="0"/>
-              </a:spcAft>
-              <a:buClr>
-                <a:schemeClr val="dk1"/>
-              </a:buClr>
-              <a:buSzPts val="970"/>
-              <a:buChar char="●"/>
-            </a:pPr>
-            <a:r>
-              <a:rPr lang="es" sz="970" b="1" dirty="0">
-                <a:solidFill>
-                  <a:schemeClr val="dk1"/>
-                </a:solidFill>
-              </a:rPr>
-              <a:t>Equipaje</a:t>
-            </a:r>
-            <a:r>
-              <a:rPr lang="es" sz="970" dirty="0">
-                <a:solidFill>
-                  <a:schemeClr val="dk1"/>
-                </a:solidFill>
-              </a:rPr>
-              <a:t>: se asocia directamente al pasajero, registrando la cantidad y el peso total de las maletas.</a:t>
-            </a:r>
             <a:endParaRPr sz="970" dirty="0">
               <a:solidFill>
                 <a:schemeClr val="dk1"/>
@@ -7320,10 +7207,10 @@
               <a:buNone/>
             </a:pPr>
             <a:r>
-              <a:rPr lang="es" b="1"/>
+              <a:rPr lang="es" b="1" dirty="0"/>
               <a:t>Concepto de Encapsulamiento</a:t>
             </a:r>
-            <a:endParaRPr b="1"/>
+            <a:endParaRPr b="1" dirty="0"/>
           </a:p>
         </p:txBody>
       </p:sp>
@@ -7598,6 +7485,397 @@
     <p:extLst>
       <p:ext uri="{BB962C8B-B14F-4D97-AF65-F5344CB8AC3E}">
         <p14:creationId xmlns:p14="http://schemas.microsoft.com/office/powerpoint/2010/main" val="2338826300"/>
+      </p:ext>
+    </p:extLst>
+  </p:cSld>
+  <p:clrMapOvr>
+    <a:masterClrMapping/>
+  </p:clrMapOvr>
+</p:sld>
+</file>
+
+<file path=ppt/slides/slide7.xml><?xml version="1.0" encoding="utf-8"?>
+<p:sld xmlns:a="http://schemas.openxmlformats.org/drawingml/2006/main" xmlns:r="http://schemas.openxmlformats.org/officeDocument/2006/relationships" xmlns:p="http://schemas.openxmlformats.org/presentationml/2006/main">
+  <p:cSld>
+    <p:bg>
+      <p:bgPr>
+        <a:blipFill dpi="0" rotWithShape="1">
+          <a:blip r:embed="rId2">
+            <a:lum/>
+          </a:blip>
+          <a:srcRect/>
+          <a:stretch>
+            <a:fillRect t="-9000" b="-9000"/>
+          </a:stretch>
+        </a:blipFill>
+        <a:effectLst/>
+      </p:bgPr>
+    </p:bg>
+    <p:spTree>
+      <p:nvGrpSpPr>
+        <p:cNvPr id="1" name=""/>
+        <p:cNvGrpSpPr/>
+        <p:nvPr/>
+      </p:nvGrpSpPr>
+      <p:grpSpPr>
+        <a:xfrm>
+          <a:off x="0" y="0"/>
+          <a:ext cx="0" cy="0"/>
+          <a:chOff x="0" y="0"/>
+          <a:chExt cx="0" cy="0"/>
+        </a:xfrm>
+      </p:grpSpPr>
+      <p:sp>
+        <p:nvSpPr>
+          <p:cNvPr id="2" name="Título 1"/>
+          <p:cNvSpPr>
+            <a:spLocks noGrp="1"/>
+          </p:cNvSpPr>
+          <p:nvPr>
+            <p:ph type="title"/>
+          </p:nvPr>
+        </p:nvSpPr>
+        <p:spPr/>
+        <p:txBody>
+          <a:bodyPr>
+            <a:normAutofit fontScale="90000"/>
+          </a:bodyPr>
+          <a:lstStyle/>
+          <a:p>
+            <a:r>
+              <a:rPr lang="es-AR" b="1" dirty="0" smtClean="0"/>
+              <a:t>Archivo: pasajero.py </a:t>
+            </a:r>
+            <a:endParaRPr lang="es-AR" b="1" dirty="0"/>
+          </a:p>
+        </p:txBody>
+      </p:sp>
+      <p:sp>
+        <p:nvSpPr>
+          <p:cNvPr id="3" name="Marcador de texto 2"/>
+          <p:cNvSpPr>
+            <a:spLocks noGrp="1"/>
+          </p:cNvSpPr>
+          <p:nvPr>
+            <p:ph type="body" idx="1"/>
+          </p:nvPr>
+        </p:nvSpPr>
+        <p:spPr/>
+        <p:txBody>
+          <a:bodyPr/>
+          <a:lstStyle/>
+          <a:p>
+            <a:r>
+              <a:rPr lang="es-MX" b="1" dirty="0">
+                <a:solidFill>
+                  <a:schemeClr val="tx1"/>
+                </a:solidFill>
+              </a:rPr>
+              <a:t>Define la clase Pasajero y el Árbol AVL para almacenarlos.</a:t>
+            </a:r>
+          </a:p>
+          <a:p>
+            <a:r>
+              <a:rPr lang="es-MX" b="1" dirty="0">
+                <a:solidFill>
+                  <a:schemeClr val="tx1"/>
+                </a:solidFill>
+              </a:rPr>
+              <a:t>Guarda DNI, nombre, nacionalidad y equipaje.</a:t>
+            </a:r>
+          </a:p>
+          <a:p>
+            <a:r>
+              <a:rPr lang="es-MX" b="1" dirty="0">
+                <a:solidFill>
+                  <a:schemeClr val="tx1"/>
+                </a:solidFill>
+              </a:rPr>
+              <a:t>Se controla el peso total del equipaje.</a:t>
+            </a:r>
+          </a:p>
+          <a:p>
+            <a:r>
+              <a:rPr lang="es-MX" b="1" dirty="0">
+                <a:solidFill>
+                  <a:schemeClr val="tx1"/>
+                </a:solidFill>
+              </a:rPr>
+              <a:t>Uso de árbol AVL → permite búsquedas rápidas por DNI.</a:t>
+            </a:r>
+          </a:p>
+          <a:p>
+            <a:pPr marL="114300" indent="0">
+              <a:buNone/>
+            </a:pPr>
+            <a:endParaRPr lang="es-AR" dirty="0"/>
+          </a:p>
+        </p:txBody>
+      </p:sp>
+    </p:spTree>
+    <p:extLst>
+      <p:ext uri="{BB962C8B-B14F-4D97-AF65-F5344CB8AC3E}">
+        <p14:creationId xmlns:p14="http://schemas.microsoft.com/office/powerpoint/2010/main" val="799884456"/>
+      </p:ext>
+    </p:extLst>
+  </p:cSld>
+  <p:clrMapOvr>
+    <a:masterClrMapping/>
+  </p:clrMapOvr>
+</p:sld>
+</file>
+
+<file path=ppt/slides/slide8.xml><?xml version="1.0" encoding="utf-8"?>
+<p:sld xmlns:a="http://schemas.openxmlformats.org/drawingml/2006/main" xmlns:r="http://schemas.openxmlformats.org/officeDocument/2006/relationships" xmlns:p="http://schemas.openxmlformats.org/presentationml/2006/main">
+  <p:cSld>
+    <p:bg>
+      <p:bgPr>
+        <a:blipFill dpi="0" rotWithShape="1">
+          <a:blip r:embed="rId2">
+            <a:lum/>
+          </a:blip>
+          <a:srcRect/>
+          <a:stretch>
+            <a:fillRect t="-9000" b="-9000"/>
+          </a:stretch>
+        </a:blipFill>
+        <a:effectLst/>
+      </p:bgPr>
+    </p:bg>
+    <p:spTree>
+      <p:nvGrpSpPr>
+        <p:cNvPr id="1" name=""/>
+        <p:cNvGrpSpPr/>
+        <p:nvPr/>
+      </p:nvGrpSpPr>
+      <p:grpSpPr>
+        <a:xfrm>
+          <a:off x="0" y="0"/>
+          <a:ext cx="0" cy="0"/>
+          <a:chOff x="0" y="0"/>
+          <a:chExt cx="0" cy="0"/>
+        </a:xfrm>
+      </p:grpSpPr>
+      <p:sp>
+        <p:nvSpPr>
+          <p:cNvPr id="2" name="Título 1"/>
+          <p:cNvSpPr>
+            <a:spLocks noGrp="1"/>
+          </p:cNvSpPr>
+          <p:nvPr>
+            <p:ph type="title"/>
+          </p:nvPr>
+        </p:nvSpPr>
+        <p:spPr/>
+        <p:txBody>
+          <a:bodyPr>
+            <a:normAutofit fontScale="90000"/>
+          </a:bodyPr>
+          <a:lstStyle/>
+          <a:p>
+            <a:r>
+              <a:rPr lang="es-AR" b="1" dirty="0" smtClean="0"/>
+              <a:t>Archivo:  grafos_vuelos.py</a:t>
+            </a:r>
+            <a:endParaRPr lang="es-AR" b="1" dirty="0"/>
+          </a:p>
+        </p:txBody>
+      </p:sp>
+      <p:sp>
+        <p:nvSpPr>
+          <p:cNvPr id="3" name="Marcador de texto 2"/>
+          <p:cNvSpPr>
+            <a:spLocks noGrp="1"/>
+          </p:cNvSpPr>
+          <p:nvPr>
+            <p:ph type="body" idx="1"/>
+          </p:nvPr>
+        </p:nvSpPr>
+        <p:spPr/>
+        <p:txBody>
+          <a:bodyPr/>
+          <a:lstStyle/>
+          <a:p>
+            <a:r>
+              <a:rPr lang="es-MX" dirty="0" smtClean="0">
+                <a:solidFill>
+                  <a:schemeClr val="tx1"/>
+                </a:solidFill>
+              </a:rPr>
+              <a:t>Realizamos un grafo para representar las conexiones  y escalas de vuelos </a:t>
+            </a:r>
+          </a:p>
+          <a:p>
+            <a:r>
+              <a:rPr lang="es-MX" dirty="0" smtClean="0">
+                <a:solidFill>
+                  <a:schemeClr val="tx1"/>
+                </a:solidFill>
+              </a:rPr>
+              <a:t>Por lo tanto nuestro grafo es: Dirigido y Ponderado(tiene peso)</a:t>
+            </a:r>
+          </a:p>
+          <a:p>
+            <a:endParaRPr lang="es-MX" dirty="0" smtClean="0">
+              <a:solidFill>
+                <a:schemeClr val="tx1"/>
+              </a:solidFill>
+            </a:endParaRPr>
+          </a:p>
+          <a:p>
+            <a:r>
+              <a:rPr lang="es-MX" dirty="0">
+                <a:solidFill>
+                  <a:schemeClr val="tx1"/>
+                </a:solidFill>
+              </a:rPr>
+              <a:t>cada aeropuerto es un </a:t>
+            </a:r>
+            <a:r>
+              <a:rPr lang="es-MX" b="1" dirty="0">
+                <a:solidFill>
+                  <a:schemeClr val="tx1"/>
+                </a:solidFill>
+              </a:rPr>
+              <a:t>nodo</a:t>
+            </a:r>
+            <a:r>
+              <a:rPr lang="es-MX" dirty="0">
+                <a:solidFill>
+                  <a:schemeClr val="tx1"/>
+                </a:solidFill>
+              </a:rPr>
+              <a:t>,</a:t>
+            </a:r>
+          </a:p>
+          <a:p>
+            <a:r>
+              <a:rPr lang="es-MX" dirty="0">
+                <a:solidFill>
+                  <a:schemeClr val="tx1"/>
+                </a:solidFill>
+              </a:rPr>
+              <a:t>cada vuelo es una </a:t>
+            </a:r>
+            <a:r>
+              <a:rPr lang="es-MX" b="1" dirty="0">
+                <a:solidFill>
+                  <a:schemeClr val="tx1"/>
+                </a:solidFill>
+              </a:rPr>
+              <a:t>conexión</a:t>
+            </a:r>
+            <a:r>
+              <a:rPr lang="es-MX" dirty="0">
+                <a:solidFill>
+                  <a:schemeClr val="tx1"/>
+                </a:solidFill>
+              </a:rPr>
+              <a:t>,</a:t>
+            </a:r>
+          </a:p>
+          <a:p>
+            <a:r>
+              <a:rPr lang="es-MX" dirty="0">
+                <a:solidFill>
+                  <a:schemeClr val="tx1"/>
+                </a:solidFill>
+              </a:rPr>
+              <a:t>y la duración del vuelo es el </a:t>
+            </a:r>
+            <a:r>
+              <a:rPr lang="es-MX" b="1" dirty="0">
+                <a:solidFill>
+                  <a:schemeClr val="tx1"/>
+                </a:solidFill>
+              </a:rPr>
+              <a:t>peso</a:t>
+            </a:r>
+            <a:r>
+              <a:rPr lang="es-MX" dirty="0">
+                <a:solidFill>
+                  <a:schemeClr val="tx1"/>
+                </a:solidFill>
+              </a:rPr>
+              <a:t> de esa conexión.</a:t>
+            </a:r>
+          </a:p>
+          <a:p>
+            <a:r>
+              <a:rPr lang="es-MX" dirty="0">
+                <a:solidFill>
+                  <a:schemeClr val="tx1"/>
+                </a:solidFill>
+              </a:rPr>
+              <a:t>Con esto, el sistema puede calcular la </a:t>
+            </a:r>
+            <a:r>
+              <a:rPr lang="es-MX" b="1" dirty="0">
+                <a:solidFill>
+                  <a:schemeClr val="tx1"/>
+                </a:solidFill>
+              </a:rPr>
+              <a:t>ruta más rápida</a:t>
+            </a:r>
+            <a:r>
+              <a:rPr lang="es-MX" dirty="0">
+                <a:solidFill>
+                  <a:schemeClr val="tx1"/>
+                </a:solidFill>
+              </a:rPr>
+              <a:t> entre dos aeropuertos</a:t>
+            </a:r>
+            <a:r>
+              <a:rPr lang="es-MX" dirty="0" smtClean="0">
+                <a:solidFill>
+                  <a:schemeClr val="tx1"/>
+                </a:solidFill>
+              </a:rPr>
+              <a:t>.</a:t>
+            </a:r>
+          </a:p>
+          <a:p>
+            <a:endParaRPr lang="es-MX" dirty="0">
+              <a:solidFill>
+                <a:schemeClr val="tx1"/>
+              </a:solidFill>
+            </a:endParaRPr>
+          </a:p>
+          <a:p>
+            <a:r>
+              <a:rPr lang="es-MX" b="1" dirty="0">
+                <a:solidFill>
+                  <a:schemeClr val="tx1"/>
+                </a:solidFill>
+              </a:rPr>
+              <a:t>Se usa </a:t>
+            </a:r>
+            <a:r>
+              <a:rPr lang="es-MX" b="1" dirty="0" err="1">
+                <a:solidFill>
+                  <a:schemeClr val="tx1"/>
+                </a:solidFill>
+              </a:rPr>
+              <a:t>Dijkstra</a:t>
+            </a:r>
+            <a:r>
+              <a:rPr lang="es-MX" b="1" dirty="0">
+                <a:solidFill>
+                  <a:schemeClr val="tx1"/>
+                </a:solidFill>
+              </a:rPr>
+              <a:t> para obtener la ruta más rápida</a:t>
+            </a:r>
+          </a:p>
+          <a:p>
+            <a:endParaRPr lang="es-AR" dirty="0"/>
+          </a:p>
+        </p:txBody>
+      </p:sp>
+    </p:spTree>
+    <p:extLst>
+      <p:ext uri="{BB962C8B-B14F-4D97-AF65-F5344CB8AC3E}">
+        <p14:creationId xmlns:p14="http://schemas.microsoft.com/office/powerpoint/2010/main" val="2662057018"/>
       </p:ext>
     </p:extLst>
   </p:cSld>
